--- a/presentation/Licenta-AutoMarketplace.pptx
+++ b/presentation/Licenta-AutoMarketplace.pptx
@@ -5,26 +5,26 @@
     <p:sldMasterId id="2147483648" r:id="rId1"/>
   </p:sldMasterIdLst>
   <p:sldIdLst>
-    <p:sldId id="256" r:id="rId2"/>
-    <p:sldId id="257" r:id="rId3"/>
-    <p:sldId id="258" r:id="rId4"/>
-    <p:sldId id="259" r:id="rId5"/>
-    <p:sldId id="260" r:id="rId6"/>
-    <p:sldId id="261" r:id="rId7"/>
-    <p:sldId id="262" r:id="rId8"/>
-    <p:sldId id="263" r:id="rId9"/>
-    <p:sldId id="264" r:id="rId10"/>
-    <p:sldId id="265" r:id="rId11"/>
-    <p:sldId id="266" r:id="rId12"/>
-    <p:sldId id="267" r:id="rId13"/>
-    <p:sldId id="268" r:id="rId14"/>
-    <p:sldId id="269" r:id="rId15"/>
-    <p:sldId id="270" r:id="rId16"/>
-    <p:sldId id="271" r:id="rId17"/>
-    <p:sldId id="272" r:id="rId18"/>
-    <p:sldId id="273" r:id="rId19"/>
+    <p:sldId id="256" r:id="rId7"/>
+    <p:sldId id="257" r:id="rId8"/>
+    <p:sldId id="258" r:id="rId9"/>
+    <p:sldId id="259" r:id="rId10"/>
+    <p:sldId id="260" r:id="rId11"/>
+    <p:sldId id="261" r:id="rId12"/>
+    <p:sldId id="262" r:id="rId13"/>
+    <p:sldId id="263" r:id="rId14"/>
+    <p:sldId id="264" r:id="rId15"/>
+    <p:sldId id="265" r:id="rId16"/>
+    <p:sldId id="266" r:id="rId17"/>
+    <p:sldId id="267" r:id="rId18"/>
+    <p:sldId id="268" r:id="rId19"/>
+    <p:sldId id="269" r:id="rId20"/>
+    <p:sldId id="270" r:id="rId21"/>
+    <p:sldId id="271" r:id="rId22"/>
+    <p:sldId id="272" r:id="rId23"/>
+    <p:sldId id="273" r:id="rId24"/>
   </p:sldIdLst>
-  <p:sldSz cx="12192000" cy="6858000"/>
+  <p:sldSz cx="12191695" cy="6858000" type="screen4x3"/>
   <p:notesSz cx="6858000" cy="9144000"/>
   <p:defaultTextStyle>
     <a:defPPr>
@@ -121,22 +121,6 @@
       </a:defRPr>
     </a:lvl9pPr>
   </p:defaultTextStyle>
-  <p:extLst>
-    <p:ext uri="{EFAFB233-063F-42B5-8137-9DF3F51BA10A}">
-      <p15:sldGuideLst xmlns:p15="http://schemas.microsoft.com/office/powerpoint/2012/main">
-        <p15:guide id="1" orient="horz" pos="2160">
-          <p15:clr>
-            <a:srgbClr val="A4A3A4"/>
-          </p15:clr>
-        </p15:guide>
-        <p15:guide id="2" pos="2880">
-          <p15:clr>
-            <a:srgbClr val="A4A3A4"/>
-          </p15:clr>
-        </p15:guide>
-      </p15:sldGuideLst>
-    </p:ext>
-  </p:extLst>
 </p:presentation>
 </file>
 
@@ -178,9 +162,10 @@
           <a:lstStyle/>
           <a:p>
             <a:r>
-              <a:rPr lang="en-US"/>
+              <a:rPr lang="en-US" smtClean="0"/>
               <a:t>Click to edit Master title style</a:t>
             </a:r>
+            <a:endParaRPr lang="en-US"/>
           </a:p>
         </p:txBody>
       </p:sp>
@@ -296,9 +281,10 @@
           </a:lstStyle>
           <a:p>
             <a:r>
-              <a:rPr lang="en-US"/>
+              <a:rPr lang="en-US" smtClean="0"/>
               <a:t>Click to edit Master subtitle style</a:t>
             </a:r>
+            <a:endParaRPr lang="en-US"/>
           </a:p>
         </p:txBody>
       </p:sp>
@@ -319,7 +305,7 @@
           <a:p>
             <a:fld id="{5BCAD085-E8A6-8845-BD4E-CB4CCA059FC4}" type="datetimeFigureOut">
               <a:rPr lang="en-US" smtClean="0"/>
-              <a:t>6/29/2026</a:t>
+              <a:t>1/27/13</a:t>
             </a:fld>
             <a:endParaRPr lang="en-US"/>
           </a:p>
@@ -413,9 +399,10 @@
           <a:lstStyle/>
           <a:p>
             <a:r>
-              <a:rPr lang="en-US"/>
+              <a:rPr lang="en-US" smtClean="0"/>
               <a:t>Click to edit Master title style</a:t>
             </a:r>
+            <a:endParaRPr lang="en-US"/>
           </a:p>
         </p:txBody>
       </p:sp>
@@ -436,37 +423,38 @@
           <a:p>
             <a:pPr lvl="0"/>
             <a:r>
-              <a:rPr lang="en-US"/>
+              <a:rPr lang="en-US" smtClean="0"/>
               <a:t>Click to edit Master text styles</a:t>
             </a:r>
           </a:p>
           <a:p>
             <a:pPr lvl="1"/>
             <a:r>
-              <a:rPr lang="en-US"/>
+              <a:rPr lang="en-US" smtClean="0"/>
               <a:t>Second level</a:t>
             </a:r>
           </a:p>
           <a:p>
             <a:pPr lvl="2"/>
             <a:r>
-              <a:rPr lang="en-US"/>
+              <a:rPr lang="en-US" smtClean="0"/>
               <a:t>Third level</a:t>
             </a:r>
           </a:p>
           <a:p>
             <a:pPr lvl="3"/>
             <a:r>
-              <a:rPr lang="en-US"/>
+              <a:rPr lang="en-US" smtClean="0"/>
               <a:t>Fourth level</a:t>
             </a:r>
           </a:p>
           <a:p>
             <a:pPr lvl="4"/>
             <a:r>
-              <a:rPr lang="en-US"/>
+              <a:rPr lang="en-US" smtClean="0"/>
               <a:t>Fifth level</a:t>
             </a:r>
+            <a:endParaRPr lang="en-US"/>
           </a:p>
         </p:txBody>
       </p:sp>
@@ -487,7 +475,7 @@
           <a:p>
             <a:fld id="{5BCAD085-E8A6-8845-BD4E-CB4CCA059FC4}" type="datetimeFigureOut">
               <a:rPr lang="en-US" smtClean="0"/>
-              <a:t>6/29/2026</a:t>
+              <a:t>1/27/13</a:t>
             </a:fld>
             <a:endParaRPr lang="en-US"/>
           </a:p>
@@ -586,9 +574,10 @@
           <a:lstStyle/>
           <a:p>
             <a:r>
-              <a:rPr lang="en-US"/>
+              <a:rPr lang="en-US" smtClean="0"/>
               <a:t>Click to edit Master title style</a:t>
             </a:r>
+            <a:endParaRPr lang="en-US"/>
           </a:p>
         </p:txBody>
       </p:sp>
@@ -614,37 +603,38 @@
           <a:p>
             <a:pPr lvl="0"/>
             <a:r>
-              <a:rPr lang="en-US"/>
+              <a:rPr lang="en-US" smtClean="0"/>
               <a:t>Click to edit Master text styles</a:t>
             </a:r>
           </a:p>
           <a:p>
             <a:pPr lvl="1"/>
             <a:r>
-              <a:rPr lang="en-US"/>
+              <a:rPr lang="en-US" smtClean="0"/>
               <a:t>Second level</a:t>
             </a:r>
           </a:p>
           <a:p>
             <a:pPr lvl="2"/>
             <a:r>
-              <a:rPr lang="en-US"/>
+              <a:rPr lang="en-US" smtClean="0"/>
               <a:t>Third level</a:t>
             </a:r>
           </a:p>
           <a:p>
             <a:pPr lvl="3"/>
             <a:r>
-              <a:rPr lang="en-US"/>
+              <a:rPr lang="en-US" smtClean="0"/>
               <a:t>Fourth level</a:t>
             </a:r>
           </a:p>
           <a:p>
             <a:pPr lvl="4"/>
             <a:r>
-              <a:rPr lang="en-US"/>
+              <a:rPr lang="en-US" smtClean="0"/>
               <a:t>Fifth level</a:t>
             </a:r>
+            <a:endParaRPr lang="en-US"/>
           </a:p>
         </p:txBody>
       </p:sp>
@@ -665,7 +655,7 @@
           <a:p>
             <a:fld id="{5BCAD085-E8A6-8845-BD4E-CB4CCA059FC4}" type="datetimeFigureOut">
               <a:rPr lang="en-US" smtClean="0"/>
-              <a:t>6/29/2026</a:t>
+              <a:t>1/27/13</a:t>
             </a:fld>
             <a:endParaRPr lang="en-US"/>
           </a:p>
@@ -759,9 +749,10 @@
           <a:lstStyle/>
           <a:p>
             <a:r>
-              <a:rPr lang="en-US"/>
+              <a:rPr lang="en-US" smtClean="0"/>
               <a:t>Click to edit Master title style</a:t>
             </a:r>
+            <a:endParaRPr lang="en-US"/>
           </a:p>
         </p:txBody>
       </p:sp>
@@ -782,37 +773,38 @@
           <a:p>
             <a:pPr lvl="0"/>
             <a:r>
-              <a:rPr lang="en-US"/>
+              <a:rPr lang="en-US" smtClean="0"/>
               <a:t>Click to edit Master text styles</a:t>
             </a:r>
           </a:p>
           <a:p>
             <a:pPr lvl="1"/>
             <a:r>
-              <a:rPr lang="en-US"/>
+              <a:rPr lang="en-US" smtClean="0"/>
               <a:t>Second level</a:t>
             </a:r>
           </a:p>
           <a:p>
             <a:pPr lvl="2"/>
             <a:r>
-              <a:rPr lang="en-US"/>
+              <a:rPr lang="en-US" smtClean="0"/>
               <a:t>Third level</a:t>
             </a:r>
           </a:p>
           <a:p>
             <a:pPr lvl="3"/>
             <a:r>
-              <a:rPr lang="en-US"/>
+              <a:rPr lang="en-US" smtClean="0"/>
               <a:t>Fourth level</a:t>
             </a:r>
           </a:p>
           <a:p>
             <a:pPr lvl="4"/>
             <a:r>
-              <a:rPr lang="en-US"/>
+              <a:rPr lang="en-US" smtClean="0"/>
               <a:t>Fifth level</a:t>
             </a:r>
+            <a:endParaRPr lang="en-US"/>
           </a:p>
         </p:txBody>
       </p:sp>
@@ -833,7 +825,7 @@
           <a:p>
             <a:fld id="{5BCAD085-E8A6-8845-BD4E-CB4CCA059FC4}" type="datetimeFigureOut">
               <a:rPr lang="en-US" smtClean="0"/>
-              <a:t>6/29/2026</a:t>
+              <a:t>1/27/13</a:t>
             </a:fld>
             <a:endParaRPr lang="en-US"/>
           </a:p>
@@ -936,9 +928,10 @@
           </a:lstStyle>
           <a:p>
             <a:r>
-              <a:rPr lang="en-US"/>
+              <a:rPr lang="en-US" smtClean="0"/>
               <a:t>Click to edit Master title style</a:t>
             </a:r>
+            <a:endParaRPr lang="en-US"/>
           </a:p>
         </p:txBody>
       </p:sp>
@@ -1055,7 +1048,7 @@
           <a:p>
             <a:pPr lvl="0"/>
             <a:r>
-              <a:rPr lang="en-US"/>
+              <a:rPr lang="en-US" smtClean="0"/>
               <a:t>Click to edit Master text styles</a:t>
             </a:r>
           </a:p>
@@ -1078,7 +1071,7 @@
           <a:p>
             <a:fld id="{5BCAD085-E8A6-8845-BD4E-CB4CCA059FC4}" type="datetimeFigureOut">
               <a:rPr lang="en-US" smtClean="0"/>
-              <a:t>6/29/2026</a:t>
+              <a:t>1/27/13</a:t>
             </a:fld>
             <a:endParaRPr lang="en-US"/>
           </a:p>
@@ -1172,9 +1165,10 @@
           <a:lstStyle/>
           <a:p>
             <a:r>
-              <a:rPr lang="en-US"/>
+              <a:rPr lang="en-US" smtClean="0"/>
               <a:t>Click to edit Master title style</a:t>
             </a:r>
+            <a:endParaRPr lang="en-US"/>
           </a:p>
         </p:txBody>
       </p:sp>
@@ -1228,37 +1222,38 @@
           <a:p>
             <a:pPr lvl="0"/>
             <a:r>
-              <a:rPr lang="en-US"/>
+              <a:rPr lang="en-US" smtClean="0"/>
               <a:t>Click to edit Master text styles</a:t>
             </a:r>
           </a:p>
           <a:p>
             <a:pPr lvl="1"/>
             <a:r>
-              <a:rPr lang="en-US"/>
+              <a:rPr lang="en-US" smtClean="0"/>
               <a:t>Second level</a:t>
             </a:r>
           </a:p>
           <a:p>
             <a:pPr lvl="2"/>
             <a:r>
-              <a:rPr lang="en-US"/>
+              <a:rPr lang="en-US" smtClean="0"/>
               <a:t>Third level</a:t>
             </a:r>
           </a:p>
           <a:p>
             <a:pPr lvl="3"/>
             <a:r>
-              <a:rPr lang="en-US"/>
+              <a:rPr lang="en-US" smtClean="0"/>
               <a:t>Fourth level</a:t>
             </a:r>
           </a:p>
           <a:p>
             <a:pPr lvl="4"/>
             <a:r>
-              <a:rPr lang="en-US"/>
+              <a:rPr lang="en-US" smtClean="0"/>
               <a:t>Fifth level</a:t>
             </a:r>
+            <a:endParaRPr lang="en-US"/>
           </a:p>
         </p:txBody>
       </p:sp>
@@ -1312,37 +1307,38 @@
           <a:p>
             <a:pPr lvl="0"/>
             <a:r>
-              <a:rPr lang="en-US"/>
+              <a:rPr lang="en-US" smtClean="0"/>
               <a:t>Click to edit Master text styles</a:t>
             </a:r>
           </a:p>
           <a:p>
             <a:pPr lvl="1"/>
             <a:r>
-              <a:rPr lang="en-US"/>
+              <a:rPr lang="en-US" smtClean="0"/>
               <a:t>Second level</a:t>
             </a:r>
           </a:p>
           <a:p>
             <a:pPr lvl="2"/>
             <a:r>
-              <a:rPr lang="en-US"/>
+              <a:rPr lang="en-US" smtClean="0"/>
               <a:t>Third level</a:t>
             </a:r>
           </a:p>
           <a:p>
             <a:pPr lvl="3"/>
             <a:r>
-              <a:rPr lang="en-US"/>
+              <a:rPr lang="en-US" smtClean="0"/>
               <a:t>Fourth level</a:t>
             </a:r>
           </a:p>
           <a:p>
             <a:pPr lvl="4"/>
             <a:r>
-              <a:rPr lang="en-US"/>
+              <a:rPr lang="en-US" smtClean="0"/>
               <a:t>Fifth level</a:t>
             </a:r>
+            <a:endParaRPr lang="en-US"/>
           </a:p>
         </p:txBody>
       </p:sp>
@@ -1363,7 +1359,7 @@
           <a:p>
             <a:fld id="{5BCAD085-E8A6-8845-BD4E-CB4CCA059FC4}" type="datetimeFigureOut">
               <a:rPr lang="en-US" smtClean="0"/>
-              <a:t>6/29/2026</a:t>
+              <a:t>1/27/13</a:t>
             </a:fld>
             <a:endParaRPr lang="en-US"/>
           </a:p>
@@ -1461,9 +1457,10 @@
           </a:lstStyle>
           <a:p>
             <a:r>
-              <a:rPr lang="en-US"/>
+              <a:rPr lang="en-US" smtClean="0"/>
               <a:t>Click to edit Master title style</a:t>
             </a:r>
+            <a:endParaRPr lang="en-US"/>
           </a:p>
         </p:txBody>
       </p:sp>
@@ -1526,7 +1523,7 @@
           <a:p>
             <a:pPr lvl="0"/>
             <a:r>
-              <a:rPr lang="en-US"/>
+              <a:rPr lang="en-US" smtClean="0"/>
               <a:t>Click to edit Master text styles</a:t>
             </a:r>
           </a:p>
@@ -1582,37 +1579,38 @@
           <a:p>
             <a:pPr lvl="0"/>
             <a:r>
-              <a:rPr lang="en-US"/>
+              <a:rPr lang="en-US" smtClean="0"/>
               <a:t>Click to edit Master text styles</a:t>
             </a:r>
           </a:p>
           <a:p>
             <a:pPr lvl="1"/>
             <a:r>
-              <a:rPr lang="en-US"/>
+              <a:rPr lang="en-US" smtClean="0"/>
               <a:t>Second level</a:t>
             </a:r>
           </a:p>
           <a:p>
             <a:pPr lvl="2"/>
             <a:r>
-              <a:rPr lang="en-US"/>
+              <a:rPr lang="en-US" smtClean="0"/>
               <a:t>Third level</a:t>
             </a:r>
           </a:p>
           <a:p>
             <a:pPr lvl="3"/>
             <a:r>
-              <a:rPr lang="en-US"/>
+              <a:rPr lang="en-US" smtClean="0"/>
               <a:t>Fourth level</a:t>
             </a:r>
           </a:p>
           <a:p>
             <a:pPr lvl="4"/>
             <a:r>
-              <a:rPr lang="en-US"/>
+              <a:rPr lang="en-US" smtClean="0"/>
               <a:t>Fifth level</a:t>
             </a:r>
+            <a:endParaRPr lang="en-US"/>
           </a:p>
         </p:txBody>
       </p:sp>
@@ -1675,7 +1673,7 @@
           <a:p>
             <a:pPr lvl="0"/>
             <a:r>
-              <a:rPr lang="en-US"/>
+              <a:rPr lang="en-US" smtClean="0"/>
               <a:t>Click to edit Master text styles</a:t>
             </a:r>
           </a:p>
@@ -1731,37 +1729,38 @@
           <a:p>
             <a:pPr lvl="0"/>
             <a:r>
-              <a:rPr lang="en-US"/>
+              <a:rPr lang="en-US" smtClean="0"/>
               <a:t>Click to edit Master text styles</a:t>
             </a:r>
           </a:p>
           <a:p>
             <a:pPr lvl="1"/>
             <a:r>
-              <a:rPr lang="en-US"/>
+              <a:rPr lang="en-US" smtClean="0"/>
               <a:t>Second level</a:t>
             </a:r>
           </a:p>
           <a:p>
             <a:pPr lvl="2"/>
             <a:r>
-              <a:rPr lang="en-US"/>
+              <a:rPr lang="en-US" smtClean="0"/>
               <a:t>Third level</a:t>
             </a:r>
           </a:p>
           <a:p>
             <a:pPr lvl="3"/>
             <a:r>
-              <a:rPr lang="en-US"/>
+              <a:rPr lang="en-US" smtClean="0"/>
               <a:t>Fourth level</a:t>
             </a:r>
           </a:p>
           <a:p>
             <a:pPr lvl="4"/>
             <a:r>
-              <a:rPr lang="en-US"/>
+              <a:rPr lang="en-US" smtClean="0"/>
               <a:t>Fifth level</a:t>
             </a:r>
+            <a:endParaRPr lang="en-US"/>
           </a:p>
         </p:txBody>
       </p:sp>
@@ -1782,7 +1781,7 @@
           <a:p>
             <a:fld id="{5BCAD085-E8A6-8845-BD4E-CB4CCA059FC4}" type="datetimeFigureOut">
               <a:rPr lang="en-US" smtClean="0"/>
-              <a:t>6/29/2026</a:t>
+              <a:t>1/27/13</a:t>
             </a:fld>
             <a:endParaRPr lang="en-US"/>
           </a:p>
@@ -1876,9 +1875,10 @@
           <a:lstStyle/>
           <a:p>
             <a:r>
-              <a:rPr lang="en-US"/>
+              <a:rPr lang="en-US" smtClean="0"/>
               <a:t>Click to edit Master title style</a:t>
             </a:r>
+            <a:endParaRPr lang="en-US"/>
           </a:p>
         </p:txBody>
       </p:sp>
@@ -1899,7 +1899,7 @@
           <a:p>
             <a:fld id="{5BCAD085-E8A6-8845-BD4E-CB4CCA059FC4}" type="datetimeFigureOut">
               <a:rPr lang="en-US" smtClean="0"/>
-              <a:t>6/29/2026</a:t>
+              <a:t>1/27/13</a:t>
             </a:fld>
             <a:endParaRPr lang="en-US"/>
           </a:p>
@@ -1994,7 +1994,7 @@
           <a:p>
             <a:fld id="{5BCAD085-E8A6-8845-BD4E-CB4CCA059FC4}" type="datetimeFigureOut">
               <a:rPr lang="en-US" smtClean="0"/>
-              <a:t>6/29/2026</a:t>
+              <a:t>1/27/13</a:t>
             </a:fld>
             <a:endParaRPr lang="en-US"/>
           </a:p>
@@ -2097,9 +2097,10 @@
           </a:lstStyle>
           <a:p>
             <a:r>
-              <a:rPr lang="en-US"/>
+              <a:rPr lang="en-US" smtClean="0"/>
               <a:t>Click to edit Master title style</a:t>
             </a:r>
+            <a:endParaRPr lang="en-US"/>
           </a:p>
         </p:txBody>
       </p:sp>
@@ -2153,37 +2154,38 @@
           <a:p>
             <a:pPr lvl="0"/>
             <a:r>
-              <a:rPr lang="en-US"/>
+              <a:rPr lang="en-US" smtClean="0"/>
               <a:t>Click to edit Master text styles</a:t>
             </a:r>
           </a:p>
           <a:p>
             <a:pPr lvl="1"/>
             <a:r>
-              <a:rPr lang="en-US"/>
+              <a:rPr lang="en-US" smtClean="0"/>
               <a:t>Second level</a:t>
             </a:r>
           </a:p>
           <a:p>
             <a:pPr lvl="2"/>
             <a:r>
-              <a:rPr lang="en-US"/>
+              <a:rPr lang="en-US" smtClean="0"/>
               <a:t>Third level</a:t>
             </a:r>
           </a:p>
           <a:p>
             <a:pPr lvl="3"/>
             <a:r>
-              <a:rPr lang="en-US"/>
+              <a:rPr lang="en-US" smtClean="0"/>
               <a:t>Fourth level</a:t>
             </a:r>
           </a:p>
           <a:p>
             <a:pPr lvl="4"/>
             <a:r>
-              <a:rPr lang="en-US"/>
+              <a:rPr lang="en-US" smtClean="0"/>
               <a:t>Fifth level</a:t>
             </a:r>
+            <a:endParaRPr lang="en-US"/>
           </a:p>
         </p:txBody>
       </p:sp>
@@ -2246,7 +2248,7 @@
           <a:p>
             <a:pPr lvl="0"/>
             <a:r>
-              <a:rPr lang="en-US"/>
+              <a:rPr lang="en-US" smtClean="0"/>
               <a:t>Click to edit Master text styles</a:t>
             </a:r>
           </a:p>
@@ -2269,7 +2271,7 @@
           <a:p>
             <a:fld id="{5BCAD085-E8A6-8845-BD4E-CB4CCA059FC4}" type="datetimeFigureOut">
               <a:rPr lang="en-US" smtClean="0"/>
-              <a:t>6/29/2026</a:t>
+              <a:t>1/27/13</a:t>
             </a:fld>
             <a:endParaRPr lang="en-US"/>
           </a:p>
@@ -2372,9 +2374,10 @@
           </a:lstStyle>
           <a:p>
             <a:r>
-              <a:rPr lang="en-US"/>
+              <a:rPr lang="en-US" smtClean="0"/>
               <a:t>Click to edit Master title style</a:t>
             </a:r>
+            <a:endParaRPr lang="en-US"/>
           </a:p>
         </p:txBody>
       </p:sp>
@@ -2498,7 +2501,7 @@
           <a:p>
             <a:pPr lvl="0"/>
             <a:r>
-              <a:rPr lang="en-US"/>
+              <a:rPr lang="en-US" smtClean="0"/>
               <a:t>Click to edit Master text styles</a:t>
             </a:r>
           </a:p>
@@ -2521,7 +2524,7 @@
           <a:p>
             <a:fld id="{5BCAD085-E8A6-8845-BD4E-CB4CCA059FC4}" type="datetimeFigureOut">
               <a:rPr lang="en-US" smtClean="0"/>
-              <a:t>6/29/2026</a:t>
+              <a:t>1/27/13</a:t>
             </a:fld>
             <a:endParaRPr lang="en-US"/>
           </a:p>
@@ -2630,9 +2633,10 @@
           <a:lstStyle/>
           <a:p>
             <a:r>
-              <a:rPr lang="en-US"/>
+              <a:rPr lang="en-US" smtClean="0"/>
               <a:t>Click to edit Master title style</a:t>
             </a:r>
+            <a:endParaRPr lang="en-US"/>
           </a:p>
         </p:txBody>
       </p:sp>
@@ -2663,37 +2667,38 @@
           <a:p>
             <a:pPr lvl="0"/>
             <a:r>
-              <a:rPr lang="en-US"/>
+              <a:rPr lang="en-US" smtClean="0"/>
               <a:t>Click to edit Master text styles</a:t>
             </a:r>
           </a:p>
           <a:p>
             <a:pPr lvl="1"/>
             <a:r>
-              <a:rPr lang="en-US"/>
+              <a:rPr lang="en-US" smtClean="0"/>
               <a:t>Second level</a:t>
             </a:r>
           </a:p>
           <a:p>
             <a:pPr lvl="2"/>
             <a:r>
-              <a:rPr lang="en-US"/>
+              <a:rPr lang="en-US" smtClean="0"/>
               <a:t>Third level</a:t>
             </a:r>
           </a:p>
           <a:p>
             <a:pPr lvl="3"/>
             <a:r>
-              <a:rPr lang="en-US"/>
+              <a:rPr lang="en-US" smtClean="0"/>
               <a:t>Fourth level</a:t>
             </a:r>
           </a:p>
           <a:p>
             <a:pPr lvl="4"/>
             <a:r>
-              <a:rPr lang="en-US"/>
+              <a:rPr lang="en-US" smtClean="0"/>
               <a:t>Fifth level</a:t>
             </a:r>
+            <a:endParaRPr lang="en-US"/>
           </a:p>
         </p:txBody>
       </p:sp>
@@ -2732,7 +2737,7 @@
           <a:p>
             <a:fld id="{5BCAD085-E8A6-8845-BD4E-CB4CCA059FC4}" type="datetimeFigureOut">
               <a:rPr lang="en-US" smtClean="0"/>
-              <a:t>6/29/2026</a:t>
+              <a:t>1/27/13</a:t>
             </a:fld>
             <a:endParaRPr lang="en-US"/>
           </a:p>
@@ -3091,7 +3096,7 @@
 </file>
 
 <file path=ppt/slides/slide1.xml><?xml version="1.0" encoding="utf-8"?>
-<p:sld xmlns:a="http://schemas.openxmlformats.org/drawingml/2006/main" xmlns:r="http://schemas.openxmlformats.org/officeDocument/2006/relationships" xmlns:p="http://schemas.openxmlformats.org/presentationml/2006/main">
+<p:sld xmlns:a="http://schemas.openxmlformats.org/drawingml/2006/main" xmlns:p="http://schemas.openxmlformats.org/presentationml/2006/main" xmlns:r="http://schemas.openxmlformats.org/officeDocument/2006/relationships">
   <p:cSld>
     <p:spTree>
       <p:nvGrpSpPr>
@@ -3099,14 +3104,7 @@
         <p:cNvGrpSpPr/>
         <p:nvPr/>
       </p:nvGrpSpPr>
-      <p:grpSpPr>
-        <a:xfrm>
-          <a:off x="0" y="0"/>
-          <a:ext cx="0" cy="0"/>
-          <a:chOff x="0" y="0"/>
-          <a:chExt cx="0" cy="0"/>
-        </a:xfrm>
-      </p:grpSpPr>
+      <p:grpSpPr/>
       <p:sp>
         <p:nvSpPr>
           <p:cNvPr id="2" name="Rectangle 1"/>
@@ -3148,7 +3146,6 @@
           <a:lstStyle/>
           <a:p>
             <a:pPr algn="ctr"/>
-            <a:endParaRPr/>
           </a:p>
         </p:txBody>
       </p:sp>
@@ -3161,46 +3158,28 @@
         <p:spPr>
           <a:xfrm>
             <a:off x="0" y="640080"/>
-            <a:ext cx="12191695" cy="307777"/>
-          </a:xfrm>
-          <a:prstGeom prst="rect">
-            <a:avLst/>
-          </a:prstGeom>
-          <a:noFill/>
-        </p:spPr>
-        <p:txBody>
-          <a:bodyPr wrap="square" lIns="0" tIns="0" rIns="0" bIns="0" anchor="t">
-            <a:spAutoFit/>
-          </a:bodyPr>
-          <a:lstStyle/>
-          <a:p>
-            <a:pPr algn="ctr"/>
-            <a:r>
-              <a:rPr sz="2000" b="1" dirty="0">
+            <a:ext cx="12191695" cy="457200"/>
+          </a:xfrm>
+          <a:prstGeom prst="rect">
+            <a:avLst/>
+          </a:prstGeom>
+          <a:noFill/>
+        </p:spPr>
+        <p:txBody>
+          <a:bodyPr wrap="square" lIns="0" rIns="0" tIns="0" bIns="0" anchor="t">
+            <a:spAutoFit/>
+          </a:bodyPr>
+          <a:lstStyle/>
+          <a:p>
+            <a:pPr algn="ctr"/>
+            <a:r>
+              <a:rPr sz="2000" b="1">
                 <a:solidFill>
                   <a:srgbClr val="F59E0B"/>
                 </a:solidFill>
                 <a:latin typeface="Calibri"/>
               </a:rPr>
-              <a:t>LUCRARE DE </a:t>
-            </a:r>
-            <a:r>
-              <a:rPr lang="en-US" sz="2000" b="1" dirty="0">
-                <a:solidFill>
-                  <a:srgbClr val="F59E0B"/>
-                </a:solidFill>
-                <a:latin typeface="Calibri"/>
-              </a:rPr>
-              <a:t>DIPLOMA</a:t>
-            </a:r>
-            <a:r>
-              <a:rPr sz="2000" b="1" dirty="0">
-                <a:solidFill>
-                  <a:srgbClr val="F59E0B"/>
-                </a:solidFill>
-                <a:latin typeface="Calibri"/>
-              </a:rPr>
-              <a:t>  •  SESIUNEA IULIE 2026</a:t>
+              <a:t>LUCRARE DE DIPLOMĂ  •  SESIUNEA IULIE 2026</a:t>
             </a:r>
           </a:p>
         </p:txBody>
@@ -3222,7 +3201,7 @@
           <a:noFill/>
         </p:spPr>
         <p:txBody>
-          <a:bodyPr wrap="square" lIns="0" tIns="0" rIns="0" bIns="0" anchor="t">
+          <a:bodyPr wrap="square" lIns="0" rIns="0" tIns="0" bIns="0" anchor="t">
             <a:spAutoFit/>
           </a:bodyPr>
           <a:lstStyle/>
@@ -3281,7 +3260,6 @@
           <a:lstStyle/>
           <a:p>
             <a:pPr algn="ctr"/>
-            <a:endParaRPr/>
           </a:p>
         </p:txBody>
       </p:sp>
@@ -3302,7 +3280,7 @@
           <a:noFill/>
         </p:spPr>
         <p:txBody>
-          <a:bodyPr wrap="square" lIns="0" tIns="0" rIns="0" bIns="0" anchor="t">
+          <a:bodyPr wrap="square" lIns="0" rIns="0" tIns="0" bIns="0" anchor="t">
             <a:spAutoFit/>
           </a:bodyPr>
           <a:lstStyle/>
@@ -3337,7 +3315,7 @@
           <a:noFill/>
         </p:spPr>
         <p:txBody>
-          <a:bodyPr wrap="square" lIns="0" tIns="0" rIns="0" bIns="0" anchor="t">
+          <a:bodyPr wrap="square" lIns="0" rIns="0" tIns="0" bIns="0" anchor="t">
             <a:spAutoFit/>
           </a:bodyPr>
           <a:lstStyle/>
@@ -3350,32 +3328,8 @@
                 </a:solidFill>
                 <a:latin typeface="Calibri"/>
               </a:rPr>
-              <a:t>cumpărarea</a:t>
-            </a:r>
-            <a:r>
-              <a:rPr sz="4600" b="1" dirty="0">
-                <a:solidFill>
-                  <a:srgbClr val="FFFFFF"/>
-                </a:solidFill>
-                <a:latin typeface="Calibri"/>
-              </a:rPr>
-              <a:t> </a:t>
-            </a:r>
-            <a:r>
-              <a:rPr sz="4600" b="1" dirty="0" err="1">
-                <a:solidFill>
-                  <a:srgbClr val="FFFFFF"/>
-                </a:solidFill>
-                <a:latin typeface="Calibri"/>
-              </a:rPr>
-              <a:t>automobilelor</a:t>
-            </a:r>
-            <a:endParaRPr sz="4600" b="1" dirty="0">
-              <a:solidFill>
-                <a:srgbClr val="FFFFFF"/>
-              </a:solidFill>
-              <a:latin typeface="Calibri"/>
-            </a:endParaRPr>
+              <a:t>cumpărarea automobilelor</a:t>
+            </a:r>
           </a:p>
         </p:txBody>
       </p:sp>
@@ -3396,7 +3350,7 @@
           <a:noFill/>
         </p:spPr>
         <p:txBody>
-          <a:bodyPr wrap="square" lIns="0" tIns="0" rIns="0" bIns="0" anchor="t">
+          <a:bodyPr wrap="square" lIns="0" rIns="0" tIns="0" bIns="0" anchor="t">
             <a:spAutoFit/>
           </a:bodyPr>
           <a:lstStyle/>
@@ -3455,7 +3409,6 @@
           <a:lstStyle/>
           <a:p>
             <a:pPr algn="ctr"/>
-            <a:endParaRPr/>
           </a:p>
         </p:txBody>
       </p:sp>
@@ -3476,7 +3429,7 @@
           <a:noFill/>
         </p:spPr>
         <p:txBody>
-          <a:bodyPr wrap="square" lIns="0" tIns="0" rIns="0" bIns="0" anchor="t">
+          <a:bodyPr wrap="square" lIns="0" rIns="0" tIns="0" bIns="0" anchor="t">
             <a:spAutoFit/>
           </a:bodyPr>
           <a:lstStyle/>
@@ -3511,7 +3464,7 @@
           <a:noFill/>
         </p:spPr>
         <p:txBody>
-          <a:bodyPr wrap="square" lIns="0" tIns="0" rIns="0" bIns="0" anchor="t">
+          <a:bodyPr wrap="square" lIns="0" rIns="0" tIns="0" bIns="0" anchor="t">
             <a:spAutoFit/>
           </a:bodyPr>
           <a:lstStyle/>
@@ -3546,7 +3499,7 @@
           <a:noFill/>
         </p:spPr>
         <p:txBody>
-          <a:bodyPr wrap="square" lIns="0" tIns="0" rIns="0" bIns="0" anchor="t">
+          <a:bodyPr wrap="square" lIns="0" rIns="0" tIns="0" bIns="0" anchor="t">
             <a:spAutoFit/>
           </a:bodyPr>
           <a:lstStyle/>
@@ -3581,20 +3534,20 @@
           <a:noFill/>
         </p:spPr>
         <p:txBody>
-          <a:bodyPr wrap="square" lIns="0" tIns="0" rIns="0" bIns="0" anchor="t">
+          <a:bodyPr wrap="square" lIns="0" rIns="0" tIns="0" bIns="0" anchor="t">
             <a:spAutoFit/>
           </a:bodyPr>
           <a:lstStyle/>
           <a:p>
             <a:pPr algn="r"/>
             <a:r>
-              <a:rPr sz="2400" b="1">
+              <a:rPr sz="2000" b="1">
                 <a:solidFill>
                   <a:srgbClr val="FFFFFF"/>
                 </a:solidFill>
                 <a:latin typeface="Calibri"/>
               </a:rPr>
-              <a:t>Pecherle George-Dominic</a:t>
+              <a:t>Ș.L.DR.ING. PECHERLE GEORGE-DOMINIC</a:t>
             </a:r>
           </a:p>
         </p:txBody>
@@ -3608,7 +3561,7 @@
 </file>
 
 <file path=ppt/slides/slide10.xml><?xml version="1.0" encoding="utf-8"?>
-<p:sld xmlns:a="http://schemas.openxmlformats.org/drawingml/2006/main" xmlns:r="http://schemas.openxmlformats.org/officeDocument/2006/relationships" xmlns:p="http://schemas.openxmlformats.org/presentationml/2006/main">
+<p:sld xmlns:a="http://schemas.openxmlformats.org/drawingml/2006/main" xmlns:p="http://schemas.openxmlformats.org/presentationml/2006/main" xmlns:r="http://schemas.openxmlformats.org/officeDocument/2006/relationships">
   <p:cSld>
     <p:spTree>
       <p:nvGrpSpPr>
@@ -3616,14 +3569,7 @@
         <p:cNvGrpSpPr/>
         <p:nvPr/>
       </p:nvGrpSpPr>
-      <p:grpSpPr>
-        <a:xfrm>
-          <a:off x="0" y="0"/>
-          <a:ext cx="0" cy="0"/>
-          <a:chOff x="0" y="0"/>
-          <a:chExt cx="0" cy="0"/>
-        </a:xfrm>
-      </p:grpSpPr>
+      <p:grpSpPr/>
       <p:sp>
         <p:nvSpPr>
           <p:cNvPr id="2" name="Rectangle 1"/>
@@ -3665,7 +3611,6 @@
           <a:lstStyle/>
           <a:p>
             <a:pPr algn="ctr"/>
-            <a:endParaRPr/>
           </a:p>
         </p:txBody>
       </p:sp>
@@ -3710,7 +3655,6 @@
           <a:lstStyle/>
           <a:p>
             <a:pPr algn="ctr"/>
-            <a:endParaRPr/>
           </a:p>
         </p:txBody>
       </p:sp>
@@ -3731,7 +3675,7 @@
           <a:noFill/>
         </p:spPr>
         <p:txBody>
-          <a:bodyPr wrap="square" lIns="0" tIns="0" rIns="0" bIns="0" anchor="t">
+          <a:bodyPr wrap="square" lIns="0" rIns="0" tIns="0" bIns="0" anchor="t">
             <a:spAutoFit/>
           </a:bodyPr>
           <a:lstStyle/>
@@ -3766,7 +3710,7 @@
           <a:noFill/>
         </p:spPr>
         <p:txBody>
-          <a:bodyPr wrap="square" lIns="0" tIns="0" rIns="0" bIns="0" anchor="t">
+          <a:bodyPr wrap="square" lIns="0" rIns="0" tIns="0" bIns="0" anchor="t">
             <a:spAutoFit/>
           </a:bodyPr>
           <a:lstStyle/>
@@ -3801,7 +3745,7 @@
           <a:noFill/>
         </p:spPr>
         <p:txBody>
-          <a:bodyPr wrap="square" lIns="0" tIns="0" rIns="0" bIns="0" anchor="t">
+          <a:bodyPr wrap="square" lIns="0" rIns="0" tIns="0" bIns="0" anchor="t">
             <a:spAutoFit/>
           </a:bodyPr>
           <a:lstStyle/>
@@ -3862,7 +3806,6 @@
           <a:lstStyle/>
           <a:p>
             <a:pPr algn="ctr"/>
-            <a:endParaRPr/>
           </a:p>
         </p:txBody>
       </p:sp>
@@ -3907,7 +3850,7 @@
           <a:noFill/>
         </p:spPr>
         <p:txBody>
-          <a:bodyPr wrap="square" lIns="0" tIns="0" rIns="0" bIns="0" anchor="t">
+          <a:bodyPr wrap="square" lIns="0" rIns="0" tIns="0" bIns="0" anchor="t">
             <a:spAutoFit/>
           </a:bodyPr>
           <a:lstStyle/>
@@ -3966,7 +3909,6 @@
           <a:lstStyle/>
           <a:p>
             <a:pPr algn="ctr"/>
-            <a:endParaRPr/>
           </a:p>
         </p:txBody>
       </p:sp>
@@ -3987,7 +3929,7 @@
           <a:noFill/>
         </p:spPr>
         <p:txBody>
-          <a:bodyPr wrap="square" lIns="0" tIns="0" rIns="0" bIns="0" anchor="t">
+          <a:bodyPr wrap="square" lIns="0" rIns="0" tIns="0" bIns="0" anchor="t">
             <a:spAutoFit/>
           </a:bodyPr>
           <a:lstStyle/>
@@ -4022,7 +3964,7 @@
           <a:noFill/>
         </p:spPr>
         <p:txBody>
-          <a:bodyPr wrap="square" lIns="0" tIns="0" rIns="0" bIns="0" anchor="t">
+          <a:bodyPr wrap="square" lIns="0" rIns="0" tIns="0" bIns="0" anchor="t">
             <a:spAutoFit/>
           </a:bodyPr>
           <a:lstStyle/>
@@ -4049,7 +3991,7 @@
 </file>
 
 <file path=ppt/slides/slide11.xml><?xml version="1.0" encoding="utf-8"?>
-<p:sld xmlns:a="http://schemas.openxmlformats.org/drawingml/2006/main" xmlns:r="http://schemas.openxmlformats.org/officeDocument/2006/relationships" xmlns:p="http://schemas.openxmlformats.org/presentationml/2006/main">
+<p:sld xmlns:a="http://schemas.openxmlformats.org/drawingml/2006/main" xmlns:p="http://schemas.openxmlformats.org/presentationml/2006/main" xmlns:r="http://schemas.openxmlformats.org/officeDocument/2006/relationships">
   <p:cSld>
     <p:spTree>
       <p:nvGrpSpPr>
@@ -4057,14 +3999,7 @@
         <p:cNvGrpSpPr/>
         <p:nvPr/>
       </p:nvGrpSpPr>
-      <p:grpSpPr>
-        <a:xfrm>
-          <a:off x="0" y="0"/>
-          <a:ext cx="0" cy="0"/>
-          <a:chOff x="0" y="0"/>
-          <a:chExt cx="0" cy="0"/>
-        </a:xfrm>
-      </p:grpSpPr>
+      <p:grpSpPr/>
       <p:sp>
         <p:nvSpPr>
           <p:cNvPr id="2" name="Rectangle 1"/>
@@ -4106,7 +4041,6 @@
           <a:lstStyle/>
           <a:p>
             <a:pPr algn="ctr"/>
-            <a:endParaRPr/>
           </a:p>
         </p:txBody>
       </p:sp>
@@ -4151,7 +4085,6 @@
           <a:lstStyle/>
           <a:p>
             <a:pPr algn="ctr"/>
-            <a:endParaRPr/>
           </a:p>
         </p:txBody>
       </p:sp>
@@ -4172,7 +4105,7 @@
           <a:noFill/>
         </p:spPr>
         <p:txBody>
-          <a:bodyPr wrap="square" lIns="0" tIns="0" rIns="0" bIns="0" anchor="t">
+          <a:bodyPr wrap="square" lIns="0" rIns="0" tIns="0" bIns="0" anchor="t">
             <a:spAutoFit/>
           </a:bodyPr>
           <a:lstStyle/>
@@ -4207,7 +4140,7 @@
           <a:noFill/>
         </p:spPr>
         <p:txBody>
-          <a:bodyPr wrap="square" lIns="0" tIns="0" rIns="0" bIns="0" anchor="t">
+          <a:bodyPr wrap="square" lIns="0" rIns="0" tIns="0" bIns="0" anchor="t">
             <a:spAutoFit/>
           </a:bodyPr>
           <a:lstStyle/>
@@ -4242,7 +4175,7 @@
           <a:noFill/>
         </p:spPr>
         <p:txBody>
-          <a:bodyPr wrap="square" lIns="0" tIns="0" rIns="0" bIns="0" anchor="t">
+          <a:bodyPr wrap="square" lIns="0" rIns="0" tIns="0" bIns="0" anchor="t">
             <a:spAutoFit/>
           </a:bodyPr>
           <a:lstStyle/>
@@ -4303,7 +4236,6 @@
           <a:lstStyle/>
           <a:p>
             <a:pPr algn="ctr"/>
-            <a:endParaRPr/>
           </a:p>
         </p:txBody>
       </p:sp>
@@ -4348,7 +4280,7 @@
           <a:noFill/>
         </p:spPr>
         <p:txBody>
-          <a:bodyPr wrap="square" lIns="0" tIns="0" rIns="0" bIns="0" anchor="t">
+          <a:bodyPr wrap="square" lIns="0" rIns="0" tIns="0" bIns="0" anchor="t">
             <a:spAutoFit/>
           </a:bodyPr>
           <a:lstStyle/>
@@ -4407,7 +4339,6 @@
           <a:lstStyle/>
           <a:p>
             <a:pPr algn="ctr"/>
-            <a:endParaRPr/>
           </a:p>
         </p:txBody>
       </p:sp>
@@ -4428,7 +4359,7 @@
           <a:noFill/>
         </p:spPr>
         <p:txBody>
-          <a:bodyPr wrap="square" lIns="0" tIns="0" rIns="0" bIns="0" anchor="t">
+          <a:bodyPr wrap="square" lIns="0" rIns="0" tIns="0" bIns="0" anchor="t">
             <a:spAutoFit/>
           </a:bodyPr>
           <a:lstStyle/>
@@ -4463,7 +4394,7 @@
           <a:noFill/>
         </p:spPr>
         <p:txBody>
-          <a:bodyPr wrap="square" lIns="0" tIns="0" rIns="0" bIns="0" anchor="t">
+          <a:bodyPr wrap="square" lIns="0" rIns="0" tIns="0" bIns="0" anchor="t">
             <a:spAutoFit/>
           </a:bodyPr>
           <a:lstStyle/>
@@ -4490,7 +4421,7 @@
 </file>
 
 <file path=ppt/slides/slide12.xml><?xml version="1.0" encoding="utf-8"?>
-<p:sld xmlns:a="http://schemas.openxmlformats.org/drawingml/2006/main" xmlns:r="http://schemas.openxmlformats.org/officeDocument/2006/relationships" xmlns:p="http://schemas.openxmlformats.org/presentationml/2006/main">
+<p:sld xmlns:a="http://schemas.openxmlformats.org/drawingml/2006/main" xmlns:p="http://schemas.openxmlformats.org/presentationml/2006/main" xmlns:r="http://schemas.openxmlformats.org/officeDocument/2006/relationships">
   <p:cSld>
     <p:spTree>
       <p:nvGrpSpPr>
@@ -4498,14 +4429,7 @@
         <p:cNvGrpSpPr/>
         <p:nvPr/>
       </p:nvGrpSpPr>
-      <p:grpSpPr>
-        <a:xfrm>
-          <a:off x="0" y="0"/>
-          <a:ext cx="0" cy="0"/>
-          <a:chOff x="0" y="0"/>
-          <a:chExt cx="0" cy="0"/>
-        </a:xfrm>
-      </p:grpSpPr>
+      <p:grpSpPr/>
       <p:sp>
         <p:nvSpPr>
           <p:cNvPr id="2" name="Rectangle 1"/>
@@ -4547,7 +4471,6 @@
           <a:lstStyle/>
           <a:p>
             <a:pPr algn="ctr"/>
-            <a:endParaRPr/>
           </a:p>
         </p:txBody>
       </p:sp>
@@ -4592,7 +4515,6 @@
           <a:lstStyle/>
           <a:p>
             <a:pPr algn="ctr"/>
-            <a:endParaRPr/>
           </a:p>
         </p:txBody>
       </p:sp>
@@ -4613,7 +4535,7 @@
           <a:noFill/>
         </p:spPr>
         <p:txBody>
-          <a:bodyPr wrap="square" lIns="0" tIns="0" rIns="0" bIns="0" anchor="t">
+          <a:bodyPr wrap="square" lIns="0" rIns="0" tIns="0" bIns="0" anchor="t">
             <a:spAutoFit/>
           </a:bodyPr>
           <a:lstStyle/>
@@ -4648,7 +4570,7 @@
           <a:noFill/>
         </p:spPr>
         <p:txBody>
-          <a:bodyPr wrap="square" lIns="0" tIns="0" rIns="0" bIns="0" anchor="t">
+          <a:bodyPr wrap="square" lIns="0" rIns="0" tIns="0" bIns="0" anchor="t">
             <a:spAutoFit/>
           </a:bodyPr>
           <a:lstStyle/>
@@ -4709,7 +4631,6 @@
           <a:lstStyle/>
           <a:p>
             <a:pPr algn="ctr"/>
-            <a:endParaRPr/>
           </a:p>
         </p:txBody>
       </p:sp>
@@ -4754,7 +4675,7 @@
           <a:noFill/>
         </p:spPr>
         <p:txBody>
-          <a:bodyPr wrap="square" lIns="0" tIns="0" rIns="0" bIns="0" anchor="t">
+          <a:bodyPr wrap="square" lIns="0" rIns="0" tIns="0" bIns="0" anchor="t">
             <a:spAutoFit/>
           </a:bodyPr>
           <a:lstStyle/>
@@ -4976,7 +4897,6 @@
           <a:lstStyle/>
           <a:p>
             <a:pPr algn="ctr"/>
-            <a:endParaRPr/>
           </a:p>
         </p:txBody>
       </p:sp>
@@ -4997,7 +4917,7 @@
           <a:noFill/>
         </p:spPr>
         <p:txBody>
-          <a:bodyPr wrap="square" lIns="0" tIns="0" rIns="0" bIns="0" anchor="t">
+          <a:bodyPr wrap="square" lIns="0" rIns="0" tIns="0" bIns="0" anchor="t">
             <a:spAutoFit/>
           </a:bodyPr>
           <a:lstStyle/>
@@ -5032,7 +4952,7 @@
           <a:noFill/>
         </p:spPr>
         <p:txBody>
-          <a:bodyPr wrap="square" lIns="0" tIns="0" rIns="0" bIns="0" anchor="t">
+          <a:bodyPr wrap="square" lIns="0" rIns="0" tIns="0" bIns="0" anchor="t">
             <a:spAutoFit/>
           </a:bodyPr>
           <a:lstStyle/>
@@ -5059,7 +4979,7 @@
 </file>
 
 <file path=ppt/slides/slide13.xml><?xml version="1.0" encoding="utf-8"?>
-<p:sld xmlns:a="http://schemas.openxmlformats.org/drawingml/2006/main" xmlns:r="http://schemas.openxmlformats.org/officeDocument/2006/relationships" xmlns:p="http://schemas.openxmlformats.org/presentationml/2006/main">
+<p:sld xmlns:a="http://schemas.openxmlformats.org/drawingml/2006/main" xmlns:p="http://schemas.openxmlformats.org/presentationml/2006/main" xmlns:r="http://schemas.openxmlformats.org/officeDocument/2006/relationships">
   <p:cSld>
     <p:spTree>
       <p:nvGrpSpPr>
@@ -5067,14 +4987,7 @@
         <p:cNvGrpSpPr/>
         <p:nvPr/>
       </p:nvGrpSpPr>
-      <p:grpSpPr>
-        <a:xfrm>
-          <a:off x="0" y="0"/>
-          <a:ext cx="0" cy="0"/>
-          <a:chOff x="0" y="0"/>
-          <a:chExt cx="0" cy="0"/>
-        </a:xfrm>
-      </p:grpSpPr>
+      <p:grpSpPr/>
       <p:sp>
         <p:nvSpPr>
           <p:cNvPr id="2" name="Rectangle 1"/>
@@ -5116,7 +5029,6 @@
           <a:lstStyle/>
           <a:p>
             <a:pPr algn="ctr"/>
-            <a:endParaRPr/>
           </a:p>
         </p:txBody>
       </p:sp>
@@ -5161,7 +5073,6 @@
           <a:lstStyle/>
           <a:p>
             <a:pPr algn="ctr"/>
-            <a:endParaRPr/>
           </a:p>
         </p:txBody>
       </p:sp>
@@ -5182,7 +5093,7 @@
           <a:noFill/>
         </p:spPr>
         <p:txBody>
-          <a:bodyPr wrap="square" lIns="0" tIns="0" rIns="0" bIns="0" anchor="t">
+          <a:bodyPr wrap="square" lIns="0" rIns="0" tIns="0" bIns="0" anchor="t">
             <a:spAutoFit/>
           </a:bodyPr>
           <a:lstStyle/>
@@ -5217,7 +5128,7 @@
           <a:noFill/>
         </p:spPr>
         <p:txBody>
-          <a:bodyPr wrap="square" lIns="0" tIns="0" rIns="0" bIns="0" anchor="t">
+          <a:bodyPr wrap="square" lIns="0" rIns="0" tIns="0" bIns="0" anchor="t">
             <a:spAutoFit/>
           </a:bodyPr>
           <a:lstStyle/>
@@ -5278,7 +5189,6 @@
           <a:lstStyle/>
           <a:p>
             <a:pPr algn="ctr"/>
-            <a:endParaRPr/>
           </a:p>
         </p:txBody>
       </p:sp>
@@ -5323,7 +5233,7 @@
           <a:noFill/>
         </p:spPr>
         <p:txBody>
-          <a:bodyPr wrap="square" lIns="0" tIns="0" rIns="0" bIns="0" anchor="t">
+          <a:bodyPr wrap="square" lIns="0" rIns="0" tIns="0" bIns="0" anchor="t">
             <a:spAutoFit/>
           </a:bodyPr>
           <a:lstStyle/>
@@ -5545,7 +5455,6 @@
           <a:lstStyle/>
           <a:p>
             <a:pPr algn="ctr"/>
-            <a:endParaRPr/>
           </a:p>
         </p:txBody>
       </p:sp>
@@ -5566,7 +5475,7 @@
           <a:noFill/>
         </p:spPr>
         <p:txBody>
-          <a:bodyPr wrap="square" lIns="0" tIns="0" rIns="0" bIns="0" anchor="t">
+          <a:bodyPr wrap="square" lIns="0" rIns="0" tIns="0" bIns="0" anchor="t">
             <a:spAutoFit/>
           </a:bodyPr>
           <a:lstStyle/>
@@ -5601,7 +5510,7 @@
           <a:noFill/>
         </p:spPr>
         <p:txBody>
-          <a:bodyPr wrap="square" lIns="0" tIns="0" rIns="0" bIns="0" anchor="t">
+          <a:bodyPr wrap="square" lIns="0" rIns="0" tIns="0" bIns="0" anchor="t">
             <a:spAutoFit/>
           </a:bodyPr>
           <a:lstStyle/>
@@ -5628,7 +5537,7 @@
 </file>
 
 <file path=ppt/slides/slide14.xml><?xml version="1.0" encoding="utf-8"?>
-<p:sld xmlns:a="http://schemas.openxmlformats.org/drawingml/2006/main" xmlns:r="http://schemas.openxmlformats.org/officeDocument/2006/relationships" xmlns:p="http://schemas.openxmlformats.org/presentationml/2006/main">
+<p:sld xmlns:a="http://schemas.openxmlformats.org/drawingml/2006/main" xmlns:p="http://schemas.openxmlformats.org/presentationml/2006/main" xmlns:r="http://schemas.openxmlformats.org/officeDocument/2006/relationships">
   <p:cSld>
     <p:spTree>
       <p:nvGrpSpPr>
@@ -5636,14 +5545,7 @@
         <p:cNvGrpSpPr/>
         <p:nvPr/>
       </p:nvGrpSpPr>
-      <p:grpSpPr>
-        <a:xfrm>
-          <a:off x="0" y="0"/>
-          <a:ext cx="0" cy="0"/>
-          <a:chOff x="0" y="0"/>
-          <a:chExt cx="0" cy="0"/>
-        </a:xfrm>
-      </p:grpSpPr>
+      <p:grpSpPr/>
       <p:sp>
         <p:nvSpPr>
           <p:cNvPr id="2" name="Rectangle 1"/>
@@ -5685,7 +5587,6 @@
           <a:lstStyle/>
           <a:p>
             <a:pPr algn="ctr"/>
-            <a:endParaRPr/>
           </a:p>
         </p:txBody>
       </p:sp>
@@ -5730,7 +5631,6 @@
           <a:lstStyle/>
           <a:p>
             <a:pPr algn="ctr"/>
-            <a:endParaRPr/>
           </a:p>
         </p:txBody>
       </p:sp>
@@ -5751,7 +5651,7 @@
           <a:noFill/>
         </p:spPr>
         <p:txBody>
-          <a:bodyPr wrap="square" lIns="0" tIns="0" rIns="0" bIns="0" anchor="t">
+          <a:bodyPr wrap="square" lIns="0" rIns="0" tIns="0" bIns="0" anchor="t">
             <a:spAutoFit/>
           </a:bodyPr>
           <a:lstStyle/>
@@ -5786,7 +5686,7 @@
           <a:noFill/>
         </p:spPr>
         <p:txBody>
-          <a:bodyPr wrap="square" lIns="0" tIns="0" rIns="0" bIns="0" anchor="t">
+          <a:bodyPr wrap="square" lIns="0" rIns="0" tIns="0" bIns="0" anchor="t">
             <a:spAutoFit/>
           </a:bodyPr>
           <a:lstStyle/>
@@ -5847,7 +5747,6 @@
           <a:lstStyle/>
           <a:p>
             <a:pPr algn="ctr"/>
-            <a:endParaRPr/>
           </a:p>
         </p:txBody>
       </p:sp>
@@ -5892,7 +5791,7 @@
           <a:noFill/>
         </p:spPr>
         <p:txBody>
-          <a:bodyPr wrap="square" lIns="0" tIns="0" rIns="0" bIns="0" anchor="t">
+          <a:bodyPr wrap="square" lIns="0" rIns="0" tIns="0" bIns="0" anchor="t">
             <a:spAutoFit/>
           </a:bodyPr>
           <a:lstStyle/>
@@ -6114,7 +6013,6 @@
           <a:lstStyle/>
           <a:p>
             <a:pPr algn="ctr"/>
-            <a:endParaRPr/>
           </a:p>
         </p:txBody>
       </p:sp>
@@ -6135,7 +6033,7 @@
           <a:noFill/>
         </p:spPr>
         <p:txBody>
-          <a:bodyPr wrap="square" lIns="0" tIns="0" rIns="0" bIns="0" anchor="t">
+          <a:bodyPr wrap="square" lIns="0" rIns="0" tIns="0" bIns="0" anchor="t">
             <a:spAutoFit/>
           </a:bodyPr>
           <a:lstStyle/>
@@ -6170,7 +6068,7 @@
           <a:noFill/>
         </p:spPr>
         <p:txBody>
-          <a:bodyPr wrap="square" lIns="0" tIns="0" rIns="0" bIns="0" anchor="t">
+          <a:bodyPr wrap="square" lIns="0" rIns="0" tIns="0" bIns="0" anchor="t">
             <a:spAutoFit/>
           </a:bodyPr>
           <a:lstStyle/>
@@ -6197,7 +6095,7 @@
 </file>
 
 <file path=ppt/slides/slide15.xml><?xml version="1.0" encoding="utf-8"?>
-<p:sld xmlns:a="http://schemas.openxmlformats.org/drawingml/2006/main" xmlns:r="http://schemas.openxmlformats.org/officeDocument/2006/relationships" xmlns:p="http://schemas.openxmlformats.org/presentationml/2006/main">
+<p:sld xmlns:a="http://schemas.openxmlformats.org/drawingml/2006/main" xmlns:p="http://schemas.openxmlformats.org/presentationml/2006/main" xmlns:r="http://schemas.openxmlformats.org/officeDocument/2006/relationships">
   <p:cSld>
     <p:spTree>
       <p:nvGrpSpPr>
@@ -6205,14 +6103,7 @@
         <p:cNvGrpSpPr/>
         <p:nvPr/>
       </p:nvGrpSpPr>
-      <p:grpSpPr>
-        <a:xfrm>
-          <a:off x="0" y="0"/>
-          <a:ext cx="0" cy="0"/>
-          <a:chOff x="0" y="0"/>
-          <a:chExt cx="0" cy="0"/>
-        </a:xfrm>
-      </p:grpSpPr>
+      <p:grpSpPr/>
       <p:sp>
         <p:nvSpPr>
           <p:cNvPr id="2" name="Rectangle 1"/>
@@ -6254,7 +6145,6 @@
           <a:lstStyle/>
           <a:p>
             <a:pPr algn="ctr"/>
-            <a:endParaRPr/>
           </a:p>
         </p:txBody>
       </p:sp>
@@ -6299,7 +6189,6 @@
           <a:lstStyle/>
           <a:p>
             <a:pPr algn="ctr"/>
-            <a:endParaRPr/>
           </a:p>
         </p:txBody>
       </p:sp>
@@ -6320,7 +6209,7 @@
           <a:noFill/>
         </p:spPr>
         <p:txBody>
-          <a:bodyPr wrap="square" lIns="0" tIns="0" rIns="0" bIns="0" anchor="t">
+          <a:bodyPr wrap="square" lIns="0" rIns="0" tIns="0" bIns="0" anchor="t">
             <a:spAutoFit/>
           </a:bodyPr>
           <a:lstStyle/>
@@ -6355,7 +6244,7 @@
           <a:noFill/>
         </p:spPr>
         <p:txBody>
-          <a:bodyPr wrap="square" lIns="0" tIns="0" rIns="0" bIns="0" anchor="t">
+          <a:bodyPr wrap="square" lIns="0" rIns="0" tIns="0" bIns="0" anchor="t">
             <a:spAutoFit/>
           </a:bodyPr>
           <a:lstStyle/>
@@ -6390,7 +6279,7 @@
           <a:noFill/>
         </p:spPr>
         <p:txBody>
-          <a:bodyPr wrap="square" lIns="0" tIns="0" rIns="0" bIns="0" anchor="t">
+          <a:bodyPr wrap="square" lIns="0" rIns="0" tIns="0" bIns="0" anchor="t">
             <a:spAutoFit/>
           </a:bodyPr>
           <a:lstStyle/>
@@ -6451,7 +6340,6 @@
           <a:lstStyle/>
           <a:p>
             <a:pPr algn="ctr"/>
-            <a:endParaRPr/>
           </a:p>
         </p:txBody>
       </p:sp>
@@ -6496,7 +6384,7 @@
           <a:noFill/>
         </p:spPr>
         <p:txBody>
-          <a:bodyPr wrap="square" lIns="0" tIns="0" rIns="0" bIns="0" anchor="t">
+          <a:bodyPr wrap="square" lIns="0" rIns="0" tIns="0" bIns="0" anchor="t">
             <a:spAutoFit/>
           </a:bodyPr>
           <a:lstStyle/>
@@ -6557,7 +6445,6 @@
           <a:lstStyle/>
           <a:p>
             <a:pPr algn="ctr"/>
-            <a:endParaRPr/>
           </a:p>
         </p:txBody>
       </p:sp>
@@ -6602,7 +6489,7 @@
           <a:noFill/>
         </p:spPr>
         <p:txBody>
-          <a:bodyPr wrap="square" lIns="0" tIns="0" rIns="0" bIns="0" anchor="t">
+          <a:bodyPr wrap="square" lIns="0" rIns="0" tIns="0" bIns="0" anchor="t">
             <a:spAutoFit/>
           </a:bodyPr>
           <a:lstStyle/>
@@ -6637,7 +6524,7 @@
           <a:noFill/>
         </p:spPr>
         <p:txBody>
-          <a:bodyPr wrap="square" lIns="0" tIns="0" rIns="0" bIns="0" anchor="t">
+          <a:bodyPr wrap="square" lIns="0" rIns="0" tIns="0" bIns="0" anchor="t">
             <a:spAutoFit/>
           </a:bodyPr>
           <a:lstStyle/>
@@ -6696,7 +6583,6 @@
           <a:lstStyle/>
           <a:p>
             <a:pPr algn="ctr"/>
-            <a:endParaRPr/>
           </a:p>
         </p:txBody>
       </p:sp>
@@ -6717,7 +6603,7 @@
           <a:noFill/>
         </p:spPr>
         <p:txBody>
-          <a:bodyPr wrap="square" lIns="0" tIns="0" rIns="0" bIns="0" anchor="t">
+          <a:bodyPr wrap="square" lIns="0" rIns="0" tIns="0" bIns="0" anchor="t">
             <a:spAutoFit/>
           </a:bodyPr>
           <a:lstStyle/>
@@ -6752,7 +6638,7 @@
           <a:noFill/>
         </p:spPr>
         <p:txBody>
-          <a:bodyPr wrap="square" lIns="0" tIns="0" rIns="0" bIns="0" anchor="t">
+          <a:bodyPr wrap="square" lIns="0" rIns="0" tIns="0" bIns="0" anchor="t">
             <a:spAutoFit/>
           </a:bodyPr>
           <a:lstStyle/>
@@ -6779,7 +6665,7 @@
 </file>
 
 <file path=ppt/slides/slide16.xml><?xml version="1.0" encoding="utf-8"?>
-<p:sld xmlns:a="http://schemas.openxmlformats.org/drawingml/2006/main" xmlns:r="http://schemas.openxmlformats.org/officeDocument/2006/relationships" xmlns:p="http://schemas.openxmlformats.org/presentationml/2006/main">
+<p:sld xmlns:a="http://schemas.openxmlformats.org/drawingml/2006/main" xmlns:p="http://schemas.openxmlformats.org/presentationml/2006/main" xmlns:r="http://schemas.openxmlformats.org/officeDocument/2006/relationships">
   <p:cSld>
     <p:spTree>
       <p:nvGrpSpPr>
@@ -6787,14 +6673,7 @@
         <p:cNvGrpSpPr/>
         <p:nvPr/>
       </p:nvGrpSpPr>
-      <p:grpSpPr>
-        <a:xfrm>
-          <a:off x="0" y="0"/>
-          <a:ext cx="0" cy="0"/>
-          <a:chOff x="0" y="0"/>
-          <a:chExt cx="0" cy="0"/>
-        </a:xfrm>
-      </p:grpSpPr>
+      <p:grpSpPr/>
       <p:sp>
         <p:nvSpPr>
           <p:cNvPr id="2" name="Rectangle 1"/>
@@ -6836,7 +6715,6 @@
           <a:lstStyle/>
           <a:p>
             <a:pPr algn="ctr"/>
-            <a:endParaRPr/>
           </a:p>
         </p:txBody>
       </p:sp>
@@ -6881,7 +6759,6 @@
           <a:lstStyle/>
           <a:p>
             <a:pPr algn="ctr"/>
-            <a:endParaRPr/>
           </a:p>
         </p:txBody>
       </p:sp>
@@ -6902,7 +6779,7 @@
           <a:noFill/>
         </p:spPr>
         <p:txBody>
-          <a:bodyPr wrap="square" lIns="0" tIns="0" rIns="0" bIns="0" anchor="t">
+          <a:bodyPr wrap="square" lIns="0" rIns="0" tIns="0" bIns="0" anchor="t">
             <a:spAutoFit/>
           </a:bodyPr>
           <a:lstStyle/>
@@ -6937,7 +6814,7 @@
           <a:noFill/>
         </p:spPr>
         <p:txBody>
-          <a:bodyPr wrap="square" lIns="0" tIns="0" rIns="0" bIns="0" anchor="t">
+          <a:bodyPr wrap="square" lIns="0" rIns="0" tIns="0" bIns="0" anchor="t">
             <a:spAutoFit/>
           </a:bodyPr>
           <a:lstStyle/>
@@ -6972,7 +6849,7 @@
           <a:noFill/>
         </p:spPr>
         <p:txBody>
-          <a:bodyPr wrap="square" lIns="0" tIns="0" rIns="0" bIns="0" anchor="t">
+          <a:bodyPr wrap="square" lIns="0" rIns="0" tIns="0" bIns="0" anchor="t">
             <a:spAutoFit/>
           </a:bodyPr>
           <a:lstStyle/>
@@ -7194,7 +7071,6 @@
           <a:lstStyle/>
           <a:p>
             <a:pPr algn="ctr"/>
-            <a:endParaRPr/>
           </a:p>
         </p:txBody>
       </p:sp>
@@ -7215,7 +7091,7 @@
           <a:noFill/>
         </p:spPr>
         <p:txBody>
-          <a:bodyPr wrap="square" lIns="0" tIns="0" rIns="0" bIns="0" anchor="t">
+          <a:bodyPr wrap="square" lIns="0" rIns="0" tIns="0" bIns="0" anchor="t">
             <a:spAutoFit/>
           </a:bodyPr>
           <a:lstStyle/>
@@ -7250,7 +7126,7 @@
           <a:noFill/>
         </p:spPr>
         <p:txBody>
-          <a:bodyPr wrap="square" lIns="0" tIns="0" rIns="0" bIns="0" anchor="t">
+          <a:bodyPr wrap="square" lIns="0" rIns="0" tIns="0" bIns="0" anchor="t">
             <a:spAutoFit/>
           </a:bodyPr>
           <a:lstStyle/>
@@ -7277,7 +7153,7 @@
 </file>
 
 <file path=ppt/slides/slide17.xml><?xml version="1.0" encoding="utf-8"?>
-<p:sld xmlns:a="http://schemas.openxmlformats.org/drawingml/2006/main" xmlns:r="http://schemas.openxmlformats.org/officeDocument/2006/relationships" xmlns:p="http://schemas.openxmlformats.org/presentationml/2006/main">
+<p:sld xmlns:a="http://schemas.openxmlformats.org/drawingml/2006/main" xmlns:p="http://schemas.openxmlformats.org/presentationml/2006/main" xmlns:r="http://schemas.openxmlformats.org/officeDocument/2006/relationships">
   <p:cSld>
     <p:spTree>
       <p:nvGrpSpPr>
@@ -7285,14 +7161,7 @@
         <p:cNvGrpSpPr/>
         <p:nvPr/>
       </p:nvGrpSpPr>
-      <p:grpSpPr>
-        <a:xfrm>
-          <a:off x="0" y="0"/>
-          <a:ext cx="0" cy="0"/>
-          <a:chOff x="0" y="0"/>
-          <a:chExt cx="0" cy="0"/>
-        </a:xfrm>
-      </p:grpSpPr>
+      <p:grpSpPr/>
       <p:sp>
         <p:nvSpPr>
           <p:cNvPr id="2" name="Rectangle 1"/>
@@ -7334,7 +7203,6 @@
           <a:lstStyle/>
           <a:p>
             <a:pPr algn="ctr"/>
-            <a:endParaRPr/>
           </a:p>
         </p:txBody>
       </p:sp>
@@ -7379,7 +7247,6 @@
           <a:lstStyle/>
           <a:p>
             <a:pPr algn="ctr"/>
-            <a:endParaRPr/>
           </a:p>
         </p:txBody>
       </p:sp>
@@ -7400,7 +7267,7 @@
           <a:noFill/>
         </p:spPr>
         <p:txBody>
-          <a:bodyPr wrap="square" lIns="0" tIns="0" rIns="0" bIns="0" anchor="t">
+          <a:bodyPr wrap="square" lIns="0" rIns="0" tIns="0" bIns="0" anchor="t">
             <a:spAutoFit/>
           </a:bodyPr>
           <a:lstStyle/>
@@ -7435,7 +7302,7 @@
           <a:noFill/>
         </p:spPr>
         <p:txBody>
-          <a:bodyPr wrap="square" lIns="0" tIns="0" rIns="0" bIns="0" anchor="t">
+          <a:bodyPr wrap="square" lIns="0" rIns="0" tIns="0" bIns="0" anchor="t">
             <a:spAutoFit/>
           </a:bodyPr>
           <a:lstStyle/>
@@ -7494,7 +7361,6 @@
           <a:lstStyle/>
           <a:p>
             <a:pPr algn="ctr"/>
-            <a:endParaRPr/>
           </a:p>
         </p:txBody>
       </p:sp>
@@ -7541,7 +7407,6 @@
           <a:lstStyle/>
           <a:p>
             <a:pPr algn="ctr"/>
-            <a:endParaRPr/>
           </a:p>
         </p:txBody>
       </p:sp>
@@ -7586,7 +7451,6 @@
           <a:lstStyle/>
           <a:p>
             <a:pPr algn="ctr"/>
-            <a:endParaRPr/>
           </a:p>
         </p:txBody>
       </p:sp>
@@ -7607,7 +7471,7 @@
           <a:noFill/>
         </p:spPr>
         <p:txBody>
-          <a:bodyPr wrap="square" lIns="0" tIns="0" rIns="0" bIns="0" anchor="ctr">
+          <a:bodyPr wrap="square" lIns="0" rIns="0" tIns="0" bIns="0" anchor="ctr">
             <a:spAutoFit/>
           </a:bodyPr>
           <a:lstStyle/>
@@ -7857,7 +7721,6 @@
           <a:lstStyle/>
           <a:p>
             <a:pPr algn="ctr"/>
-            <a:endParaRPr/>
           </a:p>
         </p:txBody>
       </p:sp>
@@ -7904,7 +7767,6 @@
           <a:lstStyle/>
           <a:p>
             <a:pPr algn="ctr"/>
-            <a:endParaRPr/>
           </a:p>
         </p:txBody>
       </p:sp>
@@ -7949,7 +7811,6 @@
           <a:lstStyle/>
           <a:p>
             <a:pPr algn="ctr"/>
-            <a:endParaRPr/>
           </a:p>
         </p:txBody>
       </p:sp>
@@ -7970,7 +7831,7 @@
           <a:noFill/>
         </p:spPr>
         <p:txBody>
-          <a:bodyPr wrap="square" lIns="0" tIns="0" rIns="0" bIns="0" anchor="ctr">
+          <a:bodyPr wrap="square" lIns="0" rIns="0" tIns="0" bIns="0" anchor="ctr">
             <a:spAutoFit/>
           </a:bodyPr>
           <a:lstStyle/>
@@ -8146,7 +8007,7 @@
                 </a:solidFill>
                 <a:latin typeface="Calibri"/>
               </a:rPr>
-              <a:t>Roluri suplimentare cu beneficii distincte.</a:t>
+              <a:t>Implementare completă a panoului de administrare (ADMIN).</a:t>
             </a:r>
           </a:p>
           <a:p>
@@ -8220,7 +8081,6 @@
           <a:lstStyle/>
           <a:p>
             <a:pPr algn="ctr"/>
-            <a:endParaRPr/>
           </a:p>
         </p:txBody>
       </p:sp>
@@ -8241,7 +8101,7 @@
           <a:noFill/>
         </p:spPr>
         <p:txBody>
-          <a:bodyPr wrap="square" lIns="0" tIns="0" rIns="0" bIns="0" anchor="t">
+          <a:bodyPr wrap="square" lIns="0" rIns="0" tIns="0" bIns="0" anchor="t">
             <a:spAutoFit/>
           </a:bodyPr>
           <a:lstStyle/>
@@ -8276,7 +8136,7 @@
           <a:noFill/>
         </p:spPr>
         <p:txBody>
-          <a:bodyPr wrap="square" lIns="0" tIns="0" rIns="0" bIns="0" anchor="t">
+          <a:bodyPr wrap="square" lIns="0" rIns="0" tIns="0" bIns="0" anchor="t">
             <a:spAutoFit/>
           </a:bodyPr>
           <a:lstStyle/>
@@ -8303,7 +8163,7 @@
 </file>
 
 <file path=ppt/slides/slide18.xml><?xml version="1.0" encoding="utf-8"?>
-<p:sld xmlns:a="http://schemas.openxmlformats.org/drawingml/2006/main" xmlns:r="http://schemas.openxmlformats.org/officeDocument/2006/relationships" xmlns:p="http://schemas.openxmlformats.org/presentationml/2006/main">
+<p:sld xmlns:a="http://schemas.openxmlformats.org/drawingml/2006/main" xmlns:p="http://schemas.openxmlformats.org/presentationml/2006/main" xmlns:r="http://schemas.openxmlformats.org/officeDocument/2006/relationships">
   <p:cSld>
     <p:spTree>
       <p:nvGrpSpPr>
@@ -8311,14 +8171,7 @@
         <p:cNvGrpSpPr/>
         <p:nvPr/>
       </p:nvGrpSpPr>
-      <p:grpSpPr>
-        <a:xfrm>
-          <a:off x="0" y="0"/>
-          <a:ext cx="0" cy="0"/>
-          <a:chOff x="0" y="0"/>
-          <a:chExt cx="0" cy="0"/>
-        </a:xfrm>
-      </p:grpSpPr>
+      <p:grpSpPr/>
       <p:sp>
         <p:nvSpPr>
           <p:cNvPr id="2" name="Rectangle 1"/>
@@ -8360,7 +8213,6 @@
           <a:lstStyle/>
           <a:p>
             <a:pPr algn="ctr"/>
-            <a:endParaRPr/>
           </a:p>
         </p:txBody>
       </p:sp>
@@ -8405,7 +8257,6 @@
           <a:lstStyle/>
           <a:p>
             <a:pPr algn="ctr"/>
-            <a:endParaRPr/>
           </a:p>
         </p:txBody>
       </p:sp>
@@ -8426,7 +8277,7 @@
           <a:noFill/>
         </p:spPr>
         <p:txBody>
-          <a:bodyPr wrap="square" lIns="0" tIns="0" rIns="0" bIns="0" anchor="t">
+          <a:bodyPr wrap="square" lIns="0" rIns="0" tIns="0" bIns="0" anchor="t">
             <a:spAutoFit/>
           </a:bodyPr>
           <a:lstStyle/>
@@ -8461,7 +8312,7 @@
           <a:noFill/>
         </p:spPr>
         <p:txBody>
-          <a:bodyPr wrap="square" lIns="0" tIns="0" rIns="0" bIns="0" anchor="t">
+          <a:bodyPr wrap="square" lIns="0" rIns="0" tIns="0" bIns="0" anchor="t">
             <a:spAutoFit/>
           </a:bodyPr>
           <a:lstStyle/>
@@ -8496,7 +8347,7 @@
           <a:noFill/>
         </p:spPr>
         <p:txBody>
-          <a:bodyPr wrap="square" lIns="0" tIns="0" rIns="0" bIns="0" anchor="t">
+          <a:bodyPr wrap="square" lIns="0" rIns="0" tIns="0" bIns="0" anchor="t">
             <a:spAutoFit/>
           </a:bodyPr>
           <a:lstStyle/>
@@ -8531,7 +8382,7 @@
           <a:noFill/>
         </p:spPr>
         <p:txBody>
-          <a:bodyPr wrap="square" lIns="0" tIns="0" rIns="0" bIns="0" anchor="t">
+          <a:bodyPr wrap="square" lIns="0" rIns="0" tIns="0" bIns="0" anchor="t">
             <a:spAutoFit/>
           </a:bodyPr>
           <a:lstStyle/>
@@ -8558,7 +8409,7 @@
 </file>
 
 <file path=ppt/slides/slide2.xml><?xml version="1.0" encoding="utf-8"?>
-<p:sld xmlns:a="http://schemas.openxmlformats.org/drawingml/2006/main" xmlns:r="http://schemas.openxmlformats.org/officeDocument/2006/relationships" xmlns:p="http://schemas.openxmlformats.org/presentationml/2006/main">
+<p:sld xmlns:a="http://schemas.openxmlformats.org/drawingml/2006/main" xmlns:p="http://schemas.openxmlformats.org/presentationml/2006/main" xmlns:r="http://schemas.openxmlformats.org/officeDocument/2006/relationships">
   <p:cSld>
     <p:spTree>
       <p:nvGrpSpPr>
@@ -8566,14 +8417,7 @@
         <p:cNvGrpSpPr/>
         <p:nvPr/>
       </p:nvGrpSpPr>
-      <p:grpSpPr>
-        <a:xfrm>
-          <a:off x="0" y="0"/>
-          <a:ext cx="0" cy="0"/>
-          <a:chOff x="0" y="0"/>
-          <a:chExt cx="0" cy="0"/>
-        </a:xfrm>
-      </p:grpSpPr>
+      <p:grpSpPr/>
       <p:sp>
         <p:nvSpPr>
           <p:cNvPr id="2" name="Rectangle 1"/>
@@ -8615,7 +8459,6 @@
           <a:lstStyle/>
           <a:p>
             <a:pPr algn="ctr"/>
-            <a:endParaRPr/>
           </a:p>
         </p:txBody>
       </p:sp>
@@ -8660,7 +8503,6 @@
           <a:lstStyle/>
           <a:p>
             <a:pPr algn="ctr"/>
-            <a:endParaRPr/>
           </a:p>
         </p:txBody>
       </p:sp>
@@ -8681,7 +8523,7 @@
           <a:noFill/>
         </p:spPr>
         <p:txBody>
-          <a:bodyPr wrap="square" lIns="0" tIns="0" rIns="0" bIns="0" anchor="t">
+          <a:bodyPr wrap="square" lIns="0" rIns="0" tIns="0" bIns="0" anchor="t">
             <a:spAutoFit/>
           </a:bodyPr>
           <a:lstStyle/>
@@ -8716,7 +8558,7 @@
           <a:noFill/>
         </p:spPr>
         <p:txBody>
-          <a:bodyPr wrap="square" lIns="0" tIns="0" rIns="0" bIns="0" anchor="t">
+          <a:bodyPr wrap="square" lIns="0" rIns="0" tIns="0" bIns="0" anchor="t">
             <a:spAutoFit/>
           </a:bodyPr>
           <a:lstStyle/>
@@ -8751,7 +8593,7 @@
           <a:noFill/>
         </p:spPr>
         <p:txBody>
-          <a:bodyPr wrap="square" lIns="0" tIns="0" rIns="0" bIns="0" anchor="t">
+          <a:bodyPr wrap="square" lIns="0" rIns="0" tIns="0" bIns="0" anchor="t">
             <a:spAutoFit/>
           </a:bodyPr>
           <a:lstStyle/>
@@ -8810,7 +8652,6 @@
           <a:lstStyle/>
           <a:p>
             <a:pPr algn="ctr"/>
-            <a:endParaRPr/>
           </a:p>
         </p:txBody>
       </p:sp>
@@ -8857,7 +8698,6 @@
           <a:lstStyle/>
           <a:p>
             <a:pPr algn="ctr"/>
-            <a:endParaRPr/>
           </a:p>
         </p:txBody>
       </p:sp>
@@ -8902,7 +8742,6 @@
           <a:lstStyle/>
           <a:p>
             <a:pPr algn="ctr"/>
-            <a:endParaRPr/>
           </a:p>
         </p:txBody>
       </p:sp>
@@ -8923,7 +8762,7 @@
           <a:noFill/>
         </p:spPr>
         <p:txBody>
-          <a:bodyPr wrap="square" lIns="0" tIns="0" rIns="0" bIns="0" anchor="t">
+          <a:bodyPr wrap="square" lIns="0" rIns="0" tIns="0" bIns="0" anchor="t">
             <a:spAutoFit/>
           </a:bodyPr>
           <a:lstStyle/>
@@ -8958,7 +8797,7 @@
           <a:noFill/>
         </p:spPr>
         <p:txBody>
-          <a:bodyPr wrap="square" lIns="0" tIns="0" rIns="0" bIns="0" anchor="t">
+          <a:bodyPr wrap="square" lIns="0" rIns="0" tIns="0" bIns="0" anchor="t">
             <a:spAutoFit/>
           </a:bodyPr>
           <a:lstStyle/>
@@ -8993,7 +8832,7 @@
           <a:noFill/>
         </p:spPr>
         <p:txBody>
-          <a:bodyPr wrap="square" lIns="0" tIns="0" rIns="0" bIns="0" anchor="t">
+          <a:bodyPr wrap="square" lIns="0" rIns="0" tIns="0" bIns="0" anchor="t">
             <a:spAutoFit/>
           </a:bodyPr>
           <a:lstStyle/>
@@ -9052,7 +8891,6 @@
           <a:lstStyle/>
           <a:p>
             <a:pPr algn="ctr"/>
-            <a:endParaRPr/>
           </a:p>
         </p:txBody>
       </p:sp>
@@ -9099,7 +8937,6 @@
           <a:lstStyle/>
           <a:p>
             <a:pPr algn="ctr"/>
-            <a:endParaRPr/>
           </a:p>
         </p:txBody>
       </p:sp>
@@ -9144,7 +8981,6 @@
           <a:lstStyle/>
           <a:p>
             <a:pPr algn="ctr"/>
-            <a:endParaRPr/>
           </a:p>
         </p:txBody>
       </p:sp>
@@ -9165,7 +9001,7 @@
           <a:noFill/>
         </p:spPr>
         <p:txBody>
-          <a:bodyPr wrap="square" lIns="0" tIns="0" rIns="0" bIns="0" anchor="t">
+          <a:bodyPr wrap="square" lIns="0" rIns="0" tIns="0" bIns="0" anchor="t">
             <a:spAutoFit/>
           </a:bodyPr>
           <a:lstStyle/>
@@ -9200,7 +9036,7 @@
           <a:noFill/>
         </p:spPr>
         <p:txBody>
-          <a:bodyPr wrap="square" lIns="0" tIns="0" rIns="0" bIns="0" anchor="t">
+          <a:bodyPr wrap="square" lIns="0" rIns="0" tIns="0" bIns="0" anchor="t">
             <a:spAutoFit/>
           </a:bodyPr>
           <a:lstStyle/>
@@ -9235,7 +9071,7 @@
           <a:noFill/>
         </p:spPr>
         <p:txBody>
-          <a:bodyPr wrap="square" lIns="0" tIns="0" rIns="0" bIns="0" anchor="t">
+          <a:bodyPr wrap="square" lIns="0" rIns="0" tIns="0" bIns="0" anchor="t">
             <a:spAutoFit/>
           </a:bodyPr>
           <a:lstStyle/>
@@ -9294,7 +9130,6 @@
           <a:lstStyle/>
           <a:p>
             <a:pPr algn="ctr"/>
-            <a:endParaRPr/>
           </a:p>
         </p:txBody>
       </p:sp>
@@ -9341,7 +9176,6 @@
           <a:lstStyle/>
           <a:p>
             <a:pPr algn="ctr"/>
-            <a:endParaRPr/>
           </a:p>
         </p:txBody>
       </p:sp>
@@ -9386,7 +9220,6 @@
           <a:lstStyle/>
           <a:p>
             <a:pPr algn="ctr"/>
-            <a:endParaRPr/>
           </a:p>
         </p:txBody>
       </p:sp>
@@ -9407,7 +9240,7 @@
           <a:noFill/>
         </p:spPr>
         <p:txBody>
-          <a:bodyPr wrap="square" lIns="0" tIns="0" rIns="0" bIns="0" anchor="t">
+          <a:bodyPr wrap="square" lIns="0" rIns="0" tIns="0" bIns="0" anchor="t">
             <a:spAutoFit/>
           </a:bodyPr>
           <a:lstStyle/>
@@ -9442,7 +9275,7 @@
           <a:noFill/>
         </p:spPr>
         <p:txBody>
-          <a:bodyPr wrap="square" lIns="0" tIns="0" rIns="0" bIns="0" anchor="t">
+          <a:bodyPr wrap="square" lIns="0" rIns="0" tIns="0" bIns="0" anchor="t">
             <a:spAutoFit/>
           </a:bodyPr>
           <a:lstStyle/>
@@ -9477,7 +9310,7 @@
           <a:noFill/>
         </p:spPr>
         <p:txBody>
-          <a:bodyPr wrap="square" lIns="0" tIns="0" rIns="0" bIns="0" anchor="t">
+          <a:bodyPr wrap="square" lIns="0" rIns="0" tIns="0" bIns="0" anchor="t">
             <a:spAutoFit/>
           </a:bodyPr>
           <a:lstStyle/>
@@ -9536,7 +9369,6 @@
           <a:lstStyle/>
           <a:p>
             <a:pPr algn="ctr"/>
-            <a:endParaRPr/>
           </a:p>
         </p:txBody>
       </p:sp>
@@ -9583,7 +9415,6 @@
           <a:lstStyle/>
           <a:p>
             <a:pPr algn="ctr"/>
-            <a:endParaRPr/>
           </a:p>
         </p:txBody>
       </p:sp>
@@ -9628,7 +9459,6 @@
           <a:lstStyle/>
           <a:p>
             <a:pPr algn="ctr"/>
-            <a:endParaRPr/>
           </a:p>
         </p:txBody>
       </p:sp>
@@ -9649,7 +9479,7 @@
           <a:noFill/>
         </p:spPr>
         <p:txBody>
-          <a:bodyPr wrap="square" lIns="0" tIns="0" rIns="0" bIns="0" anchor="t">
+          <a:bodyPr wrap="square" lIns="0" rIns="0" tIns="0" bIns="0" anchor="t">
             <a:spAutoFit/>
           </a:bodyPr>
           <a:lstStyle/>
@@ -9684,7 +9514,7 @@
           <a:noFill/>
         </p:spPr>
         <p:txBody>
-          <a:bodyPr wrap="square" lIns="0" tIns="0" rIns="0" bIns="0" anchor="t">
+          <a:bodyPr wrap="square" lIns="0" rIns="0" tIns="0" bIns="0" anchor="t">
             <a:spAutoFit/>
           </a:bodyPr>
           <a:lstStyle/>
@@ -9719,7 +9549,7 @@
           <a:noFill/>
         </p:spPr>
         <p:txBody>
-          <a:bodyPr wrap="square" lIns="0" tIns="0" rIns="0" bIns="0" anchor="t">
+          <a:bodyPr wrap="square" lIns="0" rIns="0" tIns="0" bIns="0" anchor="t">
             <a:spAutoFit/>
           </a:bodyPr>
           <a:lstStyle/>
@@ -9778,7 +9608,6 @@
           <a:lstStyle/>
           <a:p>
             <a:pPr algn="ctr"/>
-            <a:endParaRPr/>
           </a:p>
         </p:txBody>
       </p:sp>
@@ -9825,7 +9654,6 @@
           <a:lstStyle/>
           <a:p>
             <a:pPr algn="ctr"/>
-            <a:endParaRPr/>
           </a:p>
         </p:txBody>
       </p:sp>
@@ -9870,7 +9698,6 @@
           <a:lstStyle/>
           <a:p>
             <a:pPr algn="ctr"/>
-            <a:endParaRPr/>
           </a:p>
         </p:txBody>
       </p:sp>
@@ -9891,7 +9718,7 @@
           <a:noFill/>
         </p:spPr>
         <p:txBody>
-          <a:bodyPr wrap="square" lIns="0" tIns="0" rIns="0" bIns="0" anchor="t">
+          <a:bodyPr wrap="square" lIns="0" rIns="0" tIns="0" bIns="0" anchor="t">
             <a:spAutoFit/>
           </a:bodyPr>
           <a:lstStyle/>
@@ -9926,7 +9753,7 @@
           <a:noFill/>
         </p:spPr>
         <p:txBody>
-          <a:bodyPr wrap="square" lIns="0" tIns="0" rIns="0" bIns="0" anchor="t">
+          <a:bodyPr wrap="square" lIns="0" rIns="0" tIns="0" bIns="0" anchor="t">
             <a:spAutoFit/>
           </a:bodyPr>
           <a:lstStyle/>
@@ -9961,7 +9788,7 @@
           <a:noFill/>
         </p:spPr>
         <p:txBody>
-          <a:bodyPr wrap="square" lIns="0" tIns="0" rIns="0" bIns="0" anchor="t">
+          <a:bodyPr wrap="square" lIns="0" rIns="0" tIns="0" bIns="0" anchor="t">
             <a:spAutoFit/>
           </a:bodyPr>
           <a:lstStyle/>
@@ -10020,7 +9847,6 @@
           <a:lstStyle/>
           <a:p>
             <a:pPr algn="ctr"/>
-            <a:endParaRPr/>
           </a:p>
         </p:txBody>
       </p:sp>
@@ -10067,7 +9893,6 @@
           <a:lstStyle/>
           <a:p>
             <a:pPr algn="ctr"/>
-            <a:endParaRPr/>
           </a:p>
         </p:txBody>
       </p:sp>
@@ -10112,7 +9937,6 @@
           <a:lstStyle/>
           <a:p>
             <a:pPr algn="ctr"/>
-            <a:endParaRPr/>
           </a:p>
         </p:txBody>
       </p:sp>
@@ -10133,7 +9957,7 @@
           <a:noFill/>
         </p:spPr>
         <p:txBody>
-          <a:bodyPr wrap="square" lIns="0" tIns="0" rIns="0" bIns="0" anchor="t">
+          <a:bodyPr wrap="square" lIns="0" rIns="0" tIns="0" bIns="0" anchor="t">
             <a:spAutoFit/>
           </a:bodyPr>
           <a:lstStyle/>
@@ -10168,7 +9992,7 @@
           <a:noFill/>
         </p:spPr>
         <p:txBody>
-          <a:bodyPr wrap="square" lIns="0" tIns="0" rIns="0" bIns="0" anchor="t">
+          <a:bodyPr wrap="square" lIns="0" rIns="0" tIns="0" bIns="0" anchor="t">
             <a:spAutoFit/>
           </a:bodyPr>
           <a:lstStyle/>
@@ -10203,7 +10027,7 @@
           <a:noFill/>
         </p:spPr>
         <p:txBody>
-          <a:bodyPr wrap="square" lIns="0" tIns="0" rIns="0" bIns="0" anchor="t">
+          <a:bodyPr wrap="square" lIns="0" rIns="0" tIns="0" bIns="0" anchor="t">
             <a:spAutoFit/>
           </a:bodyPr>
           <a:lstStyle/>
@@ -10262,7 +10086,6 @@
           <a:lstStyle/>
           <a:p>
             <a:pPr algn="ctr"/>
-            <a:endParaRPr/>
           </a:p>
         </p:txBody>
       </p:sp>
@@ -10309,7 +10132,6 @@
           <a:lstStyle/>
           <a:p>
             <a:pPr algn="ctr"/>
-            <a:endParaRPr/>
           </a:p>
         </p:txBody>
       </p:sp>
@@ -10354,7 +10176,6 @@
           <a:lstStyle/>
           <a:p>
             <a:pPr algn="ctr"/>
-            <a:endParaRPr/>
           </a:p>
         </p:txBody>
       </p:sp>
@@ -10375,7 +10196,7 @@
           <a:noFill/>
         </p:spPr>
         <p:txBody>
-          <a:bodyPr wrap="square" lIns="0" tIns="0" rIns="0" bIns="0" anchor="t">
+          <a:bodyPr wrap="square" lIns="0" rIns="0" tIns="0" bIns="0" anchor="t">
             <a:spAutoFit/>
           </a:bodyPr>
           <a:lstStyle/>
@@ -10410,7 +10231,7 @@
           <a:noFill/>
         </p:spPr>
         <p:txBody>
-          <a:bodyPr wrap="square" lIns="0" tIns="0" rIns="0" bIns="0" anchor="t">
+          <a:bodyPr wrap="square" lIns="0" rIns="0" tIns="0" bIns="0" anchor="t">
             <a:spAutoFit/>
           </a:bodyPr>
           <a:lstStyle/>
@@ -10445,7 +10266,7 @@
           <a:noFill/>
         </p:spPr>
         <p:txBody>
-          <a:bodyPr wrap="square" lIns="0" tIns="0" rIns="0" bIns="0" anchor="t">
+          <a:bodyPr wrap="square" lIns="0" rIns="0" tIns="0" bIns="0" anchor="t">
             <a:spAutoFit/>
           </a:bodyPr>
           <a:lstStyle/>
@@ -10504,7 +10325,6 @@
           <a:lstStyle/>
           <a:p>
             <a:pPr algn="ctr"/>
-            <a:endParaRPr/>
           </a:p>
         </p:txBody>
       </p:sp>
@@ -10551,7 +10371,6 @@
           <a:lstStyle/>
           <a:p>
             <a:pPr algn="ctr"/>
-            <a:endParaRPr/>
           </a:p>
         </p:txBody>
       </p:sp>
@@ -10596,7 +10415,6 @@
           <a:lstStyle/>
           <a:p>
             <a:pPr algn="ctr"/>
-            <a:endParaRPr/>
           </a:p>
         </p:txBody>
       </p:sp>
@@ -10617,7 +10435,7 @@
           <a:noFill/>
         </p:spPr>
         <p:txBody>
-          <a:bodyPr wrap="square" lIns="0" tIns="0" rIns="0" bIns="0" anchor="t">
+          <a:bodyPr wrap="square" lIns="0" rIns="0" tIns="0" bIns="0" anchor="t">
             <a:spAutoFit/>
           </a:bodyPr>
           <a:lstStyle/>
@@ -10652,7 +10470,7 @@
           <a:noFill/>
         </p:spPr>
         <p:txBody>
-          <a:bodyPr wrap="square" lIns="0" tIns="0" rIns="0" bIns="0" anchor="t">
+          <a:bodyPr wrap="square" lIns="0" rIns="0" tIns="0" bIns="0" anchor="t">
             <a:spAutoFit/>
           </a:bodyPr>
           <a:lstStyle/>
@@ -10687,7 +10505,7 @@
           <a:noFill/>
         </p:spPr>
         <p:txBody>
-          <a:bodyPr wrap="square" lIns="0" tIns="0" rIns="0" bIns="0" anchor="t">
+          <a:bodyPr wrap="square" lIns="0" rIns="0" tIns="0" bIns="0" anchor="t">
             <a:spAutoFit/>
           </a:bodyPr>
           <a:lstStyle/>
@@ -10746,7 +10564,6 @@
           <a:lstStyle/>
           <a:p>
             <a:pPr algn="ctr"/>
-            <a:endParaRPr/>
           </a:p>
         </p:txBody>
       </p:sp>
@@ -10767,7 +10584,7 @@
           <a:noFill/>
         </p:spPr>
         <p:txBody>
-          <a:bodyPr wrap="square" lIns="0" tIns="0" rIns="0" bIns="0" anchor="t">
+          <a:bodyPr wrap="square" lIns="0" rIns="0" tIns="0" bIns="0" anchor="t">
             <a:spAutoFit/>
           </a:bodyPr>
           <a:lstStyle/>
@@ -10802,7 +10619,7 @@
           <a:noFill/>
         </p:spPr>
         <p:txBody>
-          <a:bodyPr wrap="square" lIns="0" tIns="0" rIns="0" bIns="0" anchor="t">
+          <a:bodyPr wrap="square" lIns="0" rIns="0" tIns="0" bIns="0" anchor="t">
             <a:spAutoFit/>
           </a:bodyPr>
           <a:lstStyle/>
@@ -10829,7 +10646,7 @@
 </file>
 
 <file path=ppt/slides/slide3.xml><?xml version="1.0" encoding="utf-8"?>
-<p:sld xmlns:a="http://schemas.openxmlformats.org/drawingml/2006/main" xmlns:r="http://schemas.openxmlformats.org/officeDocument/2006/relationships" xmlns:p="http://schemas.openxmlformats.org/presentationml/2006/main">
+<p:sld xmlns:a="http://schemas.openxmlformats.org/drawingml/2006/main" xmlns:p="http://schemas.openxmlformats.org/presentationml/2006/main" xmlns:r="http://schemas.openxmlformats.org/officeDocument/2006/relationships">
   <p:cSld>
     <p:spTree>
       <p:nvGrpSpPr>
@@ -10837,14 +10654,7 @@
         <p:cNvGrpSpPr/>
         <p:nvPr/>
       </p:nvGrpSpPr>
-      <p:grpSpPr>
-        <a:xfrm>
-          <a:off x="0" y="0"/>
-          <a:ext cx="0" cy="0"/>
-          <a:chOff x="0" y="0"/>
-          <a:chExt cx="0" cy="0"/>
-        </a:xfrm>
-      </p:grpSpPr>
+      <p:grpSpPr/>
       <p:sp>
         <p:nvSpPr>
           <p:cNvPr id="2" name="Rectangle 1"/>
@@ -10886,7 +10696,6 @@
           <a:lstStyle/>
           <a:p>
             <a:pPr algn="ctr"/>
-            <a:endParaRPr/>
           </a:p>
         </p:txBody>
       </p:sp>
@@ -10931,7 +10740,6 @@
           <a:lstStyle/>
           <a:p>
             <a:pPr algn="ctr"/>
-            <a:endParaRPr/>
           </a:p>
         </p:txBody>
       </p:sp>
@@ -10952,7 +10760,7 @@
           <a:noFill/>
         </p:spPr>
         <p:txBody>
-          <a:bodyPr wrap="square" lIns="0" tIns="0" rIns="0" bIns="0" anchor="t">
+          <a:bodyPr wrap="square" lIns="0" rIns="0" tIns="0" bIns="0" anchor="t">
             <a:spAutoFit/>
           </a:bodyPr>
           <a:lstStyle/>
@@ -10987,7 +10795,7 @@
           <a:noFill/>
         </p:spPr>
         <p:txBody>
-          <a:bodyPr wrap="square" lIns="0" tIns="0" rIns="0" bIns="0" anchor="t">
+          <a:bodyPr wrap="square" lIns="0" rIns="0" tIns="0" bIns="0" anchor="t">
             <a:spAutoFit/>
           </a:bodyPr>
           <a:lstStyle/>
@@ -11022,7 +10830,7 @@
           <a:noFill/>
         </p:spPr>
         <p:txBody>
-          <a:bodyPr wrap="square" lIns="0" tIns="0" rIns="0" bIns="0" anchor="t">
+          <a:bodyPr wrap="square" lIns="0" rIns="0" tIns="0" bIns="0" anchor="t">
             <a:spAutoFit/>
           </a:bodyPr>
           <a:lstStyle/>
@@ -11142,7 +10950,7 @@
                 </a:solidFill>
                 <a:latin typeface="Calibri"/>
               </a:rPr>
-              <a:t>Parole cifrate cu scrypt și sare aleatorie.</a:t>
+              <a:t>Parole cifrate cu scrypt și salt aleatoriu.</a:t>
             </a:r>
           </a:p>
           <a:p>
@@ -11272,7 +11080,6 @@
           <a:lstStyle/>
           <a:p>
             <a:pPr algn="ctr"/>
-            <a:endParaRPr/>
           </a:p>
         </p:txBody>
       </p:sp>
@@ -11293,7 +11100,7 @@
           <a:noFill/>
         </p:spPr>
         <p:txBody>
-          <a:bodyPr wrap="square" lIns="0" tIns="0" rIns="0" bIns="0" anchor="t">
+          <a:bodyPr wrap="square" lIns="0" rIns="0" tIns="0" bIns="0" anchor="t">
             <a:spAutoFit/>
           </a:bodyPr>
           <a:lstStyle/>
@@ -11328,7 +11135,7 @@
           <a:noFill/>
         </p:spPr>
         <p:txBody>
-          <a:bodyPr wrap="square" lIns="0" tIns="0" rIns="0" bIns="0" anchor="t">
+          <a:bodyPr wrap="square" lIns="0" rIns="0" tIns="0" bIns="0" anchor="t">
             <a:spAutoFit/>
           </a:bodyPr>
           <a:lstStyle/>
@@ -11355,7 +11162,7 @@
 </file>
 
 <file path=ppt/slides/slide4.xml><?xml version="1.0" encoding="utf-8"?>
-<p:sld xmlns:a="http://schemas.openxmlformats.org/drawingml/2006/main" xmlns:r="http://schemas.openxmlformats.org/officeDocument/2006/relationships" xmlns:p="http://schemas.openxmlformats.org/presentationml/2006/main">
+<p:sld xmlns:a="http://schemas.openxmlformats.org/drawingml/2006/main" xmlns:p="http://schemas.openxmlformats.org/presentationml/2006/main" xmlns:r="http://schemas.openxmlformats.org/officeDocument/2006/relationships">
   <p:cSld>
     <p:spTree>
       <p:nvGrpSpPr>
@@ -11363,14 +11170,7 @@
         <p:cNvGrpSpPr/>
         <p:nvPr/>
       </p:nvGrpSpPr>
-      <p:grpSpPr>
-        <a:xfrm>
-          <a:off x="0" y="0"/>
-          <a:ext cx="0" cy="0"/>
-          <a:chOff x="0" y="0"/>
-          <a:chExt cx="0" cy="0"/>
-        </a:xfrm>
-      </p:grpSpPr>
+      <p:grpSpPr/>
       <p:sp>
         <p:nvSpPr>
           <p:cNvPr id="2" name="Rectangle 1"/>
@@ -11412,7 +11212,6 @@
           <a:lstStyle/>
           <a:p>
             <a:pPr algn="ctr"/>
-            <a:endParaRPr/>
           </a:p>
         </p:txBody>
       </p:sp>
@@ -11457,7 +11256,6 @@
           <a:lstStyle/>
           <a:p>
             <a:pPr algn="ctr"/>
-            <a:endParaRPr/>
           </a:p>
         </p:txBody>
       </p:sp>
@@ -11478,7 +11276,7 @@
           <a:noFill/>
         </p:spPr>
         <p:txBody>
-          <a:bodyPr wrap="square" lIns="0" tIns="0" rIns="0" bIns="0" anchor="t">
+          <a:bodyPr wrap="square" lIns="0" rIns="0" tIns="0" bIns="0" anchor="t">
             <a:spAutoFit/>
           </a:bodyPr>
           <a:lstStyle/>
@@ -11513,7 +11311,7 @@
           <a:noFill/>
         </p:spPr>
         <p:txBody>
-          <a:bodyPr wrap="square" lIns="0" tIns="0" rIns="0" bIns="0" anchor="t">
+          <a:bodyPr wrap="square" lIns="0" rIns="0" tIns="0" bIns="0" anchor="t">
             <a:spAutoFit/>
           </a:bodyPr>
           <a:lstStyle/>
@@ -11548,7 +11346,7 @@
           <a:noFill/>
         </p:spPr>
         <p:txBody>
-          <a:bodyPr wrap="square" lIns="0" tIns="0" rIns="0" bIns="0" anchor="t">
+          <a:bodyPr wrap="square" lIns="0" rIns="0" tIns="0" bIns="0" anchor="t">
             <a:spAutoFit/>
           </a:bodyPr>
           <a:lstStyle/>
@@ -11607,7 +11405,6 @@
           <a:lstStyle/>
           <a:p>
             <a:pPr algn="ctr"/>
-            <a:endParaRPr/>
           </a:p>
         </p:txBody>
       </p:sp>
@@ -11654,7 +11451,6 @@
           <a:lstStyle/>
           <a:p>
             <a:pPr algn="ctr"/>
-            <a:endParaRPr/>
           </a:p>
         </p:txBody>
       </p:sp>
@@ -11699,7 +11495,6 @@
           <a:lstStyle/>
           <a:p>
             <a:pPr algn="ctr"/>
-            <a:endParaRPr/>
           </a:p>
         </p:txBody>
       </p:sp>
@@ -11720,7 +11515,7 @@
           <a:noFill/>
         </p:spPr>
         <p:txBody>
-          <a:bodyPr wrap="square" lIns="0" tIns="0" rIns="0" bIns="0" anchor="ctr">
+          <a:bodyPr wrap="square" lIns="0" rIns="0" tIns="0" bIns="0" anchor="ctr">
             <a:spAutoFit/>
           </a:bodyPr>
           <a:lstStyle/>
@@ -11755,7 +11550,7 @@
           <a:noFill/>
         </p:spPr>
         <p:txBody>
-          <a:bodyPr wrap="square" lIns="0" tIns="0" rIns="0" bIns="0" anchor="t">
+          <a:bodyPr wrap="square" lIns="0" rIns="0" tIns="0" bIns="0" anchor="t">
             <a:spAutoFit/>
           </a:bodyPr>
           <a:lstStyle/>
@@ -11790,7 +11585,7 @@
           <a:noFill/>
         </p:spPr>
         <p:txBody>
-          <a:bodyPr wrap="square" lIns="0" tIns="0" rIns="0" bIns="0" anchor="t">
+          <a:bodyPr wrap="square" lIns="0" rIns="0" tIns="0" bIns="0" anchor="t">
             <a:spAutoFit/>
           </a:bodyPr>
           <a:lstStyle/>
@@ -11849,7 +11644,6 @@
           <a:lstStyle/>
           <a:p>
             <a:pPr algn="ctr"/>
-            <a:endParaRPr/>
           </a:p>
         </p:txBody>
       </p:sp>
@@ -11896,7 +11690,6 @@
           <a:lstStyle/>
           <a:p>
             <a:pPr algn="ctr"/>
-            <a:endParaRPr/>
           </a:p>
         </p:txBody>
       </p:sp>
@@ -11941,7 +11734,6 @@
           <a:lstStyle/>
           <a:p>
             <a:pPr algn="ctr"/>
-            <a:endParaRPr/>
           </a:p>
         </p:txBody>
       </p:sp>
@@ -11962,7 +11754,7 @@
           <a:noFill/>
         </p:spPr>
         <p:txBody>
-          <a:bodyPr wrap="square" lIns="0" tIns="0" rIns="0" bIns="0" anchor="ctr">
+          <a:bodyPr wrap="square" lIns="0" rIns="0" tIns="0" bIns="0" anchor="ctr">
             <a:spAutoFit/>
           </a:bodyPr>
           <a:lstStyle/>
@@ -11997,7 +11789,7 @@
           <a:noFill/>
         </p:spPr>
         <p:txBody>
-          <a:bodyPr wrap="square" lIns="0" tIns="0" rIns="0" bIns="0" anchor="t">
+          <a:bodyPr wrap="square" lIns="0" rIns="0" tIns="0" bIns="0" anchor="t">
             <a:spAutoFit/>
           </a:bodyPr>
           <a:lstStyle/>
@@ -12032,7 +11824,7 @@
           <a:noFill/>
         </p:spPr>
         <p:txBody>
-          <a:bodyPr wrap="square" lIns="0" tIns="0" rIns="0" bIns="0" anchor="t">
+          <a:bodyPr wrap="square" lIns="0" rIns="0" tIns="0" bIns="0" anchor="t">
             <a:spAutoFit/>
           </a:bodyPr>
           <a:lstStyle/>
@@ -12091,7 +11883,6 @@
           <a:lstStyle/>
           <a:p>
             <a:pPr algn="ctr"/>
-            <a:endParaRPr/>
           </a:p>
         </p:txBody>
       </p:sp>
@@ -12138,7 +11929,6 @@
           <a:lstStyle/>
           <a:p>
             <a:pPr algn="ctr"/>
-            <a:endParaRPr/>
           </a:p>
         </p:txBody>
       </p:sp>
@@ -12183,7 +11973,6 @@
           <a:lstStyle/>
           <a:p>
             <a:pPr algn="ctr"/>
-            <a:endParaRPr/>
           </a:p>
         </p:txBody>
       </p:sp>
@@ -12204,7 +11993,7 @@
           <a:noFill/>
         </p:spPr>
         <p:txBody>
-          <a:bodyPr wrap="square" lIns="0" tIns="0" rIns="0" bIns="0" anchor="ctr">
+          <a:bodyPr wrap="square" lIns="0" rIns="0" tIns="0" bIns="0" anchor="ctr">
             <a:spAutoFit/>
           </a:bodyPr>
           <a:lstStyle/>
@@ -12239,7 +12028,7 @@
           <a:noFill/>
         </p:spPr>
         <p:txBody>
-          <a:bodyPr wrap="square" lIns="0" tIns="0" rIns="0" bIns="0" anchor="t">
+          <a:bodyPr wrap="square" lIns="0" rIns="0" tIns="0" bIns="0" anchor="t">
             <a:spAutoFit/>
           </a:bodyPr>
           <a:lstStyle/>
@@ -12274,7 +12063,7 @@
           <a:noFill/>
         </p:spPr>
         <p:txBody>
-          <a:bodyPr wrap="square" lIns="0" tIns="0" rIns="0" bIns="0" anchor="t">
+          <a:bodyPr wrap="square" lIns="0" rIns="0" tIns="0" bIns="0" anchor="t">
             <a:spAutoFit/>
           </a:bodyPr>
           <a:lstStyle/>
@@ -12333,7 +12122,6 @@
           <a:lstStyle/>
           <a:p>
             <a:pPr algn="ctr"/>
-            <a:endParaRPr/>
           </a:p>
         </p:txBody>
       </p:sp>
@@ -12380,7 +12168,6 @@
           <a:lstStyle/>
           <a:p>
             <a:pPr algn="ctr"/>
-            <a:endParaRPr/>
           </a:p>
         </p:txBody>
       </p:sp>
@@ -12425,7 +12212,6 @@
           <a:lstStyle/>
           <a:p>
             <a:pPr algn="ctr"/>
-            <a:endParaRPr/>
           </a:p>
         </p:txBody>
       </p:sp>
@@ -12446,7 +12232,7 @@
           <a:noFill/>
         </p:spPr>
         <p:txBody>
-          <a:bodyPr wrap="square" lIns="0" tIns="0" rIns="0" bIns="0" anchor="ctr">
+          <a:bodyPr wrap="square" lIns="0" rIns="0" tIns="0" bIns="0" anchor="ctr">
             <a:spAutoFit/>
           </a:bodyPr>
           <a:lstStyle/>
@@ -12481,7 +12267,7 @@
           <a:noFill/>
         </p:spPr>
         <p:txBody>
-          <a:bodyPr wrap="square" lIns="0" tIns="0" rIns="0" bIns="0" anchor="t">
+          <a:bodyPr wrap="square" lIns="0" rIns="0" tIns="0" bIns="0" anchor="t">
             <a:spAutoFit/>
           </a:bodyPr>
           <a:lstStyle/>
@@ -12516,7 +12302,7 @@
           <a:noFill/>
         </p:spPr>
         <p:txBody>
-          <a:bodyPr wrap="square" lIns="0" tIns="0" rIns="0" bIns="0" anchor="t">
+          <a:bodyPr wrap="square" lIns="0" rIns="0" tIns="0" bIns="0" anchor="t">
             <a:spAutoFit/>
           </a:bodyPr>
           <a:lstStyle/>
@@ -12575,7 +12361,6 @@
           <a:lstStyle/>
           <a:p>
             <a:pPr algn="ctr"/>
-            <a:endParaRPr/>
           </a:p>
         </p:txBody>
       </p:sp>
@@ -12596,7 +12381,7 @@
           <a:noFill/>
         </p:spPr>
         <p:txBody>
-          <a:bodyPr wrap="square" lIns="0" tIns="0" rIns="0" bIns="0" anchor="t">
+          <a:bodyPr wrap="square" lIns="0" rIns="0" tIns="0" bIns="0" anchor="t">
             <a:spAutoFit/>
           </a:bodyPr>
           <a:lstStyle/>
@@ -12631,7 +12416,7 @@
           <a:noFill/>
         </p:spPr>
         <p:txBody>
-          <a:bodyPr wrap="square" lIns="0" tIns="0" rIns="0" bIns="0" anchor="t">
+          <a:bodyPr wrap="square" lIns="0" rIns="0" tIns="0" bIns="0" anchor="t">
             <a:spAutoFit/>
           </a:bodyPr>
           <a:lstStyle/>
@@ -12658,7 +12443,7 @@
 </file>
 
 <file path=ppt/slides/slide5.xml><?xml version="1.0" encoding="utf-8"?>
-<p:sld xmlns:a="http://schemas.openxmlformats.org/drawingml/2006/main" xmlns:r="http://schemas.openxmlformats.org/officeDocument/2006/relationships" xmlns:p="http://schemas.openxmlformats.org/presentationml/2006/main">
+<p:sld xmlns:a="http://schemas.openxmlformats.org/drawingml/2006/main" xmlns:p="http://schemas.openxmlformats.org/presentationml/2006/main" xmlns:r="http://schemas.openxmlformats.org/officeDocument/2006/relationships">
   <p:cSld>
     <p:spTree>
       <p:nvGrpSpPr>
@@ -12666,14 +12451,7 @@
         <p:cNvGrpSpPr/>
         <p:nvPr/>
       </p:nvGrpSpPr>
-      <p:grpSpPr>
-        <a:xfrm>
-          <a:off x="0" y="0"/>
-          <a:ext cx="0" cy="0"/>
-          <a:chOff x="0" y="0"/>
-          <a:chExt cx="0" cy="0"/>
-        </a:xfrm>
-      </p:grpSpPr>
+      <p:grpSpPr/>
       <p:sp>
         <p:nvSpPr>
           <p:cNvPr id="2" name="Rectangle 1"/>
@@ -12715,7 +12493,6 @@
           <a:lstStyle/>
           <a:p>
             <a:pPr algn="ctr"/>
-            <a:endParaRPr/>
           </a:p>
         </p:txBody>
       </p:sp>
@@ -12760,7 +12537,6 @@
           <a:lstStyle/>
           <a:p>
             <a:pPr algn="ctr"/>
-            <a:endParaRPr/>
           </a:p>
         </p:txBody>
       </p:sp>
@@ -12781,7 +12557,7 @@
           <a:noFill/>
         </p:spPr>
         <p:txBody>
-          <a:bodyPr wrap="square" lIns="0" tIns="0" rIns="0" bIns="0" anchor="t">
+          <a:bodyPr wrap="square" lIns="0" rIns="0" tIns="0" bIns="0" anchor="t">
             <a:spAutoFit/>
           </a:bodyPr>
           <a:lstStyle/>
@@ -12794,7 +12570,7 @@
                 </a:solidFill>
                 <a:latin typeface="Calibri"/>
               </a:rPr>
-              <a:t>Modelul de date — entități și relații</a:t>
+              <a:t>Modelul de date</a:t>
             </a:r>
           </a:p>
         </p:txBody>
@@ -12816,7 +12592,7 @@
           <a:noFill/>
         </p:spPr>
         <p:txBody>
-          <a:bodyPr wrap="square" lIns="0" tIns="0" rIns="0" bIns="0" anchor="t">
+          <a:bodyPr wrap="square" lIns="0" rIns="0" tIns="0" bIns="0" anchor="t">
             <a:spAutoFit/>
           </a:bodyPr>
           <a:lstStyle/>
@@ -12829,7 +12605,7 @@
                 </a:solidFill>
                 <a:latin typeface="Calibri"/>
               </a:rPr>
-              <a:t>Diagrama entitate-relație cu cele 9 entități principale</a:t>
+              <a:t>Cele 9 entități principale și câmpurile lor cheie</a:t>
             </a:r>
           </a:p>
         </p:txBody>
@@ -12851,7 +12627,7 @@
           <a:noFill/>
         </p:spPr>
         <p:txBody>
-          <a:bodyPr wrap="square" lIns="0" tIns="0" rIns="0" bIns="0" anchor="t">
+          <a:bodyPr wrap="square" lIns="0" rIns="0" tIns="0" bIns="0" anchor="t">
             <a:spAutoFit/>
           </a:bodyPr>
           <a:lstStyle/>
@@ -12877,8 +12653,8 @@
         </p:nvSpPr>
         <p:spPr>
           <a:xfrm>
-            <a:off x="448056" y="1737360"/>
-            <a:ext cx="3611880" cy="1508760"/>
+            <a:off x="448056" y="1709928"/>
+            <a:ext cx="3520440" cy="1417320"/>
           </a:xfrm>
           <a:prstGeom prst="rect">
             <a:avLst/>
@@ -12910,7 +12686,6 @@
           <a:lstStyle/>
           <a:p>
             <a:pPr algn="ctr"/>
-            <a:endParaRPr/>
           </a:p>
         </p:txBody>
       </p:sp>
@@ -12922,8 +12697,8 @@
         </p:nvSpPr>
         <p:spPr>
           <a:xfrm>
-            <a:off x="411480" y="1691640"/>
-            <a:ext cx="3611880" cy="1508760"/>
+            <a:off x="411480" y="1664208"/>
+            <a:ext cx="3520440" cy="1417320"/>
           </a:xfrm>
           <a:prstGeom prst="rect">
             <a:avLst/>
@@ -12957,7 +12732,6 @@
           <a:lstStyle/>
           <a:p>
             <a:pPr algn="ctr"/>
-            <a:endParaRPr/>
           </a:p>
         </p:txBody>
       </p:sp>
@@ -12969,8 +12743,8 @@
         </p:nvSpPr>
         <p:spPr>
           <a:xfrm>
-            <a:off x="411480" y="1691640"/>
-            <a:ext cx="3611880" cy="502920"/>
+            <a:off x="411480" y="1664208"/>
+            <a:ext cx="3520440" cy="475488"/>
           </a:xfrm>
           <a:prstGeom prst="rect">
             <a:avLst/>
@@ -13002,7 +12776,6 @@
           <a:lstStyle/>
           <a:p>
             <a:pPr algn="ctr"/>
-            <a:endParaRPr/>
           </a:p>
         </p:txBody>
       </p:sp>
@@ -13014,23 +12787,23 @@
         </p:nvSpPr>
         <p:spPr>
           <a:xfrm>
-            <a:off x="594360" y="1764792"/>
-            <a:ext cx="3337560" cy="411480"/>
-          </a:xfrm>
-          <a:prstGeom prst="rect">
-            <a:avLst/>
-          </a:prstGeom>
-          <a:noFill/>
-        </p:spPr>
-        <p:txBody>
-          <a:bodyPr wrap="square" lIns="0" tIns="0" rIns="0" bIns="0" anchor="t">
+            <a:off x="576072" y="1719072"/>
+            <a:ext cx="3291840" cy="384048"/>
+          </a:xfrm>
+          <a:prstGeom prst="rect">
+            <a:avLst/>
+          </a:prstGeom>
+          <a:noFill/>
+        </p:spPr>
+        <p:txBody>
+          <a:bodyPr wrap="square" lIns="0" rIns="0" tIns="0" bIns="0" anchor="t">
             <a:spAutoFit/>
           </a:bodyPr>
           <a:lstStyle/>
           <a:p>
             <a:pPr algn="l"/>
             <a:r>
-              <a:rPr sz="2000" b="1">
+              <a:rPr sz="1900" b="1">
                 <a:solidFill>
                   <a:srgbClr val="FFFFFF"/>
                 </a:solidFill>
@@ -13049,23 +12822,23 @@
         </p:nvSpPr>
         <p:spPr>
           <a:xfrm>
-            <a:off x="594360" y="2331720"/>
-            <a:ext cx="3337560" cy="301752"/>
-          </a:xfrm>
-          <a:prstGeom prst="rect">
-            <a:avLst/>
-          </a:prstGeom>
-          <a:noFill/>
-        </p:spPr>
-        <p:txBody>
-          <a:bodyPr wrap="square" lIns="0" tIns="0" rIns="0" bIns="0" anchor="t">
+            <a:off x="576072" y="2231136"/>
+            <a:ext cx="3291840" cy="274320"/>
+          </a:xfrm>
+          <a:prstGeom prst="rect">
+            <a:avLst/>
+          </a:prstGeom>
+          <a:noFill/>
+        </p:spPr>
+        <p:txBody>
+          <a:bodyPr wrap="square" lIns="0" rIns="0" tIns="0" bIns="0" anchor="t">
             <a:spAutoFit/>
           </a:bodyPr>
           <a:lstStyle/>
           <a:p>
             <a:pPr algn="l"/>
             <a:r>
-              <a:rPr sz="1500" b="0">
+              <a:rPr sz="1300" b="0">
                 <a:solidFill>
                   <a:srgbClr val="1F2937"/>
                 </a:solidFill>
@@ -13084,23 +12857,23 @@
         </p:nvSpPr>
         <p:spPr>
           <a:xfrm>
-            <a:off x="594360" y="2633472"/>
-            <a:ext cx="3337560" cy="301752"/>
-          </a:xfrm>
-          <a:prstGeom prst="rect">
-            <a:avLst/>
-          </a:prstGeom>
-          <a:noFill/>
-        </p:spPr>
-        <p:txBody>
-          <a:bodyPr wrap="square" lIns="0" tIns="0" rIns="0" bIns="0" anchor="t">
+            <a:off x="576072" y="2505456"/>
+            <a:ext cx="3291840" cy="274320"/>
+          </a:xfrm>
+          <a:prstGeom prst="rect">
+            <a:avLst/>
+          </a:prstGeom>
+          <a:noFill/>
+        </p:spPr>
+        <p:txBody>
+          <a:bodyPr wrap="square" lIns="0" rIns="0" tIns="0" bIns="0" anchor="t">
             <a:spAutoFit/>
           </a:bodyPr>
           <a:lstStyle/>
           <a:p>
             <a:pPr algn="l"/>
             <a:r>
-              <a:rPr sz="1500" b="0">
+              <a:rPr sz="1300" b="0">
                 <a:solidFill>
                   <a:srgbClr val="1F2937"/>
                 </a:solidFill>
@@ -13119,8 +12892,8 @@
         </p:nvSpPr>
         <p:spPr>
           <a:xfrm>
-            <a:off x="4242816" y="1737360"/>
-            <a:ext cx="3611880" cy="1508760"/>
+            <a:off x="4315968" y="1709928"/>
+            <a:ext cx="3520440" cy="1417320"/>
           </a:xfrm>
           <a:prstGeom prst="rect">
             <a:avLst/>
@@ -13152,7 +12925,6 @@
           <a:lstStyle/>
           <a:p>
             <a:pPr algn="ctr"/>
-            <a:endParaRPr/>
           </a:p>
         </p:txBody>
       </p:sp>
@@ -13164,8 +12936,8 @@
         </p:nvSpPr>
         <p:spPr>
           <a:xfrm>
-            <a:off x="4206240" y="1691640"/>
-            <a:ext cx="3611880" cy="1508760"/>
+            <a:off x="4279392" y="1664208"/>
+            <a:ext cx="3520440" cy="1417320"/>
           </a:xfrm>
           <a:prstGeom prst="rect">
             <a:avLst/>
@@ -13199,7 +12971,6 @@
           <a:lstStyle/>
           <a:p>
             <a:pPr algn="ctr"/>
-            <a:endParaRPr/>
           </a:p>
         </p:txBody>
       </p:sp>
@@ -13211,8 +12982,8 @@
         </p:nvSpPr>
         <p:spPr>
           <a:xfrm>
-            <a:off x="4206240" y="1691640"/>
-            <a:ext cx="3611880" cy="502920"/>
+            <a:off x="4279392" y="1664208"/>
+            <a:ext cx="3520440" cy="475488"/>
           </a:xfrm>
           <a:prstGeom prst="rect">
             <a:avLst/>
@@ -13244,7 +13015,6 @@
           <a:lstStyle/>
           <a:p>
             <a:pPr algn="ctr"/>
-            <a:endParaRPr/>
           </a:p>
         </p:txBody>
       </p:sp>
@@ -13256,23 +13026,23 @@
         </p:nvSpPr>
         <p:spPr>
           <a:xfrm>
-            <a:off x="4389120" y="1764792"/>
-            <a:ext cx="3337560" cy="411480"/>
-          </a:xfrm>
-          <a:prstGeom prst="rect">
-            <a:avLst/>
-          </a:prstGeom>
-          <a:noFill/>
-        </p:spPr>
-        <p:txBody>
-          <a:bodyPr wrap="square" lIns="0" tIns="0" rIns="0" bIns="0" anchor="t">
+            <a:off x="4443984" y="1719072"/>
+            <a:ext cx="3291840" cy="384048"/>
+          </a:xfrm>
+          <a:prstGeom prst="rect">
+            <a:avLst/>
+          </a:prstGeom>
+          <a:noFill/>
+        </p:spPr>
+        <p:txBody>
+          <a:bodyPr wrap="square" lIns="0" rIns="0" tIns="0" bIns="0" anchor="t">
             <a:spAutoFit/>
           </a:bodyPr>
           <a:lstStyle/>
           <a:p>
             <a:pPr algn="l"/>
             <a:r>
-              <a:rPr sz="2000" b="1">
+              <a:rPr sz="1900" b="1">
                 <a:solidFill>
                   <a:srgbClr val="FFFFFF"/>
                 </a:solidFill>
@@ -13291,23 +13061,23 @@
         </p:nvSpPr>
         <p:spPr>
           <a:xfrm>
-            <a:off x="4389120" y="2331720"/>
-            <a:ext cx="3337560" cy="301752"/>
-          </a:xfrm>
-          <a:prstGeom prst="rect">
-            <a:avLst/>
-          </a:prstGeom>
-          <a:noFill/>
-        </p:spPr>
-        <p:txBody>
-          <a:bodyPr wrap="square" lIns="0" tIns="0" rIns="0" bIns="0" anchor="t">
+            <a:off x="4443984" y="2231136"/>
+            <a:ext cx="3291840" cy="274320"/>
+          </a:xfrm>
+          <a:prstGeom prst="rect">
+            <a:avLst/>
+          </a:prstGeom>
+          <a:noFill/>
+        </p:spPr>
+        <p:txBody>
+          <a:bodyPr wrap="square" lIns="0" rIns="0" tIns="0" bIns="0" anchor="t">
             <a:spAutoFit/>
           </a:bodyPr>
           <a:lstStyle/>
           <a:p>
             <a:pPr algn="l"/>
             <a:r>
-              <a:rPr sz="1500" b="0">
+              <a:rPr sz="1300" b="0">
                 <a:solidFill>
                   <a:srgbClr val="1F2937"/>
                 </a:solidFill>
@@ -13326,23 +13096,23 @@
         </p:nvSpPr>
         <p:spPr>
           <a:xfrm>
-            <a:off x="4389120" y="2633472"/>
-            <a:ext cx="3337560" cy="301752"/>
-          </a:xfrm>
-          <a:prstGeom prst="rect">
-            <a:avLst/>
-          </a:prstGeom>
-          <a:noFill/>
-        </p:spPr>
-        <p:txBody>
-          <a:bodyPr wrap="square" lIns="0" tIns="0" rIns="0" bIns="0" anchor="t">
+            <a:off x="4443984" y="2505456"/>
+            <a:ext cx="3291840" cy="274320"/>
+          </a:xfrm>
+          <a:prstGeom prst="rect">
+            <a:avLst/>
+          </a:prstGeom>
+          <a:noFill/>
+        </p:spPr>
+        <p:txBody>
+          <a:bodyPr wrap="square" lIns="0" rIns="0" tIns="0" bIns="0" anchor="t">
             <a:spAutoFit/>
           </a:bodyPr>
           <a:lstStyle/>
           <a:p>
             <a:pPr algn="l"/>
             <a:r>
-              <a:rPr sz="1500" b="0">
+              <a:rPr sz="1300" b="0">
                 <a:solidFill>
                   <a:srgbClr val="1F2937"/>
                 </a:solidFill>
@@ -13361,23 +13131,23 @@
         </p:nvSpPr>
         <p:spPr>
           <a:xfrm>
-            <a:off x="4389120" y="2935224"/>
-            <a:ext cx="3337560" cy="301752"/>
-          </a:xfrm>
-          <a:prstGeom prst="rect">
-            <a:avLst/>
-          </a:prstGeom>
-          <a:noFill/>
-        </p:spPr>
-        <p:txBody>
-          <a:bodyPr wrap="square" lIns="0" tIns="0" rIns="0" bIns="0" anchor="t">
+            <a:off x="4443984" y="2779776"/>
+            <a:ext cx="3291840" cy="274320"/>
+          </a:xfrm>
+          <a:prstGeom prst="rect">
+            <a:avLst/>
+          </a:prstGeom>
+          <a:noFill/>
+        </p:spPr>
+        <p:txBody>
+          <a:bodyPr wrap="square" lIns="0" rIns="0" tIns="0" bIns="0" anchor="t">
             <a:spAutoFit/>
           </a:bodyPr>
           <a:lstStyle/>
           <a:p>
             <a:pPr algn="l"/>
             <a:r>
-              <a:rPr sz="1500" b="0">
+              <a:rPr sz="1300" b="0">
                 <a:solidFill>
                   <a:srgbClr val="1F2937"/>
                 </a:solidFill>
@@ -13396,8 +13166,8 @@
         </p:nvSpPr>
         <p:spPr>
           <a:xfrm>
-            <a:off x="8037576" y="1737360"/>
-            <a:ext cx="3611880" cy="1508760"/>
+            <a:off x="8183880" y="1709928"/>
+            <a:ext cx="3520440" cy="1417320"/>
           </a:xfrm>
           <a:prstGeom prst="rect">
             <a:avLst/>
@@ -13429,7 +13199,6 @@
           <a:lstStyle/>
           <a:p>
             <a:pPr algn="ctr"/>
-            <a:endParaRPr/>
           </a:p>
         </p:txBody>
       </p:sp>
@@ -13441,8 +13210,8 @@
         </p:nvSpPr>
         <p:spPr>
           <a:xfrm>
-            <a:off x="8001000" y="1691640"/>
-            <a:ext cx="3611880" cy="1508760"/>
+            <a:off x="8147304" y="1664208"/>
+            <a:ext cx="3520440" cy="1417320"/>
           </a:xfrm>
           <a:prstGeom prst="rect">
             <a:avLst/>
@@ -13476,7 +13245,6 @@
           <a:lstStyle/>
           <a:p>
             <a:pPr algn="ctr"/>
-            <a:endParaRPr/>
           </a:p>
         </p:txBody>
       </p:sp>
@@ -13488,8 +13256,8 @@
         </p:nvSpPr>
         <p:spPr>
           <a:xfrm>
-            <a:off x="8001000" y="1691640"/>
-            <a:ext cx="3611880" cy="502920"/>
+            <a:off x="8147304" y="1664208"/>
+            <a:ext cx="3520440" cy="475488"/>
           </a:xfrm>
           <a:prstGeom prst="rect">
             <a:avLst/>
@@ -13521,7 +13289,6 @@
           <a:lstStyle/>
           <a:p>
             <a:pPr algn="ctr"/>
-            <a:endParaRPr/>
           </a:p>
         </p:txBody>
       </p:sp>
@@ -13533,23 +13300,23 @@
         </p:nvSpPr>
         <p:spPr>
           <a:xfrm>
-            <a:off x="8183880" y="1764792"/>
-            <a:ext cx="3337560" cy="411480"/>
-          </a:xfrm>
-          <a:prstGeom prst="rect">
-            <a:avLst/>
-          </a:prstGeom>
-          <a:noFill/>
-        </p:spPr>
-        <p:txBody>
-          <a:bodyPr wrap="square" lIns="0" tIns="0" rIns="0" bIns="0" anchor="t">
+            <a:off x="8311896" y="1719072"/>
+            <a:ext cx="3291840" cy="384048"/>
+          </a:xfrm>
+          <a:prstGeom prst="rect">
+            <a:avLst/>
+          </a:prstGeom>
+          <a:noFill/>
+        </p:spPr>
+        <p:txBody>
+          <a:bodyPr wrap="square" lIns="0" rIns="0" tIns="0" bIns="0" anchor="t">
             <a:spAutoFit/>
           </a:bodyPr>
           <a:lstStyle/>
           <a:p>
             <a:pPr algn="l"/>
             <a:r>
-              <a:rPr sz="2000" b="1">
+              <a:rPr sz="1900" b="1">
                 <a:solidFill>
                   <a:srgbClr val="FFFFFF"/>
                 </a:solidFill>
@@ -13568,23 +13335,23 @@
         </p:nvSpPr>
         <p:spPr>
           <a:xfrm>
-            <a:off x="8183880" y="2331720"/>
-            <a:ext cx="3337560" cy="301752"/>
-          </a:xfrm>
-          <a:prstGeom prst="rect">
-            <a:avLst/>
-          </a:prstGeom>
-          <a:noFill/>
-        </p:spPr>
-        <p:txBody>
-          <a:bodyPr wrap="square" lIns="0" tIns="0" rIns="0" bIns="0" anchor="t">
+            <a:off x="8311896" y="2231136"/>
+            <a:ext cx="3291840" cy="274320"/>
+          </a:xfrm>
+          <a:prstGeom prst="rect">
+            <a:avLst/>
+          </a:prstGeom>
+          <a:noFill/>
+        </p:spPr>
+        <p:txBody>
+          <a:bodyPr wrap="square" lIns="0" rIns="0" tIns="0" bIns="0" anchor="t">
             <a:spAutoFit/>
           </a:bodyPr>
           <a:lstStyle/>
           <a:p>
             <a:pPr algn="l"/>
             <a:r>
-              <a:rPr sz="1500" b="0">
+              <a:rPr sz="1300" b="0">
                 <a:solidFill>
                   <a:srgbClr val="1F2937"/>
                 </a:solidFill>
@@ -13603,23 +13370,23 @@
         </p:nvSpPr>
         <p:spPr>
           <a:xfrm>
-            <a:off x="8183880" y="2633472"/>
-            <a:ext cx="3337560" cy="301752"/>
-          </a:xfrm>
-          <a:prstGeom prst="rect">
-            <a:avLst/>
-          </a:prstGeom>
-          <a:noFill/>
-        </p:spPr>
-        <p:txBody>
-          <a:bodyPr wrap="square" lIns="0" tIns="0" rIns="0" bIns="0" anchor="t">
+            <a:off x="8311896" y="2505456"/>
+            <a:ext cx="3291840" cy="274320"/>
+          </a:xfrm>
+          <a:prstGeom prst="rect">
+            <a:avLst/>
+          </a:prstGeom>
+          <a:noFill/>
+        </p:spPr>
+        <p:txBody>
+          <a:bodyPr wrap="square" lIns="0" rIns="0" tIns="0" bIns="0" anchor="t">
             <a:spAutoFit/>
           </a:bodyPr>
           <a:lstStyle/>
           <a:p>
             <a:pPr algn="l"/>
             <a:r>
-              <a:rPr sz="1500" b="0">
+              <a:rPr sz="1300" b="0">
                 <a:solidFill>
                   <a:srgbClr val="1F2937"/>
                 </a:solidFill>
@@ -13638,23 +13405,23 @@
         </p:nvSpPr>
         <p:spPr>
           <a:xfrm>
-            <a:off x="8183880" y="2935224"/>
-            <a:ext cx="3337560" cy="301752"/>
-          </a:xfrm>
-          <a:prstGeom prst="rect">
-            <a:avLst/>
-          </a:prstGeom>
-          <a:noFill/>
-        </p:spPr>
-        <p:txBody>
-          <a:bodyPr wrap="square" lIns="0" tIns="0" rIns="0" bIns="0" anchor="t">
+            <a:off x="8311896" y="2779776"/>
+            <a:ext cx="3291840" cy="274320"/>
+          </a:xfrm>
+          <a:prstGeom prst="rect">
+            <a:avLst/>
+          </a:prstGeom>
+          <a:noFill/>
+        </p:spPr>
+        <p:txBody>
+          <a:bodyPr wrap="square" lIns="0" rIns="0" tIns="0" bIns="0" anchor="t">
             <a:spAutoFit/>
           </a:bodyPr>
           <a:lstStyle/>
           <a:p>
             <a:pPr algn="l"/>
             <a:r>
-              <a:rPr sz="1500" b="0">
+              <a:rPr sz="1300" b="0">
                 <a:solidFill>
                   <a:srgbClr val="1F2937"/>
                 </a:solidFill>
@@ -13673,8 +13440,8 @@
         </p:nvSpPr>
         <p:spPr>
           <a:xfrm>
-            <a:off x="448056" y="3364992"/>
-            <a:ext cx="3611880" cy="1508760"/>
+            <a:off x="448056" y="3401568"/>
+            <a:ext cx="3520440" cy="1417320"/>
           </a:xfrm>
           <a:prstGeom prst="rect">
             <a:avLst/>
@@ -13706,7 +13473,6 @@
           <a:lstStyle/>
           <a:p>
             <a:pPr algn="ctr"/>
-            <a:endParaRPr/>
           </a:p>
         </p:txBody>
       </p:sp>
@@ -13718,8 +13484,8 @@
         </p:nvSpPr>
         <p:spPr>
           <a:xfrm>
-            <a:off x="411480" y="3319272"/>
-            <a:ext cx="3611880" cy="1508760"/>
+            <a:off x="411480" y="3355848"/>
+            <a:ext cx="3520440" cy="1417320"/>
           </a:xfrm>
           <a:prstGeom prst="rect">
             <a:avLst/>
@@ -13753,7 +13519,6 @@
           <a:lstStyle/>
           <a:p>
             <a:pPr algn="ctr"/>
-            <a:endParaRPr/>
           </a:p>
         </p:txBody>
       </p:sp>
@@ -13765,8 +13530,8 @@
         </p:nvSpPr>
         <p:spPr>
           <a:xfrm>
-            <a:off x="411480" y="3319272"/>
-            <a:ext cx="3611880" cy="502920"/>
+            <a:off x="411480" y="3355848"/>
+            <a:ext cx="3520440" cy="475488"/>
           </a:xfrm>
           <a:prstGeom prst="rect">
             <a:avLst/>
@@ -13798,7 +13563,6 @@
           <a:lstStyle/>
           <a:p>
             <a:pPr algn="ctr"/>
-            <a:endParaRPr/>
           </a:p>
         </p:txBody>
       </p:sp>
@@ -13810,23 +13574,23 @@
         </p:nvSpPr>
         <p:spPr>
           <a:xfrm>
-            <a:off x="594360" y="3392424"/>
-            <a:ext cx="3337560" cy="411480"/>
-          </a:xfrm>
-          <a:prstGeom prst="rect">
-            <a:avLst/>
-          </a:prstGeom>
-          <a:noFill/>
-        </p:spPr>
-        <p:txBody>
-          <a:bodyPr wrap="square" lIns="0" tIns="0" rIns="0" bIns="0" anchor="t">
+            <a:off x="576072" y="3410712"/>
+            <a:ext cx="3291840" cy="384048"/>
+          </a:xfrm>
+          <a:prstGeom prst="rect">
+            <a:avLst/>
+          </a:prstGeom>
+          <a:noFill/>
+        </p:spPr>
+        <p:txBody>
+          <a:bodyPr wrap="square" lIns="0" rIns="0" tIns="0" bIns="0" anchor="t">
             <a:spAutoFit/>
           </a:bodyPr>
           <a:lstStyle/>
           <a:p>
             <a:pPr algn="l"/>
             <a:r>
-              <a:rPr sz="2000" b="1">
+              <a:rPr sz="1900" b="1">
                 <a:solidFill>
                   <a:srgbClr val="FFFFFF"/>
                 </a:solidFill>
@@ -13845,23 +13609,23 @@
         </p:nvSpPr>
         <p:spPr>
           <a:xfrm>
-            <a:off x="594360" y="3959352"/>
-            <a:ext cx="3337560" cy="301752"/>
-          </a:xfrm>
-          <a:prstGeom prst="rect">
-            <a:avLst/>
-          </a:prstGeom>
-          <a:noFill/>
-        </p:spPr>
-        <p:txBody>
-          <a:bodyPr wrap="square" lIns="0" tIns="0" rIns="0" bIns="0" anchor="t">
+            <a:off x="576072" y="3922776"/>
+            <a:ext cx="3291840" cy="274320"/>
+          </a:xfrm>
+          <a:prstGeom prst="rect">
+            <a:avLst/>
+          </a:prstGeom>
+          <a:noFill/>
+        </p:spPr>
+        <p:txBody>
+          <a:bodyPr wrap="square" lIns="0" rIns="0" tIns="0" bIns="0" anchor="t">
             <a:spAutoFit/>
           </a:bodyPr>
           <a:lstStyle/>
           <a:p>
             <a:pPr algn="l"/>
             <a:r>
-              <a:rPr sz="1500" b="0">
+              <a:rPr sz="1300" b="0">
                 <a:solidFill>
                   <a:srgbClr val="1F2937"/>
                 </a:solidFill>
@@ -13880,23 +13644,23 @@
         </p:nvSpPr>
         <p:spPr>
           <a:xfrm>
-            <a:off x="594360" y="4261104"/>
-            <a:ext cx="3337560" cy="301752"/>
-          </a:xfrm>
-          <a:prstGeom prst="rect">
-            <a:avLst/>
-          </a:prstGeom>
-          <a:noFill/>
-        </p:spPr>
-        <p:txBody>
-          <a:bodyPr wrap="square" lIns="0" tIns="0" rIns="0" bIns="0" anchor="t">
+            <a:off x="576072" y="4197096"/>
+            <a:ext cx="3291840" cy="274320"/>
+          </a:xfrm>
+          <a:prstGeom prst="rect">
+            <a:avLst/>
+          </a:prstGeom>
+          <a:noFill/>
+        </p:spPr>
+        <p:txBody>
+          <a:bodyPr wrap="square" lIns="0" rIns="0" tIns="0" bIns="0" anchor="t">
             <a:spAutoFit/>
           </a:bodyPr>
           <a:lstStyle/>
           <a:p>
             <a:pPr algn="l"/>
             <a:r>
-              <a:rPr sz="1500" b="0">
+              <a:rPr sz="1300" b="0">
                 <a:solidFill>
                   <a:srgbClr val="1F2937"/>
                 </a:solidFill>
@@ -13915,8 +13679,8 @@
         </p:nvSpPr>
         <p:spPr>
           <a:xfrm>
-            <a:off x="4242816" y="3364992"/>
-            <a:ext cx="3611880" cy="1508760"/>
+            <a:off x="4315968" y="3401568"/>
+            <a:ext cx="3520440" cy="1417320"/>
           </a:xfrm>
           <a:prstGeom prst="rect">
             <a:avLst/>
@@ -13948,7 +13712,6 @@
           <a:lstStyle/>
           <a:p>
             <a:pPr algn="ctr"/>
-            <a:endParaRPr/>
           </a:p>
         </p:txBody>
       </p:sp>
@@ -13960,8 +13723,8 @@
         </p:nvSpPr>
         <p:spPr>
           <a:xfrm>
-            <a:off x="4206240" y="3319272"/>
-            <a:ext cx="3611880" cy="1508760"/>
+            <a:off x="4279392" y="3355848"/>
+            <a:ext cx="3520440" cy="1417320"/>
           </a:xfrm>
           <a:prstGeom prst="rect">
             <a:avLst/>
@@ -13995,7 +13758,6 @@
           <a:lstStyle/>
           <a:p>
             <a:pPr algn="ctr"/>
-            <a:endParaRPr/>
           </a:p>
         </p:txBody>
       </p:sp>
@@ -14007,8 +13769,8 @@
         </p:nvSpPr>
         <p:spPr>
           <a:xfrm>
-            <a:off x="4206240" y="3319272"/>
-            <a:ext cx="3611880" cy="502920"/>
+            <a:off x="4279392" y="3355848"/>
+            <a:ext cx="3520440" cy="475488"/>
           </a:xfrm>
           <a:prstGeom prst="rect">
             <a:avLst/>
@@ -14040,7 +13802,6 @@
           <a:lstStyle/>
           <a:p>
             <a:pPr algn="ctr"/>
-            <a:endParaRPr/>
           </a:p>
         </p:txBody>
       </p:sp>
@@ -14052,23 +13813,23 @@
         </p:nvSpPr>
         <p:spPr>
           <a:xfrm>
-            <a:off x="4389120" y="3392424"/>
-            <a:ext cx="3337560" cy="411480"/>
-          </a:xfrm>
-          <a:prstGeom prst="rect">
-            <a:avLst/>
-          </a:prstGeom>
-          <a:noFill/>
-        </p:spPr>
-        <p:txBody>
-          <a:bodyPr wrap="square" lIns="0" tIns="0" rIns="0" bIns="0" anchor="t">
+            <a:off x="4443984" y="3410712"/>
+            <a:ext cx="3291840" cy="384048"/>
+          </a:xfrm>
+          <a:prstGeom prst="rect">
+            <a:avLst/>
+          </a:prstGeom>
+          <a:noFill/>
+        </p:spPr>
+        <p:txBody>
+          <a:bodyPr wrap="square" lIns="0" rIns="0" tIns="0" bIns="0" anchor="t">
             <a:spAutoFit/>
           </a:bodyPr>
           <a:lstStyle/>
           <a:p>
             <a:pPr algn="l"/>
             <a:r>
-              <a:rPr sz="2000" b="1">
+              <a:rPr sz="1900" b="1">
                 <a:solidFill>
                   <a:srgbClr val="FFFFFF"/>
                 </a:solidFill>
@@ -14087,23 +13848,23 @@
         </p:nvSpPr>
         <p:spPr>
           <a:xfrm>
-            <a:off x="4389120" y="3959352"/>
-            <a:ext cx="3337560" cy="301752"/>
-          </a:xfrm>
-          <a:prstGeom prst="rect">
-            <a:avLst/>
-          </a:prstGeom>
-          <a:noFill/>
-        </p:spPr>
-        <p:txBody>
-          <a:bodyPr wrap="square" lIns="0" tIns="0" rIns="0" bIns="0" anchor="t">
+            <a:off x="4443984" y="3922776"/>
+            <a:ext cx="3291840" cy="274320"/>
+          </a:xfrm>
+          <a:prstGeom prst="rect">
+            <a:avLst/>
+          </a:prstGeom>
+          <a:noFill/>
+        </p:spPr>
+        <p:txBody>
+          <a:bodyPr wrap="square" lIns="0" rIns="0" tIns="0" bIns="0" anchor="t">
             <a:spAutoFit/>
           </a:bodyPr>
           <a:lstStyle/>
           <a:p>
             <a:pPr algn="l"/>
             <a:r>
-              <a:rPr sz="1500" b="0">
+              <a:rPr sz="1300" b="0">
                 <a:solidFill>
                   <a:srgbClr val="1F2937"/>
                 </a:solidFill>
@@ -14122,23 +13883,23 @@
         </p:nvSpPr>
         <p:spPr>
           <a:xfrm>
-            <a:off x="4389120" y="4261104"/>
-            <a:ext cx="3337560" cy="301752"/>
-          </a:xfrm>
-          <a:prstGeom prst="rect">
-            <a:avLst/>
-          </a:prstGeom>
-          <a:noFill/>
-        </p:spPr>
-        <p:txBody>
-          <a:bodyPr wrap="square" lIns="0" tIns="0" rIns="0" bIns="0" anchor="t">
+            <a:off x="4443984" y="4197096"/>
+            <a:ext cx="3291840" cy="274320"/>
+          </a:xfrm>
+          <a:prstGeom prst="rect">
+            <a:avLst/>
+          </a:prstGeom>
+          <a:noFill/>
+        </p:spPr>
+        <p:txBody>
+          <a:bodyPr wrap="square" lIns="0" rIns="0" tIns="0" bIns="0" anchor="t">
             <a:spAutoFit/>
           </a:bodyPr>
           <a:lstStyle/>
           <a:p>
             <a:pPr algn="l"/>
             <a:r>
-              <a:rPr sz="1500" b="0">
+              <a:rPr sz="1300" b="0">
                 <a:solidFill>
                   <a:srgbClr val="1F2937"/>
                 </a:solidFill>
@@ -14157,23 +13918,23 @@
         </p:nvSpPr>
         <p:spPr>
           <a:xfrm>
-            <a:off x="4389120" y="4562856"/>
-            <a:ext cx="3337560" cy="301752"/>
-          </a:xfrm>
-          <a:prstGeom prst="rect">
-            <a:avLst/>
-          </a:prstGeom>
-          <a:noFill/>
-        </p:spPr>
-        <p:txBody>
-          <a:bodyPr wrap="square" lIns="0" tIns="0" rIns="0" bIns="0" anchor="t">
+            <a:off x="4443984" y="4471416"/>
+            <a:ext cx="3291840" cy="274320"/>
+          </a:xfrm>
+          <a:prstGeom prst="rect">
+            <a:avLst/>
+          </a:prstGeom>
+          <a:noFill/>
+        </p:spPr>
+        <p:txBody>
+          <a:bodyPr wrap="square" lIns="0" rIns="0" tIns="0" bIns="0" anchor="t">
             <a:spAutoFit/>
           </a:bodyPr>
           <a:lstStyle/>
           <a:p>
             <a:pPr algn="l"/>
             <a:r>
-              <a:rPr sz="1500" b="0">
+              <a:rPr sz="1300" b="0">
                 <a:solidFill>
                   <a:srgbClr val="1F2937"/>
                 </a:solidFill>
@@ -14192,8 +13953,8 @@
         </p:nvSpPr>
         <p:spPr>
           <a:xfrm>
-            <a:off x="8037576" y="3364992"/>
-            <a:ext cx="3611880" cy="1508760"/>
+            <a:off x="8183880" y="3401568"/>
+            <a:ext cx="3520440" cy="1417320"/>
           </a:xfrm>
           <a:prstGeom prst="rect">
             <a:avLst/>
@@ -14225,7 +13986,6 @@
           <a:lstStyle/>
           <a:p>
             <a:pPr algn="ctr"/>
-            <a:endParaRPr/>
           </a:p>
         </p:txBody>
       </p:sp>
@@ -14237,8 +13997,8 @@
         </p:nvSpPr>
         <p:spPr>
           <a:xfrm>
-            <a:off x="8001000" y="3319272"/>
-            <a:ext cx="3611880" cy="1508760"/>
+            <a:off x="8147304" y="3355848"/>
+            <a:ext cx="3520440" cy="1417320"/>
           </a:xfrm>
           <a:prstGeom prst="rect">
             <a:avLst/>
@@ -14272,7 +14032,6 @@
           <a:lstStyle/>
           <a:p>
             <a:pPr algn="ctr"/>
-            <a:endParaRPr/>
           </a:p>
         </p:txBody>
       </p:sp>
@@ -14284,8 +14043,8 @@
         </p:nvSpPr>
         <p:spPr>
           <a:xfrm>
-            <a:off x="8001000" y="3319272"/>
-            <a:ext cx="3611880" cy="502920"/>
+            <a:off x="8147304" y="3355848"/>
+            <a:ext cx="3520440" cy="475488"/>
           </a:xfrm>
           <a:prstGeom prst="rect">
             <a:avLst/>
@@ -14317,7 +14076,6 @@
           <a:lstStyle/>
           <a:p>
             <a:pPr algn="ctr"/>
-            <a:endParaRPr/>
           </a:p>
         </p:txBody>
       </p:sp>
@@ -14329,23 +14087,23 @@
         </p:nvSpPr>
         <p:spPr>
           <a:xfrm>
-            <a:off x="8183880" y="3392424"/>
-            <a:ext cx="3337560" cy="411480"/>
-          </a:xfrm>
-          <a:prstGeom prst="rect">
-            <a:avLst/>
-          </a:prstGeom>
-          <a:noFill/>
-        </p:spPr>
-        <p:txBody>
-          <a:bodyPr wrap="square" lIns="0" tIns="0" rIns="0" bIns="0" anchor="t">
+            <a:off x="8311896" y="3410712"/>
+            <a:ext cx="3291840" cy="384048"/>
+          </a:xfrm>
+          <a:prstGeom prst="rect">
+            <a:avLst/>
+          </a:prstGeom>
+          <a:noFill/>
+        </p:spPr>
+        <p:txBody>
+          <a:bodyPr wrap="square" lIns="0" rIns="0" tIns="0" bIns="0" anchor="t">
             <a:spAutoFit/>
           </a:bodyPr>
           <a:lstStyle/>
           <a:p>
             <a:pPr algn="l"/>
             <a:r>
-              <a:rPr sz="2000" b="1">
+              <a:rPr sz="1900" b="1">
                 <a:solidFill>
                   <a:srgbClr val="FFFFFF"/>
                 </a:solidFill>
@@ -14364,23 +14122,23 @@
         </p:nvSpPr>
         <p:spPr>
           <a:xfrm>
-            <a:off x="8183880" y="3959352"/>
-            <a:ext cx="3337560" cy="301752"/>
-          </a:xfrm>
-          <a:prstGeom prst="rect">
-            <a:avLst/>
-          </a:prstGeom>
-          <a:noFill/>
-        </p:spPr>
-        <p:txBody>
-          <a:bodyPr wrap="square" lIns="0" tIns="0" rIns="0" bIns="0" anchor="t">
+            <a:off x="8311896" y="3922776"/>
+            <a:ext cx="3291840" cy="274320"/>
+          </a:xfrm>
+          <a:prstGeom prst="rect">
+            <a:avLst/>
+          </a:prstGeom>
+          <a:noFill/>
+        </p:spPr>
+        <p:txBody>
+          <a:bodyPr wrap="square" lIns="0" rIns="0" tIns="0" bIns="0" anchor="t">
             <a:spAutoFit/>
           </a:bodyPr>
           <a:lstStyle/>
           <a:p>
             <a:pPr algn="l"/>
             <a:r>
-              <a:rPr sz="1500" b="0">
+              <a:rPr sz="1300" b="0">
                 <a:solidFill>
                   <a:srgbClr val="1F2937"/>
                 </a:solidFill>
@@ -14399,23 +14157,23 @@
         </p:nvSpPr>
         <p:spPr>
           <a:xfrm>
-            <a:off x="8183880" y="4261104"/>
-            <a:ext cx="3337560" cy="301752"/>
-          </a:xfrm>
-          <a:prstGeom prst="rect">
-            <a:avLst/>
-          </a:prstGeom>
-          <a:noFill/>
-        </p:spPr>
-        <p:txBody>
-          <a:bodyPr wrap="square" lIns="0" tIns="0" rIns="0" bIns="0" anchor="t">
+            <a:off x="8311896" y="4197096"/>
+            <a:ext cx="3291840" cy="274320"/>
+          </a:xfrm>
+          <a:prstGeom prst="rect">
+            <a:avLst/>
+          </a:prstGeom>
+          <a:noFill/>
+        </p:spPr>
+        <p:txBody>
+          <a:bodyPr wrap="square" lIns="0" rIns="0" tIns="0" bIns="0" anchor="t">
             <a:spAutoFit/>
           </a:bodyPr>
           <a:lstStyle/>
           <a:p>
             <a:pPr algn="l"/>
             <a:r>
-              <a:rPr sz="1500" b="0">
+              <a:rPr sz="1300" b="0">
                 <a:solidFill>
                   <a:srgbClr val="1F2937"/>
                 </a:solidFill>
@@ -14434,23 +14192,23 @@
         </p:nvSpPr>
         <p:spPr>
           <a:xfrm>
-            <a:off x="8183880" y="4562856"/>
-            <a:ext cx="3337560" cy="301752"/>
-          </a:xfrm>
-          <a:prstGeom prst="rect">
-            <a:avLst/>
-          </a:prstGeom>
-          <a:noFill/>
-        </p:spPr>
-        <p:txBody>
-          <a:bodyPr wrap="square" lIns="0" tIns="0" rIns="0" bIns="0" anchor="t">
+            <a:off x="8311896" y="4471416"/>
+            <a:ext cx="3291840" cy="274320"/>
+          </a:xfrm>
+          <a:prstGeom prst="rect">
+            <a:avLst/>
+          </a:prstGeom>
+          <a:noFill/>
+        </p:spPr>
+        <p:txBody>
+          <a:bodyPr wrap="square" lIns="0" rIns="0" tIns="0" bIns="0" anchor="t">
             <a:spAutoFit/>
           </a:bodyPr>
           <a:lstStyle/>
           <a:p>
             <a:pPr algn="l"/>
             <a:r>
-              <a:rPr sz="1500" b="0">
+              <a:rPr sz="1300" b="0">
                 <a:solidFill>
                   <a:srgbClr val="1F2937"/>
                 </a:solidFill>
@@ -14469,8 +14227,8 @@
         </p:nvSpPr>
         <p:spPr>
           <a:xfrm>
-            <a:off x="448056" y="4992624"/>
-            <a:ext cx="3611880" cy="1508760"/>
+            <a:off x="448056" y="5093208"/>
+            <a:ext cx="3520440" cy="1417320"/>
           </a:xfrm>
           <a:prstGeom prst="rect">
             <a:avLst/>
@@ -14502,7 +14260,6 @@
           <a:lstStyle/>
           <a:p>
             <a:pPr algn="ctr"/>
-            <a:endParaRPr/>
           </a:p>
         </p:txBody>
       </p:sp>
@@ -14514,8 +14271,8 @@
         </p:nvSpPr>
         <p:spPr>
           <a:xfrm>
-            <a:off x="411480" y="4946904"/>
-            <a:ext cx="3611880" cy="1508760"/>
+            <a:off x="411480" y="5047488"/>
+            <a:ext cx="3520440" cy="1417320"/>
           </a:xfrm>
           <a:prstGeom prst="rect">
             <a:avLst/>
@@ -14549,7 +14306,6 @@
           <a:lstStyle/>
           <a:p>
             <a:pPr algn="ctr"/>
-            <a:endParaRPr/>
           </a:p>
         </p:txBody>
       </p:sp>
@@ -14561,8 +14317,8 @@
         </p:nvSpPr>
         <p:spPr>
           <a:xfrm>
-            <a:off x="411480" y="4946904"/>
-            <a:ext cx="3611880" cy="502920"/>
+            <a:off x="411480" y="5047488"/>
+            <a:ext cx="3520440" cy="475488"/>
           </a:xfrm>
           <a:prstGeom prst="rect">
             <a:avLst/>
@@ -14594,7 +14350,6 @@
           <a:lstStyle/>
           <a:p>
             <a:pPr algn="ctr"/>
-            <a:endParaRPr/>
           </a:p>
         </p:txBody>
       </p:sp>
@@ -14606,23 +14361,23 @@
         </p:nvSpPr>
         <p:spPr>
           <a:xfrm>
-            <a:off x="594360" y="5020056"/>
-            <a:ext cx="3337560" cy="411480"/>
-          </a:xfrm>
-          <a:prstGeom prst="rect">
-            <a:avLst/>
-          </a:prstGeom>
-          <a:noFill/>
-        </p:spPr>
-        <p:txBody>
-          <a:bodyPr wrap="square" lIns="0" tIns="0" rIns="0" bIns="0" anchor="t">
+            <a:off x="576072" y="5102352"/>
+            <a:ext cx="3291840" cy="384048"/>
+          </a:xfrm>
+          <a:prstGeom prst="rect">
+            <a:avLst/>
+          </a:prstGeom>
+          <a:noFill/>
+        </p:spPr>
+        <p:txBody>
+          <a:bodyPr wrap="square" lIns="0" rIns="0" tIns="0" bIns="0" anchor="t">
             <a:spAutoFit/>
           </a:bodyPr>
           <a:lstStyle/>
           <a:p>
             <a:pPr algn="l"/>
             <a:r>
-              <a:rPr sz="2000" b="1">
+              <a:rPr sz="1900" b="1">
                 <a:solidFill>
                   <a:srgbClr val="FFFFFF"/>
                 </a:solidFill>
@@ -14641,23 +14396,23 @@
         </p:nvSpPr>
         <p:spPr>
           <a:xfrm>
-            <a:off x="594360" y="5586984"/>
-            <a:ext cx="3337560" cy="301752"/>
-          </a:xfrm>
-          <a:prstGeom prst="rect">
-            <a:avLst/>
-          </a:prstGeom>
-          <a:noFill/>
-        </p:spPr>
-        <p:txBody>
-          <a:bodyPr wrap="square" lIns="0" tIns="0" rIns="0" bIns="0" anchor="t">
+            <a:off x="576072" y="5614416"/>
+            <a:ext cx="3291840" cy="274320"/>
+          </a:xfrm>
+          <a:prstGeom prst="rect">
+            <a:avLst/>
+          </a:prstGeom>
+          <a:noFill/>
+        </p:spPr>
+        <p:txBody>
+          <a:bodyPr wrap="square" lIns="0" rIns="0" tIns="0" bIns="0" anchor="t">
             <a:spAutoFit/>
           </a:bodyPr>
           <a:lstStyle/>
           <a:p>
             <a:pPr algn="l"/>
             <a:r>
-              <a:rPr sz="1500" b="0">
+              <a:rPr sz="1300" b="0">
                 <a:solidFill>
                   <a:srgbClr val="1F2937"/>
                 </a:solidFill>
@@ -14676,23 +14431,23 @@
         </p:nvSpPr>
         <p:spPr>
           <a:xfrm>
-            <a:off x="594360" y="5888736"/>
-            <a:ext cx="3337560" cy="301752"/>
-          </a:xfrm>
-          <a:prstGeom prst="rect">
-            <a:avLst/>
-          </a:prstGeom>
-          <a:noFill/>
-        </p:spPr>
-        <p:txBody>
-          <a:bodyPr wrap="square" lIns="0" tIns="0" rIns="0" bIns="0" anchor="t">
+            <a:off x="576072" y="5888736"/>
+            <a:ext cx="3291840" cy="274320"/>
+          </a:xfrm>
+          <a:prstGeom prst="rect">
+            <a:avLst/>
+          </a:prstGeom>
+          <a:noFill/>
+        </p:spPr>
+        <p:txBody>
+          <a:bodyPr wrap="square" lIns="0" rIns="0" tIns="0" bIns="0" anchor="t">
             <a:spAutoFit/>
           </a:bodyPr>
           <a:lstStyle/>
           <a:p>
             <a:pPr algn="l"/>
             <a:r>
-              <a:rPr sz="1500" b="0">
+              <a:rPr sz="1300" b="0">
                 <a:solidFill>
                   <a:srgbClr val="1F2937"/>
                 </a:solidFill>
@@ -14711,8 +14466,8 @@
         </p:nvSpPr>
         <p:spPr>
           <a:xfrm>
-            <a:off x="4242816" y="4992624"/>
-            <a:ext cx="3611880" cy="1508760"/>
+            <a:off x="4315968" y="5093208"/>
+            <a:ext cx="3520440" cy="1417320"/>
           </a:xfrm>
           <a:prstGeom prst="rect">
             <a:avLst/>
@@ -14744,7 +14499,6 @@
           <a:lstStyle/>
           <a:p>
             <a:pPr algn="ctr"/>
-            <a:endParaRPr/>
           </a:p>
         </p:txBody>
       </p:sp>
@@ -14756,8 +14510,8 @@
         </p:nvSpPr>
         <p:spPr>
           <a:xfrm>
-            <a:off x="4206240" y="4946904"/>
-            <a:ext cx="3611880" cy="1508760"/>
+            <a:off x="4279392" y="5047488"/>
+            <a:ext cx="3520440" cy="1417320"/>
           </a:xfrm>
           <a:prstGeom prst="rect">
             <a:avLst/>
@@ -14791,7 +14545,6 @@
           <a:lstStyle/>
           <a:p>
             <a:pPr algn="ctr"/>
-            <a:endParaRPr/>
           </a:p>
         </p:txBody>
       </p:sp>
@@ -14803,8 +14556,8 @@
         </p:nvSpPr>
         <p:spPr>
           <a:xfrm>
-            <a:off x="4206240" y="4946904"/>
-            <a:ext cx="3611880" cy="502920"/>
+            <a:off x="4279392" y="5047488"/>
+            <a:ext cx="3520440" cy="475488"/>
           </a:xfrm>
           <a:prstGeom prst="rect">
             <a:avLst/>
@@ -14836,7 +14589,6 @@
           <a:lstStyle/>
           <a:p>
             <a:pPr algn="ctr"/>
-            <a:endParaRPr/>
           </a:p>
         </p:txBody>
       </p:sp>
@@ -14848,23 +14600,23 @@
         </p:nvSpPr>
         <p:spPr>
           <a:xfrm>
-            <a:off x="4389120" y="5020056"/>
-            <a:ext cx="3337560" cy="411480"/>
-          </a:xfrm>
-          <a:prstGeom prst="rect">
-            <a:avLst/>
-          </a:prstGeom>
-          <a:noFill/>
-        </p:spPr>
-        <p:txBody>
-          <a:bodyPr wrap="square" lIns="0" tIns="0" rIns="0" bIns="0" anchor="t">
+            <a:off x="4443984" y="5102352"/>
+            <a:ext cx="3291840" cy="384048"/>
+          </a:xfrm>
+          <a:prstGeom prst="rect">
+            <a:avLst/>
+          </a:prstGeom>
+          <a:noFill/>
+        </p:spPr>
+        <p:txBody>
+          <a:bodyPr wrap="square" lIns="0" rIns="0" tIns="0" bIns="0" anchor="t">
             <a:spAutoFit/>
           </a:bodyPr>
           <a:lstStyle/>
           <a:p>
             <a:pPr algn="l"/>
             <a:r>
-              <a:rPr sz="2000" b="1">
+              <a:rPr sz="1900" b="1">
                 <a:solidFill>
                   <a:srgbClr val="FFFFFF"/>
                 </a:solidFill>
@@ -14883,23 +14635,23 @@
         </p:nvSpPr>
         <p:spPr>
           <a:xfrm>
-            <a:off x="4389120" y="5586984"/>
-            <a:ext cx="3337560" cy="301752"/>
-          </a:xfrm>
-          <a:prstGeom prst="rect">
-            <a:avLst/>
-          </a:prstGeom>
-          <a:noFill/>
-        </p:spPr>
-        <p:txBody>
-          <a:bodyPr wrap="square" lIns="0" tIns="0" rIns="0" bIns="0" anchor="t">
+            <a:off x="4443984" y="5614416"/>
+            <a:ext cx="3291840" cy="274320"/>
+          </a:xfrm>
+          <a:prstGeom prst="rect">
+            <a:avLst/>
+          </a:prstGeom>
+          <a:noFill/>
+        </p:spPr>
+        <p:txBody>
+          <a:bodyPr wrap="square" lIns="0" rIns="0" tIns="0" bIns="0" anchor="t">
             <a:spAutoFit/>
           </a:bodyPr>
           <a:lstStyle/>
           <a:p>
             <a:pPr algn="l"/>
             <a:r>
-              <a:rPr sz="1500" b="0">
+              <a:rPr sz="1300" b="0">
                 <a:solidFill>
                   <a:srgbClr val="1F2937"/>
                 </a:solidFill>
@@ -14918,23 +14670,23 @@
         </p:nvSpPr>
         <p:spPr>
           <a:xfrm>
-            <a:off x="4389120" y="5888736"/>
-            <a:ext cx="3337560" cy="301752"/>
-          </a:xfrm>
-          <a:prstGeom prst="rect">
-            <a:avLst/>
-          </a:prstGeom>
-          <a:noFill/>
-        </p:spPr>
-        <p:txBody>
-          <a:bodyPr wrap="square" lIns="0" tIns="0" rIns="0" bIns="0" anchor="t">
+            <a:off x="4443984" y="5888736"/>
+            <a:ext cx="3291840" cy="274320"/>
+          </a:xfrm>
+          <a:prstGeom prst="rect">
+            <a:avLst/>
+          </a:prstGeom>
+          <a:noFill/>
+        </p:spPr>
+        <p:txBody>
+          <a:bodyPr wrap="square" lIns="0" rIns="0" tIns="0" bIns="0" anchor="t">
             <a:spAutoFit/>
           </a:bodyPr>
           <a:lstStyle/>
           <a:p>
             <a:pPr algn="l"/>
             <a:r>
-              <a:rPr sz="1500" b="0">
+              <a:rPr sz="1300" b="0">
                 <a:solidFill>
                   <a:srgbClr val="1F2937"/>
                 </a:solidFill>
@@ -14953,23 +14705,23 @@
         </p:nvSpPr>
         <p:spPr>
           <a:xfrm>
-            <a:off x="4389120" y="6190488"/>
-            <a:ext cx="3337560" cy="301752"/>
-          </a:xfrm>
-          <a:prstGeom prst="rect">
-            <a:avLst/>
-          </a:prstGeom>
-          <a:noFill/>
-        </p:spPr>
-        <p:txBody>
-          <a:bodyPr wrap="square" lIns="0" tIns="0" rIns="0" bIns="0" anchor="t">
+            <a:off x="4443984" y="6163056"/>
+            <a:ext cx="3291840" cy="274320"/>
+          </a:xfrm>
+          <a:prstGeom prst="rect">
+            <a:avLst/>
+          </a:prstGeom>
+          <a:noFill/>
+        </p:spPr>
+        <p:txBody>
+          <a:bodyPr wrap="square" lIns="0" rIns="0" tIns="0" bIns="0" anchor="t">
             <a:spAutoFit/>
           </a:bodyPr>
           <a:lstStyle/>
           <a:p>
             <a:pPr algn="l"/>
             <a:r>
-              <a:rPr sz="1500" b="0">
+              <a:rPr sz="1300" b="0">
                 <a:solidFill>
                   <a:srgbClr val="1F2937"/>
                 </a:solidFill>
@@ -14988,8 +14740,8 @@
         </p:nvSpPr>
         <p:spPr>
           <a:xfrm>
-            <a:off x="8037576" y="4992624"/>
-            <a:ext cx="3611880" cy="1508760"/>
+            <a:off x="8183880" y="5093208"/>
+            <a:ext cx="3520440" cy="1417320"/>
           </a:xfrm>
           <a:prstGeom prst="rect">
             <a:avLst/>
@@ -15021,7 +14773,6 @@
           <a:lstStyle/>
           <a:p>
             <a:pPr algn="ctr"/>
-            <a:endParaRPr/>
           </a:p>
         </p:txBody>
       </p:sp>
@@ -15033,8 +14784,8 @@
         </p:nvSpPr>
         <p:spPr>
           <a:xfrm>
-            <a:off x="8001000" y="4946904"/>
-            <a:ext cx="3611880" cy="1508760"/>
+            <a:off x="8147304" y="5047488"/>
+            <a:ext cx="3520440" cy="1417320"/>
           </a:xfrm>
           <a:prstGeom prst="rect">
             <a:avLst/>
@@ -15068,7 +14819,6 @@
           <a:lstStyle/>
           <a:p>
             <a:pPr algn="ctr"/>
-            <a:endParaRPr/>
           </a:p>
         </p:txBody>
       </p:sp>
@@ -15080,8 +14830,8 @@
         </p:nvSpPr>
         <p:spPr>
           <a:xfrm>
-            <a:off x="8001000" y="4946904"/>
-            <a:ext cx="3611880" cy="502920"/>
+            <a:off x="8147304" y="5047488"/>
+            <a:ext cx="3520440" cy="475488"/>
           </a:xfrm>
           <a:prstGeom prst="rect">
             <a:avLst/>
@@ -15113,7 +14863,6 @@
           <a:lstStyle/>
           <a:p>
             <a:pPr algn="ctr"/>
-            <a:endParaRPr/>
           </a:p>
         </p:txBody>
       </p:sp>
@@ -15125,23 +14874,23 @@
         </p:nvSpPr>
         <p:spPr>
           <a:xfrm>
-            <a:off x="8183880" y="5020056"/>
-            <a:ext cx="3337560" cy="411480"/>
-          </a:xfrm>
-          <a:prstGeom prst="rect">
-            <a:avLst/>
-          </a:prstGeom>
-          <a:noFill/>
-        </p:spPr>
-        <p:txBody>
-          <a:bodyPr wrap="square" lIns="0" tIns="0" rIns="0" bIns="0" anchor="t">
+            <a:off x="8311896" y="5102352"/>
+            <a:ext cx="3291840" cy="384048"/>
+          </a:xfrm>
+          <a:prstGeom prst="rect">
+            <a:avLst/>
+          </a:prstGeom>
+          <a:noFill/>
+        </p:spPr>
+        <p:txBody>
+          <a:bodyPr wrap="square" lIns="0" rIns="0" tIns="0" bIns="0" anchor="t">
             <a:spAutoFit/>
           </a:bodyPr>
           <a:lstStyle/>
           <a:p>
             <a:pPr algn="l"/>
             <a:r>
-              <a:rPr sz="2000" b="1">
+              <a:rPr sz="1900" b="1">
                 <a:solidFill>
                   <a:srgbClr val="FFFFFF"/>
                 </a:solidFill>
@@ -15160,23 +14909,23 @@
         </p:nvSpPr>
         <p:spPr>
           <a:xfrm>
-            <a:off x="8183880" y="5586984"/>
-            <a:ext cx="3337560" cy="301752"/>
-          </a:xfrm>
-          <a:prstGeom prst="rect">
-            <a:avLst/>
-          </a:prstGeom>
-          <a:noFill/>
-        </p:spPr>
-        <p:txBody>
-          <a:bodyPr wrap="square" lIns="0" tIns="0" rIns="0" bIns="0" anchor="t">
+            <a:off x="8311896" y="5614416"/>
+            <a:ext cx="3291840" cy="274320"/>
+          </a:xfrm>
+          <a:prstGeom prst="rect">
+            <a:avLst/>
+          </a:prstGeom>
+          <a:noFill/>
+        </p:spPr>
+        <p:txBody>
+          <a:bodyPr wrap="square" lIns="0" rIns="0" tIns="0" bIns="0" anchor="t">
             <a:spAutoFit/>
           </a:bodyPr>
           <a:lstStyle/>
           <a:p>
             <a:pPr algn="l"/>
             <a:r>
-              <a:rPr sz="1500" b="0">
+              <a:rPr sz="1300" b="0">
                 <a:solidFill>
                   <a:srgbClr val="1F2937"/>
                 </a:solidFill>
@@ -15195,23 +14944,23 @@
         </p:nvSpPr>
         <p:spPr>
           <a:xfrm>
-            <a:off x="8183880" y="5888736"/>
-            <a:ext cx="3337560" cy="301752"/>
-          </a:xfrm>
-          <a:prstGeom prst="rect">
-            <a:avLst/>
-          </a:prstGeom>
-          <a:noFill/>
-        </p:spPr>
-        <p:txBody>
-          <a:bodyPr wrap="square" lIns="0" tIns="0" rIns="0" bIns="0" anchor="t">
+            <a:off x="8311896" y="5888736"/>
+            <a:ext cx="3291840" cy="274320"/>
+          </a:xfrm>
+          <a:prstGeom prst="rect">
+            <a:avLst/>
+          </a:prstGeom>
+          <a:noFill/>
+        </p:spPr>
+        <p:txBody>
+          <a:bodyPr wrap="square" lIns="0" rIns="0" tIns="0" bIns="0" anchor="t">
             <a:spAutoFit/>
           </a:bodyPr>
           <a:lstStyle/>
           <a:p>
             <a:pPr algn="l"/>
             <a:r>
-              <a:rPr sz="1500" b="0">
+              <a:rPr sz="1300" b="0">
                 <a:solidFill>
                   <a:srgbClr val="1F2937"/>
                 </a:solidFill>
@@ -15230,23 +14979,23 @@
         </p:nvSpPr>
         <p:spPr>
           <a:xfrm>
-            <a:off x="8183880" y="6190488"/>
-            <a:ext cx="3337560" cy="301752"/>
-          </a:xfrm>
-          <a:prstGeom prst="rect">
-            <a:avLst/>
-          </a:prstGeom>
-          <a:noFill/>
-        </p:spPr>
-        <p:txBody>
-          <a:bodyPr wrap="square" lIns="0" tIns="0" rIns="0" bIns="0" anchor="t">
+            <a:off x="8311896" y="6163056"/>
+            <a:ext cx="3291840" cy="274320"/>
+          </a:xfrm>
+          <a:prstGeom prst="rect">
+            <a:avLst/>
+          </a:prstGeom>
+          <a:noFill/>
+        </p:spPr>
+        <p:txBody>
+          <a:bodyPr wrap="square" lIns="0" rIns="0" tIns="0" bIns="0" anchor="t">
             <a:spAutoFit/>
           </a:bodyPr>
           <a:lstStyle/>
           <a:p>
             <a:pPr algn="l"/>
             <a:r>
-              <a:rPr sz="1500" b="0">
+              <a:rPr sz="1300" b="0">
                 <a:solidFill>
                   <a:srgbClr val="1F2937"/>
                 </a:solidFill>
@@ -15298,7 +15047,6 @@
           <a:lstStyle/>
           <a:p>
             <a:pPr algn="ctr"/>
-            <a:endParaRPr/>
           </a:p>
         </p:txBody>
       </p:sp>
@@ -15319,7 +15067,7 @@
           <a:noFill/>
         </p:spPr>
         <p:txBody>
-          <a:bodyPr wrap="square" lIns="0" tIns="0" rIns="0" bIns="0" anchor="t">
+          <a:bodyPr wrap="square" lIns="0" rIns="0" tIns="0" bIns="0" anchor="t">
             <a:spAutoFit/>
           </a:bodyPr>
           <a:lstStyle/>
@@ -15354,7 +15102,7 @@
           <a:noFill/>
         </p:spPr>
         <p:txBody>
-          <a:bodyPr wrap="square" lIns="0" tIns="0" rIns="0" bIns="0" anchor="t">
+          <a:bodyPr wrap="square" lIns="0" rIns="0" tIns="0" bIns="0" anchor="t">
             <a:spAutoFit/>
           </a:bodyPr>
           <a:lstStyle/>
@@ -15381,7 +15129,7 @@
 </file>
 
 <file path=ppt/slides/slide6.xml><?xml version="1.0" encoding="utf-8"?>
-<p:sld xmlns:a="http://schemas.openxmlformats.org/drawingml/2006/main" xmlns:r="http://schemas.openxmlformats.org/officeDocument/2006/relationships" xmlns:p="http://schemas.openxmlformats.org/presentationml/2006/main">
+<p:sld xmlns:a="http://schemas.openxmlformats.org/drawingml/2006/main" xmlns:p="http://schemas.openxmlformats.org/presentationml/2006/main" xmlns:r="http://schemas.openxmlformats.org/officeDocument/2006/relationships">
   <p:cSld>
     <p:spTree>
       <p:nvGrpSpPr>
@@ -15389,14 +15137,7 @@
         <p:cNvGrpSpPr/>
         <p:nvPr/>
       </p:nvGrpSpPr>
-      <p:grpSpPr>
-        <a:xfrm>
-          <a:off x="0" y="0"/>
-          <a:ext cx="0" cy="0"/>
-          <a:chOff x="0" y="0"/>
-          <a:chExt cx="0" cy="0"/>
-        </a:xfrm>
-      </p:grpSpPr>
+      <p:grpSpPr/>
       <p:sp>
         <p:nvSpPr>
           <p:cNvPr id="2" name="Rectangle 1"/>
@@ -15438,7 +15179,6 @@
           <a:lstStyle/>
           <a:p>
             <a:pPr algn="ctr"/>
-            <a:endParaRPr/>
           </a:p>
         </p:txBody>
       </p:sp>
@@ -15483,7 +15223,6 @@
           <a:lstStyle/>
           <a:p>
             <a:pPr algn="ctr"/>
-            <a:endParaRPr/>
           </a:p>
         </p:txBody>
       </p:sp>
@@ -15504,7 +15243,7 @@
           <a:noFill/>
         </p:spPr>
         <p:txBody>
-          <a:bodyPr wrap="square" lIns="0" tIns="0" rIns="0" bIns="0" anchor="t">
+          <a:bodyPr wrap="square" lIns="0" rIns="0" tIns="0" bIns="0" anchor="t">
             <a:spAutoFit/>
           </a:bodyPr>
           <a:lstStyle/>
@@ -15539,7 +15278,7 @@
           <a:noFill/>
         </p:spPr>
         <p:txBody>
-          <a:bodyPr wrap="square" lIns="0" tIns="0" rIns="0" bIns="0" anchor="t">
+          <a:bodyPr wrap="square" lIns="0" rIns="0" tIns="0" bIns="0" anchor="t">
             <a:spAutoFit/>
           </a:bodyPr>
           <a:lstStyle/>
@@ -15574,7 +15313,7 @@
           <a:noFill/>
         </p:spPr>
         <p:txBody>
-          <a:bodyPr wrap="square" lIns="0" tIns="0" rIns="0" bIns="0" anchor="t">
+          <a:bodyPr wrap="square" lIns="0" rIns="0" tIns="0" bIns="0" anchor="t">
             <a:spAutoFit/>
           </a:bodyPr>
           <a:lstStyle/>
@@ -15635,7 +15374,6 @@
           <a:lstStyle/>
           <a:p>
             <a:pPr algn="ctr"/>
-            <a:endParaRPr/>
           </a:p>
         </p:txBody>
       </p:sp>
@@ -15656,7 +15394,7 @@
           <a:noFill/>
         </p:spPr>
         <p:txBody>
-          <a:bodyPr wrap="square" lIns="0" tIns="0" rIns="0" bIns="0" anchor="t">
+          <a:bodyPr wrap="square" lIns="0" rIns="0" tIns="0" bIns="0" anchor="t">
             <a:spAutoFit/>
           </a:bodyPr>
           <a:lstStyle/>
@@ -15691,7 +15429,7 @@
           <a:noFill/>
         </p:spPr>
         <p:txBody>
-          <a:bodyPr wrap="square" lIns="0" tIns="0" rIns="0" bIns="0" anchor="t">
+          <a:bodyPr wrap="square" lIns="0" rIns="0" tIns="0" bIns="0" anchor="t">
             <a:spAutoFit/>
           </a:bodyPr>
           <a:lstStyle/>
@@ -15752,7 +15490,6 @@
           <a:lstStyle/>
           <a:p>
             <a:pPr algn="ctr"/>
-            <a:endParaRPr/>
           </a:p>
         </p:txBody>
       </p:sp>
@@ -15773,7 +15510,7 @@
           <a:noFill/>
         </p:spPr>
         <p:txBody>
-          <a:bodyPr wrap="square" lIns="0" tIns="0" rIns="0" bIns="0" anchor="t">
+          <a:bodyPr wrap="square" lIns="0" rIns="0" tIns="0" bIns="0" anchor="t">
             <a:spAutoFit/>
           </a:bodyPr>
           <a:lstStyle/>
@@ -15808,7 +15545,7 @@
           <a:noFill/>
         </p:spPr>
         <p:txBody>
-          <a:bodyPr wrap="square" lIns="0" tIns="0" rIns="0" bIns="0" anchor="t">
+          <a:bodyPr wrap="square" lIns="0" rIns="0" tIns="0" bIns="0" anchor="t">
             <a:spAutoFit/>
           </a:bodyPr>
           <a:lstStyle/>
@@ -15869,7 +15606,6 @@
           <a:lstStyle/>
           <a:p>
             <a:pPr algn="ctr"/>
-            <a:endParaRPr/>
           </a:p>
         </p:txBody>
       </p:sp>
@@ -15890,7 +15626,7 @@
           <a:noFill/>
         </p:spPr>
         <p:txBody>
-          <a:bodyPr wrap="square" lIns="0" tIns="0" rIns="0" bIns="0" anchor="t">
+          <a:bodyPr wrap="square" lIns="0" rIns="0" tIns="0" bIns="0" anchor="t">
             <a:spAutoFit/>
           </a:bodyPr>
           <a:lstStyle/>
@@ -15925,7 +15661,7 @@
           <a:noFill/>
         </p:spPr>
         <p:txBody>
-          <a:bodyPr wrap="square" lIns="0" tIns="0" rIns="0" bIns="0" anchor="t">
+          <a:bodyPr wrap="square" lIns="0" rIns="0" tIns="0" bIns="0" anchor="t">
             <a:spAutoFit/>
           </a:bodyPr>
           <a:lstStyle/>
@@ -15986,7 +15722,6 @@
           <a:lstStyle/>
           <a:p>
             <a:pPr algn="ctr"/>
-            <a:endParaRPr/>
           </a:p>
         </p:txBody>
       </p:sp>
@@ -16007,7 +15742,7 @@
           <a:noFill/>
         </p:spPr>
         <p:txBody>
-          <a:bodyPr wrap="square" lIns="0" tIns="0" rIns="0" bIns="0" anchor="t">
+          <a:bodyPr wrap="square" lIns="0" rIns="0" tIns="0" bIns="0" anchor="t">
             <a:spAutoFit/>
           </a:bodyPr>
           <a:lstStyle/>
@@ -16042,7 +15777,7 @@
           <a:noFill/>
         </p:spPr>
         <p:txBody>
-          <a:bodyPr wrap="square" lIns="0" tIns="0" rIns="0" bIns="0" anchor="t">
+          <a:bodyPr wrap="square" lIns="0" rIns="0" tIns="0" bIns="0" anchor="t">
             <a:spAutoFit/>
           </a:bodyPr>
           <a:lstStyle/>
@@ -16103,7 +15838,6 @@
           <a:lstStyle/>
           <a:p>
             <a:pPr algn="ctr"/>
-            <a:endParaRPr/>
           </a:p>
         </p:txBody>
       </p:sp>
@@ -16124,7 +15858,7 @@
           <a:noFill/>
         </p:spPr>
         <p:txBody>
-          <a:bodyPr wrap="square" lIns="0" tIns="0" rIns="0" bIns="0" anchor="t">
+          <a:bodyPr wrap="square" lIns="0" rIns="0" tIns="0" bIns="0" anchor="t">
             <a:spAutoFit/>
           </a:bodyPr>
           <a:lstStyle/>
@@ -16159,7 +15893,7 @@
           <a:noFill/>
         </p:spPr>
         <p:txBody>
-          <a:bodyPr wrap="square" lIns="0" tIns="0" rIns="0" bIns="0" anchor="t">
+          <a:bodyPr wrap="square" lIns="0" rIns="0" tIns="0" bIns="0" anchor="t">
             <a:spAutoFit/>
           </a:bodyPr>
           <a:lstStyle/>
@@ -16220,7 +15954,6 @@
           <a:lstStyle/>
           <a:p>
             <a:pPr algn="ctr"/>
-            <a:endParaRPr/>
           </a:p>
         </p:txBody>
       </p:sp>
@@ -16241,7 +15974,7 @@
           <a:noFill/>
         </p:spPr>
         <p:txBody>
-          <a:bodyPr wrap="square" lIns="0" tIns="0" rIns="0" bIns="0" anchor="t">
+          <a:bodyPr wrap="square" lIns="0" rIns="0" tIns="0" bIns="0" anchor="t">
             <a:spAutoFit/>
           </a:bodyPr>
           <a:lstStyle/>
@@ -16276,7 +16009,7 @@
           <a:noFill/>
         </p:spPr>
         <p:txBody>
-          <a:bodyPr wrap="square" lIns="0" tIns="0" rIns="0" bIns="0" anchor="t">
+          <a:bodyPr wrap="square" lIns="0" rIns="0" tIns="0" bIns="0" anchor="t">
             <a:spAutoFit/>
           </a:bodyPr>
           <a:lstStyle/>
@@ -16337,7 +16070,6 @@
           <a:lstStyle/>
           <a:p>
             <a:pPr algn="ctr"/>
-            <a:endParaRPr/>
           </a:p>
         </p:txBody>
       </p:sp>
@@ -16358,7 +16090,7 @@
           <a:noFill/>
         </p:spPr>
         <p:txBody>
-          <a:bodyPr wrap="square" lIns="0" tIns="0" rIns="0" bIns="0" anchor="t">
+          <a:bodyPr wrap="square" lIns="0" rIns="0" tIns="0" bIns="0" anchor="t">
             <a:spAutoFit/>
           </a:bodyPr>
           <a:lstStyle/>
@@ -16393,7 +16125,7 @@
           <a:noFill/>
         </p:spPr>
         <p:txBody>
-          <a:bodyPr wrap="square" lIns="0" tIns="0" rIns="0" bIns="0" anchor="t">
+          <a:bodyPr wrap="square" lIns="0" rIns="0" tIns="0" bIns="0" anchor="t">
             <a:spAutoFit/>
           </a:bodyPr>
           <a:lstStyle/>
@@ -16454,7 +16186,6 @@
           <a:lstStyle/>
           <a:p>
             <a:pPr algn="ctr"/>
-            <a:endParaRPr/>
           </a:p>
         </p:txBody>
       </p:sp>
@@ -16475,7 +16206,7 @@
           <a:noFill/>
         </p:spPr>
         <p:txBody>
-          <a:bodyPr wrap="square" lIns="0" tIns="0" rIns="0" bIns="0" anchor="t">
+          <a:bodyPr wrap="square" lIns="0" rIns="0" tIns="0" bIns="0" anchor="t">
             <a:spAutoFit/>
           </a:bodyPr>
           <a:lstStyle/>
@@ -16510,7 +16241,7 @@
           <a:noFill/>
         </p:spPr>
         <p:txBody>
-          <a:bodyPr wrap="square" lIns="0" tIns="0" rIns="0" bIns="0" anchor="t">
+          <a:bodyPr wrap="square" lIns="0" rIns="0" tIns="0" bIns="0" anchor="t">
             <a:spAutoFit/>
           </a:bodyPr>
           <a:lstStyle/>
@@ -16571,7 +16302,6 @@
           <a:lstStyle/>
           <a:p>
             <a:pPr algn="ctr"/>
-            <a:endParaRPr/>
           </a:p>
         </p:txBody>
       </p:sp>
@@ -16592,7 +16322,7 @@
           <a:noFill/>
         </p:spPr>
         <p:txBody>
-          <a:bodyPr wrap="square" lIns="0" tIns="0" rIns="0" bIns="0" anchor="t">
+          <a:bodyPr wrap="square" lIns="0" rIns="0" tIns="0" bIns="0" anchor="t">
             <a:spAutoFit/>
           </a:bodyPr>
           <a:lstStyle/>
@@ -16627,7 +16357,7 @@
           <a:noFill/>
         </p:spPr>
         <p:txBody>
-          <a:bodyPr wrap="square" lIns="0" tIns="0" rIns="0" bIns="0" anchor="t">
+          <a:bodyPr wrap="square" lIns="0" rIns="0" tIns="0" bIns="0" anchor="t">
             <a:spAutoFit/>
           </a:bodyPr>
           <a:lstStyle/>
@@ -16686,7 +16416,6 @@
           <a:lstStyle/>
           <a:p>
             <a:pPr algn="ctr"/>
-            <a:endParaRPr/>
           </a:p>
         </p:txBody>
       </p:sp>
@@ -16707,7 +16436,7 @@
           <a:noFill/>
         </p:spPr>
         <p:txBody>
-          <a:bodyPr wrap="square" lIns="0" tIns="0" rIns="0" bIns="0" anchor="t">
+          <a:bodyPr wrap="square" lIns="0" rIns="0" tIns="0" bIns="0" anchor="t">
             <a:spAutoFit/>
           </a:bodyPr>
           <a:lstStyle/>
@@ -16742,7 +16471,7 @@
           <a:noFill/>
         </p:spPr>
         <p:txBody>
-          <a:bodyPr wrap="square" lIns="0" tIns="0" rIns="0" bIns="0" anchor="t">
+          <a:bodyPr wrap="square" lIns="0" rIns="0" tIns="0" bIns="0" anchor="t">
             <a:spAutoFit/>
           </a:bodyPr>
           <a:lstStyle/>
@@ -16769,7 +16498,7 @@
 </file>
 
 <file path=ppt/slides/slide7.xml><?xml version="1.0" encoding="utf-8"?>
-<p:sld xmlns:a="http://schemas.openxmlformats.org/drawingml/2006/main" xmlns:r="http://schemas.openxmlformats.org/officeDocument/2006/relationships" xmlns:p="http://schemas.openxmlformats.org/presentationml/2006/main">
+<p:sld xmlns:a="http://schemas.openxmlformats.org/drawingml/2006/main" xmlns:p="http://schemas.openxmlformats.org/presentationml/2006/main" xmlns:r="http://schemas.openxmlformats.org/officeDocument/2006/relationships">
   <p:cSld>
     <p:spTree>
       <p:nvGrpSpPr>
@@ -16777,14 +16506,7 @@
         <p:cNvGrpSpPr/>
         <p:nvPr/>
       </p:nvGrpSpPr>
-      <p:grpSpPr>
-        <a:xfrm>
-          <a:off x="0" y="0"/>
-          <a:ext cx="0" cy="0"/>
-          <a:chOff x="0" y="0"/>
-          <a:chExt cx="0" cy="0"/>
-        </a:xfrm>
-      </p:grpSpPr>
+      <p:grpSpPr/>
       <p:sp>
         <p:nvSpPr>
           <p:cNvPr id="2" name="Rectangle 1"/>
@@ -16826,7 +16548,6 @@
           <a:lstStyle/>
           <a:p>
             <a:pPr algn="ctr"/>
-            <a:endParaRPr/>
           </a:p>
         </p:txBody>
       </p:sp>
@@ -16871,7 +16592,6 @@
           <a:lstStyle/>
           <a:p>
             <a:pPr algn="ctr"/>
-            <a:endParaRPr/>
           </a:p>
         </p:txBody>
       </p:sp>
@@ -16892,7 +16612,7 @@
           <a:noFill/>
         </p:spPr>
         <p:txBody>
-          <a:bodyPr wrap="square" lIns="0" tIns="0" rIns="0" bIns="0" anchor="t">
+          <a:bodyPr wrap="square" lIns="0" rIns="0" tIns="0" bIns="0" anchor="t">
             <a:spAutoFit/>
           </a:bodyPr>
           <a:lstStyle/>
@@ -16927,7 +16647,7 @@
           <a:noFill/>
         </p:spPr>
         <p:txBody>
-          <a:bodyPr wrap="square" lIns="0" tIns="0" rIns="0" bIns="0" anchor="t">
+          <a:bodyPr wrap="square" lIns="0" rIns="0" tIns="0" bIns="0" anchor="t">
             <a:spAutoFit/>
           </a:bodyPr>
           <a:lstStyle/>
@@ -16962,7 +16682,7 @@
           <a:noFill/>
         </p:spPr>
         <p:txBody>
-          <a:bodyPr wrap="square" lIns="0" tIns="0" rIns="0" bIns="0" anchor="t">
+          <a:bodyPr wrap="square" lIns="0" rIns="0" tIns="0" bIns="0" anchor="t">
             <a:spAutoFit/>
           </a:bodyPr>
           <a:lstStyle/>
@@ -17021,7 +16741,6 @@
           <a:lstStyle/>
           <a:p>
             <a:pPr algn="ctr"/>
-            <a:endParaRPr/>
           </a:p>
         </p:txBody>
       </p:sp>
@@ -17068,7 +16787,6 @@
           <a:lstStyle/>
           <a:p>
             <a:pPr algn="ctr"/>
-            <a:endParaRPr/>
           </a:p>
         </p:txBody>
       </p:sp>
@@ -17081,7 +16799,7 @@
         <p:spPr>
           <a:xfrm>
             <a:off x="411480" y="1691640"/>
-            <a:ext cx="1600200" cy="2240280"/>
+            <a:ext cx="1828800" cy="2240280"/>
           </a:xfrm>
           <a:prstGeom prst="rect">
             <a:avLst/>
@@ -17113,7 +16831,6 @@
           <a:lstStyle/>
           <a:p>
             <a:pPr algn="ctr"/>
-            <a:endParaRPr/>
           </a:p>
         </p:txBody>
       </p:sp>
@@ -17126,15 +16843,15 @@
         <p:spPr>
           <a:xfrm>
             <a:off x="411480" y="2103120"/>
-            <a:ext cx="1600200" cy="502920"/>
-          </a:xfrm>
-          <a:prstGeom prst="rect">
-            <a:avLst/>
-          </a:prstGeom>
-          <a:noFill/>
-        </p:spPr>
-        <p:txBody>
-          <a:bodyPr wrap="square" lIns="0" tIns="0" rIns="0" bIns="0" anchor="t">
+            <a:ext cx="1828800" cy="502920"/>
+          </a:xfrm>
+          <a:prstGeom prst="rect">
+            <a:avLst/>
+          </a:prstGeom>
+          <a:noFill/>
+        </p:spPr>
+        <p:txBody>
+          <a:bodyPr wrap="square" lIns="0" rIns="0" tIns="0" bIns="0" anchor="t">
             <a:spAutoFit/>
           </a:bodyPr>
           <a:lstStyle/>
@@ -17161,15 +16878,15 @@
         <p:spPr>
           <a:xfrm>
             <a:off x="411480" y="2697480"/>
-            <a:ext cx="1600200" cy="365760"/>
-          </a:xfrm>
-          <a:prstGeom prst="rect">
-            <a:avLst/>
-          </a:prstGeom>
-          <a:noFill/>
-        </p:spPr>
-        <p:txBody>
-          <a:bodyPr wrap="square" lIns="0" tIns="0" rIns="0" bIns="0" anchor="t">
+            <a:ext cx="1828800" cy="365760"/>
+          </a:xfrm>
+          <a:prstGeom prst="rect">
+            <a:avLst/>
+          </a:prstGeom>
+          <a:noFill/>
+        </p:spPr>
+        <p:txBody>
+          <a:bodyPr wrap="square" lIns="0" rIns="0" tIns="0" bIns="0" anchor="t">
             <a:spAutoFit/>
           </a:bodyPr>
           <a:lstStyle/>
@@ -17195,8 +16912,8 @@
         </p:nvSpPr>
         <p:spPr>
           <a:xfrm>
-            <a:off x="2194560" y="1920240"/>
-            <a:ext cx="3749040" cy="1874520"/>
+            <a:off x="2423160" y="1920240"/>
+            <a:ext cx="3520440" cy="1874520"/>
           </a:xfrm>
           <a:prstGeom prst="rect">
             <a:avLst/>
@@ -17391,7 +17108,6 @@
           <a:lstStyle/>
           <a:p>
             <a:pPr algn="ctr"/>
-            <a:endParaRPr/>
           </a:p>
         </p:txBody>
       </p:sp>
@@ -17438,7 +17154,6 @@
           <a:lstStyle/>
           <a:p>
             <a:pPr algn="ctr"/>
-            <a:endParaRPr/>
           </a:p>
         </p:txBody>
       </p:sp>
@@ -17451,7 +17166,7 @@
         <p:spPr>
           <a:xfrm>
             <a:off x="6199632" y="1691640"/>
-            <a:ext cx="1664208" cy="2240280"/>
+            <a:ext cx="1828800" cy="2240280"/>
           </a:xfrm>
           <a:prstGeom prst="rect">
             <a:avLst/>
@@ -17483,7 +17198,6 @@
           <a:lstStyle/>
           <a:p>
             <a:pPr algn="ctr"/>
-            <a:endParaRPr/>
           </a:p>
         </p:txBody>
       </p:sp>
@@ -17496,15 +17210,15 @@
         <p:spPr>
           <a:xfrm>
             <a:off x="6199632" y="2103120"/>
-            <a:ext cx="1600200" cy="502920"/>
-          </a:xfrm>
-          <a:prstGeom prst="rect">
-            <a:avLst/>
-          </a:prstGeom>
-          <a:noFill/>
-        </p:spPr>
-        <p:txBody>
-          <a:bodyPr wrap="square" lIns="0" tIns="0" rIns="0" bIns="0" anchor="t">
+            <a:ext cx="1828800" cy="502920"/>
+          </a:xfrm>
+          <a:prstGeom prst="rect">
+            <a:avLst/>
+          </a:prstGeom>
+          <a:noFill/>
+        </p:spPr>
+        <p:txBody>
+          <a:bodyPr wrap="square" lIns="0" rIns="0" tIns="0" bIns="0" anchor="t">
             <a:spAutoFit/>
           </a:bodyPr>
           <a:lstStyle/>
@@ -17531,15 +17245,15 @@
         <p:spPr>
           <a:xfrm>
             <a:off x="6199632" y="2697480"/>
-            <a:ext cx="1600200" cy="365760"/>
-          </a:xfrm>
-          <a:prstGeom prst="rect">
-            <a:avLst/>
-          </a:prstGeom>
-          <a:noFill/>
-        </p:spPr>
-        <p:txBody>
-          <a:bodyPr wrap="square" lIns="0" tIns="0" rIns="0" bIns="0" anchor="t">
+            <a:ext cx="1828800" cy="365760"/>
+          </a:xfrm>
+          <a:prstGeom prst="rect">
+            <a:avLst/>
+          </a:prstGeom>
+          <a:noFill/>
+        </p:spPr>
+        <p:txBody>
+          <a:bodyPr wrap="square" lIns="0" rIns="0" tIns="0" bIns="0" anchor="t">
             <a:spAutoFit/>
           </a:bodyPr>
           <a:lstStyle/>
@@ -17565,8 +17279,8 @@
         </p:nvSpPr>
         <p:spPr>
           <a:xfrm>
-            <a:off x="7982712" y="1920240"/>
-            <a:ext cx="3749040" cy="1874520"/>
+            <a:off x="8211312" y="1920240"/>
+            <a:ext cx="3520440" cy="1874520"/>
           </a:xfrm>
           <a:prstGeom prst="rect">
             <a:avLst/>
@@ -17761,7 +17475,6 @@
           <a:lstStyle/>
           <a:p>
             <a:pPr algn="ctr"/>
-            <a:endParaRPr/>
           </a:p>
         </p:txBody>
       </p:sp>
@@ -17808,7 +17521,6 @@
           <a:lstStyle/>
           <a:p>
             <a:pPr algn="ctr"/>
-            <a:endParaRPr/>
           </a:p>
         </p:txBody>
       </p:sp>
@@ -17821,7 +17533,7 @@
         <p:spPr>
           <a:xfrm>
             <a:off x="411480" y="4096512"/>
-            <a:ext cx="1600200" cy="2240280"/>
+            <a:ext cx="1828800" cy="2240280"/>
           </a:xfrm>
           <a:prstGeom prst="rect">
             <a:avLst/>
@@ -17853,7 +17565,6 @@
           <a:lstStyle/>
           <a:p>
             <a:pPr algn="ctr"/>
-            <a:endParaRPr/>
           </a:p>
         </p:txBody>
       </p:sp>
@@ -17866,15 +17577,15 @@
         <p:spPr>
           <a:xfrm>
             <a:off x="411480" y="4507992"/>
-            <a:ext cx="1600200" cy="502920"/>
-          </a:xfrm>
-          <a:prstGeom prst="rect">
-            <a:avLst/>
-          </a:prstGeom>
-          <a:noFill/>
-        </p:spPr>
-        <p:txBody>
-          <a:bodyPr wrap="square" lIns="0" tIns="0" rIns="0" bIns="0" anchor="t">
+            <a:ext cx="1828800" cy="502920"/>
+          </a:xfrm>
+          <a:prstGeom prst="rect">
+            <a:avLst/>
+          </a:prstGeom>
+          <a:noFill/>
+        </p:spPr>
+        <p:txBody>
+          <a:bodyPr wrap="square" lIns="0" rIns="0" tIns="0" bIns="0" anchor="t">
             <a:spAutoFit/>
           </a:bodyPr>
           <a:lstStyle/>
@@ -17901,15 +17612,15 @@
         <p:spPr>
           <a:xfrm>
             <a:off x="411480" y="5102352"/>
-            <a:ext cx="1600200" cy="365760"/>
-          </a:xfrm>
-          <a:prstGeom prst="rect">
-            <a:avLst/>
-          </a:prstGeom>
-          <a:noFill/>
-        </p:spPr>
-        <p:txBody>
-          <a:bodyPr wrap="square" lIns="0" tIns="0" rIns="0" bIns="0" anchor="t">
+            <a:ext cx="1828800" cy="365760"/>
+          </a:xfrm>
+          <a:prstGeom prst="rect">
+            <a:avLst/>
+          </a:prstGeom>
+          <a:noFill/>
+        </p:spPr>
+        <p:txBody>
+          <a:bodyPr wrap="square" lIns="0" rIns="0" tIns="0" bIns="0" anchor="t">
             <a:spAutoFit/>
           </a:bodyPr>
           <a:lstStyle/>
@@ -17935,8 +17646,8 @@
         </p:nvSpPr>
         <p:spPr>
           <a:xfrm>
-            <a:off x="2194560" y="4325112"/>
-            <a:ext cx="3749040" cy="1874520"/>
+            <a:off x="2423160" y="4325112"/>
+            <a:ext cx="3520440" cy="1874520"/>
           </a:xfrm>
           <a:prstGeom prst="rect">
             <a:avLst/>
@@ -18103,7 +17814,6 @@
           <a:lstStyle/>
           <a:p>
             <a:pPr algn="ctr"/>
-            <a:endParaRPr/>
           </a:p>
         </p:txBody>
       </p:sp>
@@ -18150,7 +17860,6 @@
           <a:lstStyle/>
           <a:p>
             <a:pPr algn="ctr"/>
-            <a:endParaRPr/>
           </a:p>
         </p:txBody>
       </p:sp>
@@ -18163,7 +17872,7 @@
         <p:spPr>
           <a:xfrm>
             <a:off x="6199632" y="4096512"/>
-            <a:ext cx="1664208" cy="2240280"/>
+            <a:ext cx="1828800" cy="2240280"/>
           </a:xfrm>
           <a:prstGeom prst="rect">
             <a:avLst/>
@@ -18195,7 +17904,6 @@
           <a:lstStyle/>
           <a:p>
             <a:pPr algn="ctr"/>
-            <a:endParaRPr/>
           </a:p>
         </p:txBody>
       </p:sp>
@@ -18207,23 +17915,23 @@
         </p:nvSpPr>
         <p:spPr>
           <a:xfrm>
-            <a:off x="6169152" y="4500741"/>
-            <a:ext cx="1725168" cy="276999"/>
-          </a:xfrm>
-          <a:prstGeom prst="rect">
-            <a:avLst/>
-          </a:prstGeom>
-          <a:noFill/>
-        </p:spPr>
-        <p:txBody>
-          <a:bodyPr wrap="square" lIns="0" tIns="0" rIns="0" bIns="0" anchor="t">
-            <a:spAutoFit/>
-          </a:bodyPr>
-          <a:lstStyle/>
-          <a:p>
-            <a:pPr algn="ctr"/>
-            <a:r>
-              <a:rPr sz="1800" b="1" dirty="0">
+            <a:off x="6199632" y="4507992"/>
+            <a:ext cx="1828800" cy="502920"/>
+          </a:xfrm>
+          <a:prstGeom prst="rect">
+            <a:avLst/>
+          </a:prstGeom>
+          <a:noFill/>
+        </p:spPr>
+        <p:txBody>
+          <a:bodyPr wrap="square" lIns="0" rIns="0" tIns="0" bIns="0" anchor="t">
+            <a:spAutoFit/>
+          </a:bodyPr>
+          <a:lstStyle/>
+          <a:p>
+            <a:pPr algn="ctr"/>
+            <a:r>
+              <a:rPr sz="1800" b="1">
                 <a:solidFill>
                   <a:srgbClr val="FFFFFF"/>
                 </a:solidFill>
@@ -18243,15 +17951,15 @@
         <p:spPr>
           <a:xfrm>
             <a:off x="6199632" y="5102352"/>
-            <a:ext cx="1600200" cy="365760"/>
-          </a:xfrm>
-          <a:prstGeom prst="rect">
-            <a:avLst/>
-          </a:prstGeom>
-          <a:noFill/>
-        </p:spPr>
-        <p:txBody>
-          <a:bodyPr wrap="square" lIns="0" tIns="0" rIns="0" bIns="0" anchor="t">
+            <a:ext cx="1828800" cy="365760"/>
+          </a:xfrm>
+          <a:prstGeom prst="rect">
+            <a:avLst/>
+          </a:prstGeom>
+          <a:noFill/>
+        </p:spPr>
+        <p:txBody>
+          <a:bodyPr wrap="square" lIns="0" rIns="0" tIns="0" bIns="0" anchor="t">
             <a:spAutoFit/>
           </a:bodyPr>
           <a:lstStyle/>
@@ -18277,8 +17985,8 @@
         </p:nvSpPr>
         <p:spPr>
           <a:xfrm>
-            <a:off x="7982712" y="4325112"/>
-            <a:ext cx="3749040" cy="1874520"/>
+            <a:off x="8211312" y="4325112"/>
+            <a:ext cx="3520440" cy="1874520"/>
           </a:xfrm>
           <a:prstGeom prst="rect">
             <a:avLst/>
@@ -18417,7 +18125,6 @@
           <a:lstStyle/>
           <a:p>
             <a:pPr algn="ctr"/>
-            <a:endParaRPr/>
           </a:p>
         </p:txBody>
       </p:sp>
@@ -18438,7 +18145,7 @@
           <a:noFill/>
         </p:spPr>
         <p:txBody>
-          <a:bodyPr wrap="square" lIns="0" tIns="0" rIns="0" bIns="0" anchor="t">
+          <a:bodyPr wrap="square" lIns="0" rIns="0" tIns="0" bIns="0" anchor="t">
             <a:spAutoFit/>
           </a:bodyPr>
           <a:lstStyle/>
@@ -18473,7 +18180,7 @@
           <a:noFill/>
         </p:spPr>
         <p:txBody>
-          <a:bodyPr wrap="square" lIns="0" tIns="0" rIns="0" bIns="0" anchor="t">
+          <a:bodyPr wrap="square" lIns="0" rIns="0" tIns="0" bIns="0" anchor="t">
             <a:spAutoFit/>
           </a:bodyPr>
           <a:lstStyle/>
@@ -18500,7 +18207,7 @@
 </file>
 
 <file path=ppt/slides/slide8.xml><?xml version="1.0" encoding="utf-8"?>
-<p:sld xmlns:a="http://schemas.openxmlformats.org/drawingml/2006/main" xmlns:r="http://schemas.openxmlformats.org/officeDocument/2006/relationships" xmlns:p="http://schemas.openxmlformats.org/presentationml/2006/main">
+<p:sld xmlns:a="http://schemas.openxmlformats.org/drawingml/2006/main" xmlns:p="http://schemas.openxmlformats.org/presentationml/2006/main" xmlns:r="http://schemas.openxmlformats.org/officeDocument/2006/relationships">
   <p:cSld>
     <p:spTree>
       <p:nvGrpSpPr>
@@ -18508,14 +18215,7 @@
         <p:cNvGrpSpPr/>
         <p:nvPr/>
       </p:nvGrpSpPr>
-      <p:grpSpPr>
-        <a:xfrm>
-          <a:off x="0" y="0"/>
-          <a:ext cx="0" cy="0"/>
-          <a:chOff x="0" y="0"/>
-          <a:chExt cx="0" cy="0"/>
-        </a:xfrm>
-      </p:grpSpPr>
+      <p:grpSpPr/>
       <p:sp>
         <p:nvSpPr>
           <p:cNvPr id="2" name="Rectangle 1"/>
@@ -18557,7 +18257,6 @@
           <a:lstStyle/>
           <a:p>
             <a:pPr algn="ctr"/>
-            <a:endParaRPr/>
           </a:p>
         </p:txBody>
       </p:sp>
@@ -18602,7 +18301,6 @@
           <a:lstStyle/>
           <a:p>
             <a:pPr algn="ctr"/>
-            <a:endParaRPr/>
           </a:p>
         </p:txBody>
       </p:sp>
@@ -18615,98 +18313,29 @@
         <p:spPr>
           <a:xfrm>
             <a:off x="457200" y="182880"/>
-            <a:ext cx="9601200" cy="492443"/>
-          </a:xfrm>
-          <a:prstGeom prst="rect">
-            <a:avLst/>
-          </a:prstGeom>
-          <a:noFill/>
-        </p:spPr>
-        <p:txBody>
-          <a:bodyPr wrap="square" lIns="0" tIns="0" rIns="0" bIns="0" anchor="t">
+            <a:ext cx="9601200" cy="548640"/>
+          </a:xfrm>
+          <a:prstGeom prst="rect">
+            <a:avLst/>
+          </a:prstGeom>
+          <a:noFill/>
+        </p:spPr>
+        <p:txBody>
+          <a:bodyPr wrap="square" lIns="0" rIns="0" tIns="0" bIns="0" anchor="t">
             <a:spAutoFit/>
           </a:bodyPr>
           <a:lstStyle/>
           <a:p>
             <a:pPr algn="l"/>
             <a:r>
-              <a:rPr sz="3200" b="1" dirty="0" err="1">
+              <a:rPr sz="3200" b="1">
                 <a:solidFill>
                   <a:srgbClr val="FFFFFF"/>
                 </a:solidFill>
                 <a:latin typeface="Calibri"/>
               </a:rPr>
-              <a:t>Cerințe</a:t>
-            </a:r>
-            <a:r>
-              <a:rPr sz="3200" b="1" dirty="0">
-                <a:solidFill>
-                  <a:srgbClr val="FFFFFF"/>
-                </a:solidFill>
-                <a:latin typeface="Calibri"/>
-              </a:rPr>
-              <a:t> </a:t>
-            </a:r>
-            <a:r>
-              <a:rPr sz="3200" b="1" dirty="0" err="1">
-                <a:solidFill>
-                  <a:srgbClr val="FFFFFF"/>
-                </a:solidFill>
-                <a:latin typeface="Calibri"/>
-              </a:rPr>
-              <a:t>funcționale</a:t>
-            </a:r>
-            <a:r>
-              <a:rPr sz="3200" b="1" dirty="0">
-                <a:solidFill>
-                  <a:srgbClr val="FFFFFF"/>
-                </a:solidFill>
-                <a:latin typeface="Calibri"/>
-              </a:rPr>
-              <a:t> </a:t>
-            </a:r>
-            <a:r>
-              <a:rPr sz="3200" b="1" dirty="0" err="1">
-                <a:solidFill>
-                  <a:srgbClr val="FFFFFF"/>
-                </a:solidFill>
-                <a:latin typeface="Calibri"/>
-              </a:rPr>
-              <a:t>și</a:t>
-            </a:r>
-            <a:r>
-              <a:rPr sz="3200" b="1" dirty="0">
-                <a:solidFill>
-                  <a:srgbClr val="FFFFFF"/>
-                </a:solidFill>
-                <a:latin typeface="Calibri"/>
-              </a:rPr>
-              <a:t> </a:t>
-            </a:r>
-            <a:r>
-              <a:rPr lang="en-US" sz="3200" b="1" dirty="0">
-                <a:solidFill>
-                  <a:srgbClr val="FFFFFF"/>
-                </a:solidFill>
-                <a:latin typeface="Calibri"/>
-              </a:rPr>
-              <a:t>de </a:t>
-            </a:r>
-            <a:r>
-              <a:rPr lang="en-US" sz="3200" b="1" dirty="0" err="1">
-                <a:solidFill>
-                  <a:srgbClr val="FFFFFF"/>
-                </a:solidFill>
-                <a:latin typeface="Calibri"/>
-              </a:rPr>
-              <a:t>calitate</a:t>
-            </a:r>
-            <a:endParaRPr sz="3200" b="1" dirty="0">
-              <a:solidFill>
-                <a:srgbClr val="FFFFFF"/>
-              </a:solidFill>
-              <a:latin typeface="Calibri"/>
-            </a:endParaRPr>
+              <a:t>Cerințe funcționale și tehnice</a:t>
+            </a:r>
           </a:p>
         </p:txBody>
       </p:sp>
@@ -18727,7 +18356,7 @@
           <a:noFill/>
         </p:spPr>
         <p:txBody>
-          <a:bodyPr wrap="square" lIns="0" tIns="0" rIns="0" bIns="0" anchor="t">
+          <a:bodyPr wrap="square" lIns="0" rIns="0" tIns="0" bIns="0" anchor="t">
             <a:spAutoFit/>
           </a:bodyPr>
           <a:lstStyle/>
@@ -18786,7 +18415,6 @@
           <a:lstStyle/>
           <a:p>
             <a:pPr algn="ctr"/>
-            <a:endParaRPr/>
           </a:p>
         </p:txBody>
       </p:sp>
@@ -18833,7 +18461,6 @@
           <a:lstStyle/>
           <a:p>
             <a:pPr algn="ctr"/>
-            <a:endParaRPr/>
           </a:p>
         </p:txBody>
       </p:sp>
@@ -18878,7 +18505,6 @@
           <a:lstStyle/>
           <a:p>
             <a:pPr algn="ctr"/>
-            <a:endParaRPr/>
           </a:p>
         </p:txBody>
       </p:sp>
@@ -18899,7 +18525,7 @@
           <a:noFill/>
         </p:spPr>
         <p:txBody>
-          <a:bodyPr wrap="square" lIns="0" tIns="0" rIns="0" bIns="0" anchor="ctr">
+          <a:bodyPr wrap="square" lIns="0" rIns="0" tIns="0" bIns="0" anchor="ctr">
             <a:spAutoFit/>
           </a:bodyPr>
           <a:lstStyle/>
@@ -19149,7 +18775,6 @@
           <a:lstStyle/>
           <a:p>
             <a:pPr algn="ctr"/>
-            <a:endParaRPr/>
           </a:p>
         </p:txBody>
       </p:sp>
@@ -19196,7 +18821,6 @@
           <a:lstStyle/>
           <a:p>
             <a:pPr algn="ctr"/>
-            <a:endParaRPr/>
           </a:p>
         </p:txBody>
       </p:sp>
@@ -19241,7 +18865,6 @@
           <a:lstStyle/>
           <a:p>
             <a:pPr algn="ctr"/>
-            <a:endParaRPr/>
           </a:p>
         </p:txBody>
       </p:sp>
@@ -19253,45 +18876,30 @@
         </p:nvSpPr>
         <p:spPr>
           <a:xfrm>
-            <a:off x="6153912" y="1888123"/>
-            <a:ext cx="5577840" cy="338554"/>
-          </a:xfrm>
-          <a:prstGeom prst="rect">
-            <a:avLst/>
-          </a:prstGeom>
-          <a:noFill/>
-        </p:spPr>
-        <p:txBody>
-          <a:bodyPr wrap="square" lIns="0" tIns="0" rIns="0" bIns="0" anchor="ctr">
-            <a:spAutoFit/>
-          </a:bodyPr>
-          <a:lstStyle/>
-          <a:p>
-            <a:pPr algn="ctr"/>
-            <a:r>
-              <a:rPr lang="en-US" sz="2200" b="1" dirty="0">
+            <a:off x="6153912" y="1691640"/>
+            <a:ext cx="5577840" cy="731520"/>
+          </a:xfrm>
+          <a:prstGeom prst="rect">
+            <a:avLst/>
+          </a:prstGeom>
+          <a:noFill/>
+        </p:spPr>
+        <p:txBody>
+          <a:bodyPr wrap="square" lIns="0" rIns="0" tIns="0" bIns="0" anchor="ctr">
+            <a:spAutoFit/>
+          </a:bodyPr>
+          <a:lstStyle/>
+          <a:p>
+            <a:pPr algn="ctr"/>
+            <a:r>
+              <a:rPr sz="2200" b="1">
                 <a:solidFill>
                   <a:srgbClr val="FFFFFF"/>
                 </a:solidFill>
                 <a:latin typeface="Calibri"/>
               </a:rPr>
-              <a:t>De </a:t>
-            </a:r>
-            <a:r>
-              <a:rPr lang="en-US" sz="2200" b="1" dirty="0" err="1">
-                <a:solidFill>
-                  <a:srgbClr val="FFFFFF"/>
-                </a:solidFill>
-                <a:latin typeface="Calibri"/>
-              </a:rPr>
-              <a:t>calitate</a:t>
-            </a:r>
-            <a:endParaRPr sz="2200" b="1" dirty="0">
-              <a:solidFill>
-                <a:srgbClr val="FFFFFF"/>
-              </a:solidFill>
-              <a:latin typeface="Calibri"/>
-            </a:endParaRPr>
+              <a:t>Tehnice</a:t>
+            </a:r>
           </a:p>
         </p:txBody>
       </p:sp>
@@ -19527,7 +19135,6 @@
           <a:lstStyle/>
           <a:p>
             <a:pPr algn="ctr"/>
-            <a:endParaRPr/>
           </a:p>
         </p:txBody>
       </p:sp>
@@ -19548,7 +19155,7 @@
           <a:noFill/>
         </p:spPr>
         <p:txBody>
-          <a:bodyPr wrap="square" lIns="0" tIns="0" rIns="0" bIns="0" anchor="t">
+          <a:bodyPr wrap="square" lIns="0" rIns="0" tIns="0" bIns="0" anchor="t">
             <a:spAutoFit/>
           </a:bodyPr>
           <a:lstStyle/>
@@ -19583,7 +19190,7 @@
           <a:noFill/>
         </p:spPr>
         <p:txBody>
-          <a:bodyPr wrap="square" lIns="0" tIns="0" rIns="0" bIns="0" anchor="t">
+          <a:bodyPr wrap="square" lIns="0" rIns="0" tIns="0" bIns="0" anchor="t">
             <a:spAutoFit/>
           </a:bodyPr>
           <a:lstStyle/>
@@ -19610,7 +19217,7 @@
 </file>
 
 <file path=ppt/slides/slide9.xml><?xml version="1.0" encoding="utf-8"?>
-<p:sld xmlns:a="http://schemas.openxmlformats.org/drawingml/2006/main" xmlns:r="http://schemas.openxmlformats.org/officeDocument/2006/relationships" xmlns:p="http://schemas.openxmlformats.org/presentationml/2006/main">
+<p:sld xmlns:a="http://schemas.openxmlformats.org/drawingml/2006/main" xmlns:p="http://schemas.openxmlformats.org/presentationml/2006/main" xmlns:r="http://schemas.openxmlformats.org/officeDocument/2006/relationships">
   <p:cSld>
     <p:spTree>
       <p:nvGrpSpPr>
@@ -19618,14 +19225,7 @@
         <p:cNvGrpSpPr/>
         <p:nvPr/>
       </p:nvGrpSpPr>
-      <p:grpSpPr>
-        <a:xfrm>
-          <a:off x="0" y="0"/>
-          <a:ext cx="0" cy="0"/>
-          <a:chOff x="0" y="0"/>
-          <a:chExt cx="0" cy="0"/>
-        </a:xfrm>
-      </p:grpSpPr>
+      <p:grpSpPr/>
       <p:sp>
         <p:nvSpPr>
           <p:cNvPr id="2" name="Rectangle 1"/>
@@ -19667,7 +19267,6 @@
           <a:lstStyle/>
           <a:p>
             <a:pPr algn="ctr"/>
-            <a:endParaRPr/>
           </a:p>
         </p:txBody>
       </p:sp>
@@ -19712,7 +19311,6 @@
           <a:lstStyle/>
           <a:p>
             <a:pPr algn="ctr"/>
-            <a:endParaRPr/>
           </a:p>
         </p:txBody>
       </p:sp>
@@ -19733,7 +19331,7 @@
           <a:noFill/>
         </p:spPr>
         <p:txBody>
-          <a:bodyPr wrap="square" lIns="0" tIns="0" rIns="0" bIns="0" anchor="t">
+          <a:bodyPr wrap="square" lIns="0" rIns="0" tIns="0" bIns="0" anchor="t">
             <a:spAutoFit/>
           </a:bodyPr>
           <a:lstStyle/>
@@ -19768,7 +19366,7 @@
           <a:noFill/>
         </p:spPr>
         <p:txBody>
-          <a:bodyPr wrap="square" lIns="0" tIns="0" rIns="0" bIns="0" anchor="t">
+          <a:bodyPr wrap="square" lIns="0" rIns="0" tIns="0" bIns="0" anchor="t">
             <a:spAutoFit/>
           </a:bodyPr>
           <a:lstStyle/>
@@ -19803,7 +19401,7 @@
           <a:noFill/>
         </p:spPr>
         <p:txBody>
-          <a:bodyPr wrap="square" lIns="0" tIns="0" rIns="0" bIns="0" anchor="t">
+          <a:bodyPr wrap="square" lIns="0" rIns="0" tIns="0" bIns="0" anchor="t">
             <a:spAutoFit/>
           </a:bodyPr>
           <a:lstStyle/>
@@ -19830,7 +19428,7 @@
         <p:spPr>
           <a:xfrm>
             <a:off x="365760" y="1691640"/>
-            <a:ext cx="5394960" cy="3520440"/>
+            <a:ext cx="5669280" cy="3520440"/>
           </a:xfrm>
           <a:prstGeom prst="rect">
             <a:avLst/>
@@ -19864,7 +19462,6 @@
           <a:lstStyle/>
           <a:p>
             <a:pPr algn="ctr"/>
-            <a:endParaRPr/>
           </a:p>
         </p:txBody>
       </p:sp>
@@ -19884,8 +19481,8 @@
         </p:blipFill>
         <p:spPr>
           <a:xfrm>
-            <a:off x="365760" y="1765935"/>
-            <a:ext cx="5394960" cy="3371850"/>
+            <a:off x="384048" y="1691640"/>
+            <a:ext cx="5632704" cy="3520440"/>
           </a:xfrm>
           <a:prstGeom prst="rect">
             <a:avLst/>
@@ -19901,15 +19498,15 @@
         <p:spPr>
           <a:xfrm>
             <a:off x="365760" y="5257800"/>
-            <a:ext cx="5394960" cy="274320"/>
-          </a:xfrm>
-          <a:prstGeom prst="rect">
-            <a:avLst/>
-          </a:prstGeom>
-          <a:noFill/>
-        </p:spPr>
-        <p:txBody>
-          <a:bodyPr wrap="square" lIns="0" tIns="0" rIns="0" bIns="0" anchor="t">
+            <a:ext cx="5669280" cy="274320"/>
+          </a:xfrm>
+          <a:prstGeom prst="rect">
+            <a:avLst/>
+          </a:prstGeom>
+          <a:noFill/>
+        </p:spPr>
+        <p:txBody>
+          <a:bodyPr wrap="square" lIns="0" rIns="0" tIns="0" bIns="0" anchor="t">
             <a:spAutoFit/>
           </a:bodyPr>
           <a:lstStyle/>
@@ -19935,8 +19532,8 @@
         </p:nvSpPr>
         <p:spPr>
           <a:xfrm>
-            <a:off x="6428232" y="1691640"/>
-            <a:ext cx="5394960" cy="3520440"/>
+            <a:off x="6217920" y="1691640"/>
+            <a:ext cx="5669280" cy="3520440"/>
           </a:xfrm>
           <a:prstGeom prst="rect">
             <a:avLst/>
@@ -19970,7 +19567,6 @@
           <a:lstStyle/>
           <a:p>
             <a:pPr algn="ctr"/>
-            <a:endParaRPr/>
           </a:p>
         </p:txBody>
       </p:sp>
@@ -19990,8 +19586,8 @@
         </p:blipFill>
         <p:spPr>
           <a:xfrm>
-            <a:off x="6531324" y="1691640"/>
-            <a:ext cx="5188775" cy="3520440"/>
+            <a:off x="6236208" y="1691640"/>
+            <a:ext cx="5632704" cy="3520440"/>
           </a:xfrm>
           <a:prstGeom prst="rect">
             <a:avLst/>
@@ -20006,16 +19602,16 @@
         </p:nvSpPr>
         <p:spPr>
           <a:xfrm>
-            <a:off x="6428232" y="5257800"/>
-            <a:ext cx="5394960" cy="274320"/>
-          </a:xfrm>
-          <a:prstGeom prst="rect">
-            <a:avLst/>
-          </a:prstGeom>
-          <a:noFill/>
-        </p:spPr>
-        <p:txBody>
-          <a:bodyPr wrap="square" lIns="0" tIns="0" rIns="0" bIns="0" anchor="t">
+            <a:off x="6217920" y="5257800"/>
+            <a:ext cx="5669280" cy="274320"/>
+          </a:xfrm>
+          <a:prstGeom prst="rect">
+            <a:avLst/>
+          </a:prstGeom>
+          <a:noFill/>
+        </p:spPr>
+        <p:txBody>
+          <a:bodyPr wrap="square" lIns="0" rIns="0" tIns="0" bIns="0" anchor="t">
             <a:spAutoFit/>
           </a:bodyPr>
           <a:lstStyle/>
@@ -20076,7 +19672,6 @@
           <a:lstStyle/>
           <a:p>
             <a:pPr algn="ctr"/>
-            <a:endParaRPr/>
           </a:p>
         </p:txBody>
       </p:sp>
@@ -20121,7 +19716,6 @@
           <a:lstStyle/>
           <a:p>
             <a:pPr algn="ctr"/>
-            <a:endParaRPr/>
           </a:p>
         </p:txBody>
       </p:sp>
@@ -20142,7 +19736,7 @@
           <a:noFill/>
         </p:spPr>
         <p:txBody>
-          <a:bodyPr wrap="square" lIns="0" tIns="0" rIns="0" bIns="0" anchor="ctr">
+          <a:bodyPr wrap="square" lIns="0" rIns="0" tIns="0" bIns="0" anchor="ctr">
             <a:spAutoFit/>
           </a:bodyPr>
           <a:lstStyle/>
@@ -20177,7 +19771,7 @@
           <a:noFill/>
         </p:spPr>
         <p:txBody>
-          <a:bodyPr wrap="square" lIns="0" tIns="0" rIns="0" bIns="0" anchor="t">
+          <a:bodyPr wrap="square" lIns="0" rIns="0" tIns="0" bIns="0" anchor="t">
             <a:spAutoFit/>
           </a:bodyPr>
           <a:lstStyle/>
@@ -20238,7 +19832,6 @@
           <a:lstStyle/>
           <a:p>
             <a:pPr algn="ctr"/>
-            <a:endParaRPr/>
           </a:p>
         </p:txBody>
       </p:sp>
@@ -20283,7 +19876,6 @@
           <a:lstStyle/>
           <a:p>
             <a:pPr algn="ctr"/>
-            <a:endParaRPr/>
           </a:p>
         </p:txBody>
       </p:sp>
@@ -20304,7 +19896,7 @@
           <a:noFill/>
         </p:spPr>
         <p:txBody>
-          <a:bodyPr wrap="square" lIns="0" tIns="0" rIns="0" bIns="0" anchor="ctr">
+          <a:bodyPr wrap="square" lIns="0" rIns="0" tIns="0" bIns="0" anchor="ctr">
             <a:spAutoFit/>
           </a:bodyPr>
           <a:lstStyle/>
@@ -20339,7 +19931,7 @@
           <a:noFill/>
         </p:spPr>
         <p:txBody>
-          <a:bodyPr wrap="square" lIns="0" tIns="0" rIns="0" bIns="0" anchor="t">
+          <a:bodyPr wrap="square" lIns="0" rIns="0" tIns="0" bIns="0" anchor="t">
             <a:spAutoFit/>
           </a:bodyPr>
           <a:lstStyle/>
@@ -20352,7 +19944,7 @@
                 </a:solidFill>
                 <a:latin typeface="Calibri"/>
               </a:rPr>
-              <a:t>Parole cifrate cu sare aleatorie</a:t>
+              <a:t>Parole cifrate cu salt aleatoriu</a:t>
             </a:r>
           </a:p>
         </p:txBody>
@@ -20400,7 +19992,6 @@
           <a:lstStyle/>
           <a:p>
             <a:pPr algn="ctr"/>
-            <a:endParaRPr/>
           </a:p>
         </p:txBody>
       </p:sp>
@@ -20445,7 +20036,6 @@
           <a:lstStyle/>
           <a:p>
             <a:pPr algn="ctr"/>
-            <a:endParaRPr/>
           </a:p>
         </p:txBody>
       </p:sp>
@@ -20466,7 +20056,7 @@
           <a:noFill/>
         </p:spPr>
         <p:txBody>
-          <a:bodyPr wrap="square" lIns="0" tIns="0" rIns="0" bIns="0" anchor="ctr">
+          <a:bodyPr wrap="square" lIns="0" rIns="0" tIns="0" bIns="0" anchor="ctr">
             <a:spAutoFit/>
           </a:bodyPr>
           <a:lstStyle/>
@@ -20501,7 +20091,7 @@
           <a:noFill/>
         </p:spPr>
         <p:txBody>
-          <a:bodyPr wrap="square" lIns="0" tIns="0" rIns="0" bIns="0" anchor="t">
+          <a:bodyPr wrap="square" lIns="0" rIns="0" tIns="0" bIns="0" anchor="t">
             <a:spAutoFit/>
           </a:bodyPr>
           <a:lstStyle/>
@@ -20562,7 +20152,6 @@
           <a:lstStyle/>
           <a:p>
             <a:pPr algn="ctr"/>
-            <a:endParaRPr/>
           </a:p>
         </p:txBody>
       </p:sp>
@@ -20607,7 +20196,6 @@
           <a:lstStyle/>
           <a:p>
             <a:pPr algn="ctr"/>
-            <a:endParaRPr/>
           </a:p>
         </p:txBody>
       </p:sp>
@@ -20628,7 +20216,7 @@
           <a:noFill/>
         </p:spPr>
         <p:txBody>
-          <a:bodyPr wrap="square" lIns="0" tIns="0" rIns="0" bIns="0" anchor="ctr">
+          <a:bodyPr wrap="square" lIns="0" rIns="0" tIns="0" bIns="0" anchor="ctr">
             <a:spAutoFit/>
           </a:bodyPr>
           <a:lstStyle/>
@@ -20663,7 +20251,7 @@
           <a:noFill/>
         </p:spPr>
         <p:txBody>
-          <a:bodyPr wrap="square" lIns="0" tIns="0" rIns="0" bIns="0" anchor="t">
+          <a:bodyPr wrap="square" lIns="0" rIns="0" tIns="0" bIns="0" anchor="t">
             <a:spAutoFit/>
           </a:bodyPr>
           <a:lstStyle/>
@@ -20722,7 +20310,6 @@
           <a:lstStyle/>
           <a:p>
             <a:pPr algn="ctr"/>
-            <a:endParaRPr/>
           </a:p>
         </p:txBody>
       </p:sp>
@@ -20743,7 +20330,7 @@
           <a:noFill/>
         </p:spPr>
         <p:txBody>
-          <a:bodyPr wrap="square" lIns="0" tIns="0" rIns="0" bIns="0" anchor="t">
+          <a:bodyPr wrap="square" lIns="0" rIns="0" tIns="0" bIns="0" anchor="t">
             <a:spAutoFit/>
           </a:bodyPr>
           <a:lstStyle/>
@@ -20778,7 +20365,7 @@
           <a:noFill/>
         </p:spPr>
         <p:txBody>
-          <a:bodyPr wrap="square" lIns="0" tIns="0" rIns="0" bIns="0" anchor="t">
+          <a:bodyPr wrap="square" lIns="0" rIns="0" tIns="0" bIns="0" anchor="t">
             <a:spAutoFit/>
           </a:bodyPr>
           <a:lstStyle/>
